--- a/毕业论文/毕业答辩(系统开发）.pptx
+++ b/毕业论文/毕业答辩(系统开发）.pptx
@@ -144,12 +144,12 @@
   <p:extLst>
     <p:ext uri="{EFAFB233-063F-42B5-8137-9DF3F51BA10A}">
       <p15:sldGuideLst xmlns:p15="http://schemas.microsoft.com/office/powerpoint/2012/main">
-        <p15:guide id="1" orient="horz" pos="2188" userDrawn="1">
+        <p15:guide id="1" orient="horz" pos="2200" userDrawn="1">
           <p15:clr>
             <a:srgbClr val="A4A3A4"/>
           </p15:clr>
         </p15:guide>
-        <p15:guide id="2" pos="3840" userDrawn="1">
+        <p15:guide id="2" pos="3874" userDrawn="1">
           <p15:clr>
             <a:srgbClr val="A4A3A4"/>
           </p15:clr>
@@ -7245,9 +7245,9 @@
         <p:grpSpPr>
           <a:xfrm>
             <a:off x="1017256" y="1593863"/>
-            <a:ext cx="2956185" cy="1849147"/>
+            <a:ext cx="2956185" cy="1592607"/>
             <a:chOff x="595045" y="2045185"/>
-            <a:chExt cx="2956185" cy="1849147"/>
+            <a:chExt cx="2956185" cy="1592607"/>
           </a:xfrm>
         </p:grpSpPr>
         <p:sp>
@@ -7258,8 +7258,8 @@
           </p:nvSpPr>
           <p:spPr>
             <a:xfrm>
-              <a:off x="1424355" y="2045185"/>
-              <a:ext cx="2126615" cy="460375"/>
+              <a:off x="1026210" y="2045185"/>
+              <a:ext cx="2524760" cy="460375"/>
             </a:xfrm>
             <a:prstGeom prst="rect">
               <a:avLst/>
@@ -7284,7 +7284,7 @@
                   <a:cs typeface="+mn-ea"/>
                   <a:sym typeface="+mn-lt"/>
                 </a:rPr>
-                <a:t>客户</a:t>
+                <a:t>用户信息</a:t>
               </a:r>
               <a:r>
                 <a:rPr lang="zh-CN" altLang="en-US" sz="2400" dirty="0">
@@ -7297,7 +7297,7 @@
                   <a:cs typeface="+mn-ea"/>
                   <a:sym typeface="+mn-lt"/>
                 </a:rPr>
-                <a:t>信息管理</a:t>
+                <a:t>修改</a:t>
               </a:r>
               <a:endParaRPr lang="zh-CN" altLang="en-US" sz="2400" dirty="0">
                 <a:solidFill>
@@ -7321,7 +7321,7 @@
           <p:spPr>
             <a:xfrm>
               <a:off x="595045" y="2520827"/>
-              <a:ext cx="2956185" cy="1373505"/>
+              <a:ext cx="2956185" cy="1116965"/>
             </a:xfrm>
             <a:prstGeom prst="rect">
               <a:avLst/>
@@ -7350,25 +7350,8 @@
                   <a:cs typeface="+mn-ea"/>
                   <a:sym typeface="+mn-lt"/>
                 </a:rPr>
-                <a:t>对客户信息进行管理，包括客户信息的增加、删除、更改和查询客户信息。</a:t>
+                <a:t>系统支持对已经注册的用户，提供基本的信息修改，包括用户的名称、用户头像、个性签名等</a:t>
               </a:r>
-              <a:endParaRPr lang="zh-CN" altLang="en-US" sz="1400" spc="300" dirty="0">
-                <a:solidFill>
-                  <a:schemeClr val="tx1">
-                    <a:lumMod val="75000"/>
-                    <a:lumOff val="25000"/>
-                  </a:schemeClr>
-                </a:solidFill>
-                <a:cs typeface="+mn-ea"/>
-                <a:sym typeface="+mn-lt"/>
-              </a:endParaRPr>
-            </a:p>
-            <a:p>
-              <a:pPr algn="l" fontAlgn="auto">
-                <a:lnSpc>
-                  <a:spcPts val="2000"/>
-                </a:lnSpc>
-              </a:pPr>
               <a:r>
                 <a:rPr lang="zh-CN" altLang="en-US" sz="1400" spc="300" dirty="0">
                   <a:solidFill>
@@ -7380,7 +7363,7 @@
                   <a:cs typeface="+mn-ea"/>
                   <a:sym typeface="+mn-lt"/>
                 </a:rPr>
-                <a:t>对客户进行分类，客户分为企业级客户和个人级客户。</a:t>
+                <a:t>信息</a:t>
               </a:r>
               <a:endParaRPr lang="zh-CN" altLang="en-US" sz="1400" spc="300" dirty="0">
                 <a:solidFill>
@@ -7405,9 +7388,9 @@
         <p:grpSpPr>
           <a:xfrm>
             <a:off x="956931" y="4146467"/>
-            <a:ext cx="2956185" cy="2618767"/>
+            <a:ext cx="2956185" cy="1079527"/>
             <a:chOff x="595045" y="2045185"/>
-            <a:chExt cx="2956185" cy="2618767"/>
+            <a:chExt cx="2956185" cy="1079527"/>
           </a:xfrm>
         </p:grpSpPr>
         <p:sp>
@@ -7444,7 +7427,20 @@
                   <a:cs typeface="+mn-ea"/>
                   <a:sym typeface="+mn-lt"/>
                 </a:rPr>
-                <a:t>流失客户管理</a:t>
+                <a:t>单聊和</a:t>
+              </a:r>
+              <a:r>
+                <a:rPr lang="zh-CN" altLang="en-US" sz="2400" dirty="0">
+                  <a:solidFill>
+                    <a:schemeClr val="tx1">
+                      <a:lumMod val="85000"/>
+                      <a:lumOff val="15000"/>
+                    </a:schemeClr>
+                  </a:solidFill>
+                  <a:cs typeface="+mn-ea"/>
+                  <a:sym typeface="+mn-lt"/>
+                </a:rPr>
+                <a:t>群聊</a:t>
               </a:r>
               <a:endParaRPr lang="zh-CN" altLang="en-US" sz="2400" dirty="0">
                 <a:solidFill>
@@ -7468,7 +7464,7 @@
           <p:spPr>
             <a:xfrm>
               <a:off x="595045" y="2520827"/>
-              <a:ext cx="2956185" cy="2143125"/>
+              <a:ext cx="2956185" cy="603885"/>
             </a:xfrm>
             <a:prstGeom prst="rect">
               <a:avLst/>
@@ -7497,7 +7493,20 @@
                   <a:cs typeface="+mn-ea"/>
                   <a:sym typeface="+mn-lt"/>
                 </a:rPr>
-                <a:t>能够记录客户流失原因，有利于公司进行反省。</a:t>
+                <a:t>单聊：一对一</a:t>
+              </a:r>
+              <a:r>
+                <a:rPr lang="zh-CN" altLang="en-US" sz="1400" spc="300" dirty="0">
+                  <a:solidFill>
+                    <a:schemeClr val="tx1">
+                      <a:lumMod val="75000"/>
+                      <a:lumOff val="25000"/>
+                    </a:schemeClr>
+                  </a:solidFill>
+                  <a:cs typeface="+mn-ea"/>
+                  <a:sym typeface="+mn-lt"/>
+                </a:rPr>
+                <a:t>聊天，</a:t>
               </a:r>
               <a:endParaRPr lang="zh-CN" altLang="en-US" sz="1400" spc="300" dirty="0">
                 <a:solidFill>
@@ -7527,7 +7536,20 @@
                   <a:cs typeface="+mn-ea"/>
                   <a:sym typeface="+mn-lt"/>
                 </a:rPr>
-                <a:t>与客户进行线下交流，确定客户不再与公司发生购买关系后，在客户信息管理中可以通过流失功能按钮，这样客户信息将会进入流失客户表，并呈现在此页面中。</a:t>
+                <a:t>群聊：多对多</a:t>
+              </a:r>
+              <a:r>
+                <a:rPr lang="zh-CN" altLang="en-US" sz="1400" spc="300" dirty="0">
+                  <a:solidFill>
+                    <a:schemeClr val="tx1">
+                      <a:lumMod val="75000"/>
+                      <a:lumOff val="25000"/>
+                    </a:schemeClr>
+                  </a:solidFill>
+                  <a:cs typeface="+mn-ea"/>
+                  <a:sym typeface="+mn-lt"/>
+                </a:rPr>
+                <a:t>聊天</a:t>
               </a:r>
               <a:endParaRPr lang="zh-CN" altLang="en-US" sz="1400" spc="300" dirty="0">
                 <a:solidFill>
@@ -7552,9 +7574,9 @@
         <p:grpSpPr>
           <a:xfrm>
             <a:off x="8245179" y="1632574"/>
-            <a:ext cx="2956185" cy="1336067"/>
+            <a:ext cx="2956185" cy="2105687"/>
             <a:chOff x="595045" y="2045185"/>
-            <a:chExt cx="2956185" cy="1336067"/>
+            <a:chExt cx="2956185" cy="2105687"/>
           </a:xfrm>
         </p:grpSpPr>
         <p:sp>
@@ -7566,7 +7588,7 @@
           <p:spPr>
             <a:xfrm>
               <a:off x="595045" y="2045185"/>
-              <a:ext cx="2220595" cy="460375"/>
+              <a:ext cx="2955290" cy="460375"/>
             </a:xfrm>
             <a:prstGeom prst="rect">
               <a:avLst/>
@@ -7580,30 +7602,17 @@
             <a:lstStyle/>
             <a:p>
               <a:r>
-                <a:rPr lang="zh-CN" altLang="en-US" sz="2400" dirty="0">
+                <a:rPr lang="zh-CN" altLang="en-US" sz="2400" spc="300" dirty="0">
                   <a:solidFill>
                     <a:schemeClr val="tx1">
-                      <a:lumMod val="85000"/>
-                      <a:lumOff val="15000"/>
+                      <a:lumMod val="75000"/>
+                      <a:lumOff val="25000"/>
                     </a:schemeClr>
                   </a:solidFill>
                   <a:cs typeface="+mn-ea"/>
                   <a:sym typeface="+mn-lt"/>
                 </a:rPr>
-                <a:t>客户订单</a:t>
-              </a:r>
-              <a:r>
-                <a:rPr lang="zh-CN" altLang="en-US" sz="2400" dirty="0">
-                  <a:solidFill>
-                    <a:schemeClr val="tx1">
-                      <a:lumMod val="85000"/>
-                      <a:lumOff val="15000"/>
-                    </a:schemeClr>
-                  </a:solidFill>
-                  <a:cs typeface="+mn-ea"/>
-                  <a:sym typeface="+mn-lt"/>
-                </a:rPr>
-                <a:t>查看</a:t>
+                <a:t>好友添加和删除</a:t>
               </a:r>
               <a:endParaRPr lang="zh-CN" altLang="en-US" sz="2400" dirty="0">
                 <a:solidFill>
@@ -7627,7 +7636,7 @@
           <p:spPr>
             <a:xfrm>
               <a:off x="595045" y="2520827"/>
-              <a:ext cx="2956185" cy="860425"/>
+              <a:ext cx="2956185" cy="1630045"/>
             </a:xfrm>
             <a:prstGeom prst="rect">
               <a:avLst/>
@@ -7656,7 +7665,46 @@
                   <a:cs typeface="+mn-ea"/>
                   <a:sym typeface="+mn-lt"/>
                 </a:rPr>
-                <a:t>能够实现对订单的查看，在服务创建模块创建订单后会呈现在此。</a:t>
+                <a:t>用户可以搜索系统中已经注册的用户昵称或者</a:t>
+              </a:r>
+              <a:r>
+                <a:rPr lang="en-US" altLang="zh-CN" sz="1400" spc="300" dirty="0">
+                  <a:solidFill>
+                    <a:schemeClr val="tx1">
+                      <a:lumMod val="75000"/>
+                      <a:lumOff val="25000"/>
+                    </a:schemeClr>
+                  </a:solidFill>
+                  <a:cs typeface="+mn-ea"/>
+                  <a:sym typeface="+mn-lt"/>
+                </a:rPr>
+                <a:t>ID</a:t>
+              </a:r>
+              <a:r>
+                <a:rPr lang="zh-CN" altLang="en-US" sz="1400" spc="300" dirty="0">
+                  <a:solidFill>
+                    <a:schemeClr val="tx1">
+                      <a:lumMod val="75000"/>
+                      <a:lumOff val="25000"/>
+                    </a:schemeClr>
+                  </a:solidFill>
+                  <a:cs typeface="+mn-ea"/>
+                  <a:sym typeface="+mn-lt"/>
+                </a:rPr>
+                <a:t>号进行检索，如果存在该用户，则可以发送申请，等待对方同意，同意后即添加成功，并且可以删除</a:t>
+              </a:r>
+              <a:r>
+                <a:rPr lang="zh-CN" altLang="en-US" sz="1400" spc="300" dirty="0">
+                  <a:solidFill>
+                    <a:schemeClr val="tx1">
+                      <a:lumMod val="75000"/>
+                      <a:lumOff val="25000"/>
+                    </a:schemeClr>
+                  </a:solidFill>
+                  <a:cs typeface="+mn-ea"/>
+                  <a:sym typeface="+mn-lt"/>
+                </a:rPr>
+                <a:t>好友</a:t>
               </a:r>
               <a:endParaRPr lang="zh-CN" altLang="en-US" sz="1400" spc="300" dirty="0">
                 <a:solidFill>
@@ -7719,7 +7767,20 @@
                   <a:cs typeface="+mn-ea"/>
                   <a:sym typeface="+mn-lt"/>
                 </a:rPr>
-                <a:t>重点客户管理</a:t>
+                <a:t>聊天</a:t>
+              </a:r>
+              <a:r>
+                <a:rPr lang="zh-CN" altLang="en-US" sz="2400" dirty="0">
+                  <a:solidFill>
+                    <a:schemeClr val="tx1">
+                      <a:lumMod val="85000"/>
+                      <a:lumOff val="15000"/>
+                    </a:schemeClr>
+                  </a:solidFill>
+                  <a:cs typeface="+mn-ea"/>
+                  <a:sym typeface="+mn-lt"/>
+                </a:rPr>
+                <a:t>方式</a:t>
               </a:r>
               <a:endParaRPr lang="zh-CN" altLang="en-US" sz="2400" dirty="0">
                 <a:solidFill>
@@ -7772,7 +7833,59 @@
                   <a:cs typeface="+mn-ea"/>
                   <a:sym typeface="+mn-lt"/>
                 </a:rPr>
-                <a:t>重点客户管理，可以筛选出重点客户，根据订单表中的某个客户订单总金额来判断是否为重点客户，当客户订单总额大于10000元，自动升级成为重点客户。</a:t>
+                <a:t>目前系统支持多种聊天方式内置了几十个常用</a:t>
+              </a:r>
+              <a:r>
+                <a:rPr lang="en-US" altLang="zh-CN" sz="1400" spc="300" dirty="0">
+                  <a:solidFill>
+                    <a:schemeClr val="tx1">
+                      <a:lumMod val="75000"/>
+                      <a:lumOff val="25000"/>
+                    </a:schemeClr>
+                  </a:solidFill>
+                  <a:cs typeface="+mn-ea"/>
+                  <a:sym typeface="+mn-lt"/>
+                </a:rPr>
+                <a:t>Emoji</a:t>
+              </a:r>
+              <a:r>
+                <a:rPr lang="zh-CN" altLang="en-US" sz="1400" spc="300" dirty="0">
+                  <a:solidFill>
+                    <a:schemeClr val="tx1">
+                      <a:lumMod val="75000"/>
+                      <a:lumOff val="25000"/>
+                    </a:schemeClr>
+                  </a:solidFill>
+                  <a:cs typeface="+mn-ea"/>
+                  <a:sym typeface="+mn-lt"/>
+                </a:rPr>
+                <a:t>表情，支持各种网络表情包的添加，完全自定义自己的表情包</a:t>
+              </a:r>
+              <a:r>
+                <a:rPr lang="zh-CN" altLang="en-US" sz="1400" spc="300" dirty="0">
+                  <a:solidFill>
+                    <a:schemeClr val="tx1">
+                      <a:lumMod val="75000"/>
+                      <a:lumOff val="25000"/>
+                    </a:schemeClr>
+                  </a:solidFill>
+                  <a:cs typeface="+mn-ea"/>
+                  <a:sym typeface="+mn-lt"/>
+                </a:rPr>
+                <a:t>库，支持本地相册直接</a:t>
+              </a:r>
+              <a:r>
+                <a:rPr lang="zh-CN" altLang="en-US" sz="1400" spc="300" dirty="0">
+                  <a:solidFill>
+                    <a:schemeClr val="tx1">
+                      <a:lumMod val="75000"/>
+                      <a:lumOff val="25000"/>
+                    </a:schemeClr>
+                  </a:solidFill>
+                  <a:cs typeface="+mn-ea"/>
+                  <a:sym typeface="+mn-lt"/>
+                </a:rPr>
+                <a:t>发送</a:t>
               </a:r>
               <a:endParaRPr lang="zh-CN" altLang="en-US" sz="1400" spc="300" dirty="0">
                 <a:solidFill>
@@ -8888,14 +9001,18 @@
         <p:nvGrpSpPr>
           <p:cNvPr id="55" name="组合 54"/>
           <p:cNvGrpSpPr/>
-          <p:nvPr/>
+          <p:nvPr>
+            <p:custDataLst>
+              <p:tags r:id="rId1"/>
+            </p:custDataLst>
+          </p:nvPr>
         </p:nvGrpSpPr>
         <p:grpSpPr>
           <a:xfrm>
             <a:off x="1133908" y="1129393"/>
-            <a:ext cx="2745333" cy="5240242"/>
+            <a:ext cx="2745333" cy="4214082"/>
             <a:chOff x="1133908" y="1129393"/>
-            <a:chExt cx="2745333" cy="5240242"/>
+            <a:chExt cx="2745333" cy="4214082"/>
           </a:xfrm>
         </p:grpSpPr>
         <p:grpSp>
@@ -8930,7 +9047,11 @@
               <p:nvSpPr>
                 <p:cNvPr id="12" name="任意多边形: 形状 11"/>
                 <p:cNvSpPr/>
-                <p:nvPr/>
+                <p:nvPr>
+                  <p:custDataLst>
+                    <p:tags r:id="rId2"/>
+                  </p:custDataLst>
+                </p:nvPr>
               </p:nvSpPr>
               <p:spPr>
                 <a:xfrm>
@@ -9030,7 +9151,11 @@
               <p:nvSpPr>
                 <p:cNvPr id="14" name="任意多边形: 形状 13"/>
                 <p:cNvSpPr/>
-                <p:nvPr/>
+                <p:nvPr>
+                  <p:custDataLst>
+                    <p:tags r:id="rId3"/>
+                  </p:custDataLst>
+                </p:nvPr>
               </p:nvSpPr>
               <p:spPr>
                 <a:xfrm>
@@ -9158,7 +9283,11 @@
               <p:nvSpPr>
                 <p:cNvPr id="15" name="任意多边形: 形状 14"/>
                 <p:cNvSpPr/>
-                <p:nvPr/>
+                <p:nvPr>
+                  <p:custDataLst>
+                    <p:tags r:id="rId4"/>
+                  </p:custDataLst>
+                </p:nvPr>
               </p:nvSpPr>
               <p:spPr>
                 <a:xfrm>
@@ -9300,10 +9429,14 @@
               <p:cNvPicPr>
                 <a:picLocks noChangeAspect="1"/>
               </p:cNvPicPr>
-              <p:nvPr/>
+              <p:nvPr>
+                <p:custDataLst>
+                  <p:tags r:id="rId5"/>
+                </p:custDataLst>
+              </p:nvPr>
             </p:nvPicPr>
             <p:blipFill>
-              <a:blip r:embed="rId1"/>
+              <a:blip r:embed="rId6"/>
               <a:stretch>
                 <a:fillRect/>
               </a:stretch>
@@ -9328,16 +9461,20 @@
           <p:grpSpPr>
             <a:xfrm>
               <a:off x="1330234" y="4007408"/>
-              <a:ext cx="2469755" cy="2362227"/>
+              <a:ext cx="2469755" cy="1336067"/>
               <a:chOff x="1548791" y="4065069"/>
-              <a:chExt cx="2469755" cy="2362227"/>
+              <a:chExt cx="2469755" cy="1336067"/>
             </a:xfrm>
           </p:grpSpPr>
           <p:sp>
             <p:nvSpPr>
               <p:cNvPr id="46" name="文本框 45"/>
               <p:cNvSpPr txBox="1"/>
-              <p:nvPr/>
+              <p:nvPr>
+                <p:custDataLst>
+                  <p:tags r:id="rId7"/>
+                </p:custDataLst>
+              </p:nvPr>
             </p:nvSpPr>
             <p:spPr>
               <a:xfrm>
@@ -9367,7 +9504,20 @@
                     <a:cs typeface="+mn-ea"/>
                     <a:sym typeface="+mn-lt"/>
                   </a:rPr>
-                  <a:t>用户管理</a:t>
+                  <a:t>创建</a:t>
+                </a:r>
+                <a:r>
+                  <a:rPr lang="zh-CN" altLang="en-US" sz="2400" dirty="0">
+                    <a:solidFill>
+                      <a:schemeClr val="tx1">
+                        <a:lumMod val="85000"/>
+                        <a:lumOff val="15000"/>
+                      </a:schemeClr>
+                    </a:solidFill>
+                    <a:cs typeface="+mn-ea"/>
+                    <a:sym typeface="+mn-lt"/>
+                  </a:rPr>
+                  <a:t>群聊</a:t>
                 </a:r>
                 <a:endParaRPr lang="zh-CN" altLang="en-US" sz="2400" dirty="0">
                   <a:solidFill>
@@ -9386,12 +9536,16 @@
             <p:nvSpPr>
               <p:cNvPr id="47" name="文本框 46"/>
               <p:cNvSpPr txBox="1"/>
-              <p:nvPr/>
+              <p:nvPr>
+                <p:custDataLst>
+                  <p:tags r:id="rId8"/>
+                </p:custDataLst>
+              </p:nvPr>
             </p:nvSpPr>
             <p:spPr>
               <a:xfrm>
                 <a:off x="1548791" y="4540711"/>
-                <a:ext cx="2469755" cy="1886585"/>
+                <a:ext cx="2469755" cy="860425"/>
               </a:xfrm>
               <a:prstGeom prst="rect">
                 <a:avLst/>
@@ -9420,27 +9574,10 @@
                     <a:cs typeface="+mn-ea"/>
                     <a:sym typeface="+mn-lt"/>
                   </a:rPr>
-                  <a:t>实现用户的增加、删除、更改、查询。</a:t>
+                  <a:t>用户可以选择好友进行创建群聊，至少选择</a:t>
                 </a:r>
-                <a:endParaRPr lang="zh-CN" altLang="en-US" sz="1400" spc="300" dirty="0">
-                  <a:solidFill>
-                    <a:schemeClr val="tx1">
-                      <a:lumMod val="75000"/>
-                      <a:lumOff val="25000"/>
-                    </a:schemeClr>
-                  </a:solidFill>
-                  <a:cs typeface="+mn-ea"/>
-                  <a:sym typeface="+mn-lt"/>
-                </a:endParaRPr>
-              </a:p>
-              <a:p>
-                <a:pPr algn="l" fontAlgn="auto">
-                  <a:lnSpc>
-                    <a:spcPts val="2000"/>
-                  </a:lnSpc>
-                </a:pPr>
                 <a:r>
-                  <a:rPr lang="zh-CN" altLang="en-US" sz="1400" spc="300" dirty="0">
+                  <a:rPr lang="en-US" altLang="zh-CN" sz="1400" spc="300" dirty="0">
                     <a:solidFill>
                       <a:schemeClr val="tx1">
                         <a:lumMod val="75000"/>
@@ -9450,7 +9587,7 @@
                     <a:cs typeface="+mn-ea"/>
                     <a:sym typeface="+mn-lt"/>
                   </a:rPr>
-                  <a:t>给予每个用户不同的</a:t>
+                  <a:t>2</a:t>
                 </a:r>
                 <a:r>
                   <a:rPr lang="zh-CN" altLang="en-US" sz="1400" spc="300" dirty="0">
@@ -9463,25 +9600,8 @@
                     <a:cs typeface="+mn-ea"/>
                     <a:sym typeface="+mn-lt"/>
                   </a:rPr>
-                  <a:t>角色。</a:t>
+                  <a:t>位好友才可以创建</a:t>
                 </a:r>
-                <a:endParaRPr lang="zh-CN" altLang="en-US" sz="1400" spc="300" dirty="0">
-                  <a:solidFill>
-                    <a:schemeClr val="tx1">
-                      <a:lumMod val="75000"/>
-                      <a:lumOff val="25000"/>
-                    </a:schemeClr>
-                  </a:solidFill>
-                  <a:cs typeface="+mn-ea"/>
-                  <a:sym typeface="+mn-lt"/>
-                </a:endParaRPr>
-              </a:p>
-              <a:p>
-                <a:pPr algn="l" fontAlgn="auto">
-                  <a:lnSpc>
-                    <a:spcPts val="2000"/>
-                  </a:lnSpc>
-                </a:pPr>
                 <a:r>
                   <a:rPr lang="zh-CN" altLang="en-US" sz="1400" spc="300" dirty="0">
                     <a:solidFill>
@@ -9493,7 +9613,7 @@
                     <a:cs typeface="+mn-ea"/>
                     <a:sym typeface="+mn-lt"/>
                   </a:rPr>
-                  <a:t>登录系统时需使用用户名和密码进行比对，正确才能登录入系统。</a:t>
+                  <a:t>群聊</a:t>
                 </a:r>
                 <a:endParaRPr lang="zh-CN" altLang="en-US" sz="1400" spc="300" dirty="0">
                   <a:solidFill>
@@ -9514,7 +9634,11 @@
         <p:nvGrpSpPr>
           <p:cNvPr id="56" name="组合 55"/>
           <p:cNvGrpSpPr/>
-          <p:nvPr/>
+          <p:nvPr>
+            <p:custDataLst>
+              <p:tags r:id="rId9"/>
+            </p:custDataLst>
+          </p:nvPr>
         </p:nvGrpSpPr>
         <p:grpSpPr>
           <a:xfrm>
@@ -9556,7 +9680,11 @@
               <p:nvSpPr>
                 <p:cNvPr id="32" name="任意多边形: 形状 31"/>
                 <p:cNvSpPr/>
-                <p:nvPr/>
+                <p:nvPr>
+                  <p:custDataLst>
+                    <p:tags r:id="rId10"/>
+                  </p:custDataLst>
+                </p:nvPr>
               </p:nvSpPr>
               <p:spPr>
                 <a:xfrm>
@@ -9656,7 +9784,11 @@
               <p:nvSpPr>
                 <p:cNvPr id="33" name="任意多边形: 形状 32"/>
                 <p:cNvSpPr/>
-                <p:nvPr/>
+                <p:nvPr>
+                  <p:custDataLst>
+                    <p:tags r:id="rId11"/>
+                  </p:custDataLst>
+                </p:nvPr>
               </p:nvSpPr>
               <p:spPr>
                 <a:xfrm>
@@ -9784,7 +9916,11 @@
               <p:nvSpPr>
                 <p:cNvPr id="34" name="任意多边形: 形状 33"/>
                 <p:cNvSpPr/>
-                <p:nvPr/>
+                <p:nvPr>
+                  <p:custDataLst>
+                    <p:tags r:id="rId12"/>
+                  </p:custDataLst>
+                </p:nvPr>
               </p:nvSpPr>
               <p:spPr>
                 <a:xfrm>
@@ -9926,10 +10062,14 @@
               <p:cNvPicPr>
                 <a:picLocks noChangeAspect="1"/>
               </p:cNvPicPr>
-              <p:nvPr/>
+              <p:nvPr>
+                <p:custDataLst>
+                  <p:tags r:id="rId13"/>
+                </p:custDataLst>
+              </p:nvPr>
             </p:nvPicPr>
             <p:blipFill>
-              <a:blip r:embed="rId2"/>
+              <a:blip r:embed="rId14"/>
               <a:stretch>
                 <a:fillRect/>
               </a:stretch>
@@ -9953,22 +10093,26 @@
           </p:nvGrpSpPr>
           <p:grpSpPr>
             <a:xfrm>
-              <a:off x="4884376" y="4007408"/>
-              <a:ext cx="2469755" cy="1592607"/>
-              <a:chOff x="1548791" y="4065069"/>
-              <a:chExt cx="2469755" cy="1592607"/>
+              <a:off x="4884376" y="4022648"/>
+              <a:ext cx="2469755" cy="1577367"/>
+              <a:chOff x="1548791" y="4080309"/>
+              <a:chExt cx="2469755" cy="1577367"/>
             </a:xfrm>
           </p:grpSpPr>
           <p:sp>
             <p:nvSpPr>
               <p:cNvPr id="50" name="文本框 49"/>
               <p:cNvSpPr txBox="1"/>
-              <p:nvPr/>
+              <p:nvPr>
+                <p:custDataLst>
+                  <p:tags r:id="rId15"/>
+                </p:custDataLst>
+              </p:nvPr>
             </p:nvSpPr>
             <p:spPr>
               <a:xfrm>
-                <a:off x="1977553" y="4065069"/>
-                <a:ext cx="1612231" cy="460375"/>
+                <a:off x="1629436" y="4080309"/>
+                <a:ext cx="2333625" cy="460375"/>
               </a:xfrm>
               <a:prstGeom prst="rect">
                 <a:avLst/>
@@ -9993,7 +10137,7 @@
                     <a:cs typeface="+mn-ea"/>
                     <a:sym typeface="+mn-lt"/>
                   </a:rPr>
-                  <a:t>角色</a:t>
+                  <a:t>群聊信息</a:t>
                 </a:r>
                 <a:r>
                   <a:rPr lang="zh-CN" altLang="en-US" sz="2400" dirty="0">
@@ -10006,7 +10150,7 @@
                     <a:cs typeface="+mn-ea"/>
                     <a:sym typeface="+mn-lt"/>
                   </a:rPr>
-                  <a:t>管理</a:t>
+                  <a:t>设置</a:t>
                 </a:r>
                 <a:endParaRPr lang="zh-CN" altLang="en-US" sz="2400" dirty="0">
                   <a:solidFill>
@@ -10025,7 +10169,11 @@
             <p:nvSpPr>
               <p:cNvPr id="51" name="文本框 50"/>
               <p:cNvSpPr txBox="1"/>
-              <p:nvPr/>
+              <p:nvPr>
+                <p:custDataLst>
+                  <p:tags r:id="rId16"/>
+                </p:custDataLst>
+              </p:nvPr>
             </p:nvSpPr>
             <p:spPr>
               <a:xfrm>
@@ -10059,7 +10207,20 @@
                     <a:cs typeface="+mn-ea"/>
                     <a:sym typeface="+mn-lt"/>
                   </a:rPr>
-                  <a:t>能够实现对角色的权限限制，各个角色拥有不同的权限，超级管理员拥有所有权限。</a:t>
+                  <a:t>只有群主具有群聊的设置权限，包括用户踢出权限，群主无法退出</a:t>
+                </a:r>
+                <a:r>
+                  <a:rPr lang="zh-CN" altLang="en-US" sz="1400" spc="300" dirty="0">
+                    <a:solidFill>
+                      <a:schemeClr val="tx1">
+                        <a:lumMod val="75000"/>
+                        <a:lumOff val="25000"/>
+                      </a:schemeClr>
+                    </a:solidFill>
+                    <a:cs typeface="+mn-ea"/>
+                    <a:sym typeface="+mn-lt"/>
+                  </a:rPr>
+                  <a:t>群聊</a:t>
                 </a:r>
                 <a:endParaRPr lang="zh-CN" altLang="en-US" sz="1400" spc="300" dirty="0">
                   <a:solidFill>
@@ -10080,14 +10241,18 @@
         <p:nvGrpSpPr>
           <p:cNvPr id="57" name="组合 56"/>
           <p:cNvGrpSpPr/>
-          <p:nvPr/>
+          <p:nvPr>
+            <p:custDataLst>
+              <p:tags r:id="rId17"/>
+            </p:custDataLst>
+          </p:nvPr>
         </p:nvGrpSpPr>
         <p:grpSpPr>
           <a:xfrm>
             <a:off x="8312761" y="1129393"/>
-            <a:ext cx="2745333" cy="4470622"/>
+            <a:ext cx="2745333" cy="4214082"/>
             <a:chOff x="8312761" y="1129393"/>
-            <a:chExt cx="2745333" cy="4470622"/>
+            <a:chExt cx="2745333" cy="4214082"/>
           </a:xfrm>
         </p:grpSpPr>
         <p:grpSp>
@@ -10122,7 +10287,11 @@
               <p:nvSpPr>
                 <p:cNvPr id="38" name="任意多边形: 形状 37"/>
                 <p:cNvSpPr/>
-                <p:nvPr/>
+                <p:nvPr>
+                  <p:custDataLst>
+                    <p:tags r:id="rId18"/>
+                  </p:custDataLst>
+                </p:nvPr>
               </p:nvSpPr>
               <p:spPr>
                 <a:xfrm>
@@ -10222,7 +10391,11 @@
               <p:nvSpPr>
                 <p:cNvPr id="39" name="任意多边形: 形状 38"/>
                 <p:cNvSpPr/>
-                <p:nvPr/>
+                <p:nvPr>
+                  <p:custDataLst>
+                    <p:tags r:id="rId19"/>
+                  </p:custDataLst>
+                </p:nvPr>
               </p:nvSpPr>
               <p:spPr>
                 <a:xfrm>
@@ -10350,7 +10523,11 @@
               <p:nvSpPr>
                 <p:cNvPr id="40" name="任意多边形: 形状 39"/>
                 <p:cNvSpPr/>
-                <p:nvPr/>
+                <p:nvPr>
+                  <p:custDataLst>
+                    <p:tags r:id="rId20"/>
+                  </p:custDataLst>
+                </p:nvPr>
               </p:nvSpPr>
               <p:spPr>
                 <a:xfrm>
@@ -10492,10 +10669,14 @@
               <p:cNvPicPr>
                 <a:picLocks noChangeAspect="1"/>
               </p:cNvPicPr>
-              <p:nvPr/>
+              <p:nvPr>
+                <p:custDataLst>
+                  <p:tags r:id="rId21"/>
+                </p:custDataLst>
+              </p:nvPr>
             </p:nvPicPr>
             <p:blipFill>
-              <a:blip r:embed="rId3"/>
+              <a:blip r:embed="rId22"/>
               <a:stretch>
                 <a:fillRect/>
               </a:stretch>
@@ -10520,21 +10701,25 @@
           <p:grpSpPr>
             <a:xfrm>
               <a:off x="8438517" y="4007408"/>
-              <a:ext cx="2469755" cy="1592607"/>
+              <a:ext cx="2469755" cy="1336067"/>
               <a:chOff x="1548791" y="4065069"/>
-              <a:chExt cx="2469755" cy="1592607"/>
+              <a:chExt cx="2469755" cy="1336067"/>
             </a:xfrm>
           </p:grpSpPr>
           <p:sp>
             <p:nvSpPr>
               <p:cNvPr id="53" name="文本框 52"/>
               <p:cNvSpPr txBox="1"/>
-              <p:nvPr/>
+              <p:nvPr>
+                <p:custDataLst>
+                  <p:tags r:id="rId23"/>
+                </p:custDataLst>
+              </p:nvPr>
             </p:nvSpPr>
             <p:spPr>
               <a:xfrm>
-                <a:off x="1977553" y="4065069"/>
-                <a:ext cx="1612231" cy="460375"/>
+                <a:off x="1630071" y="4065069"/>
+                <a:ext cx="2242185" cy="460375"/>
               </a:xfrm>
               <a:prstGeom prst="rect">
                 <a:avLst/>
@@ -10559,7 +10744,20 @@
                     <a:cs typeface="+mn-ea"/>
                     <a:sym typeface="+mn-lt"/>
                   </a:rPr>
-                  <a:t>资源管理</a:t>
+                  <a:t>版本信息</a:t>
+                </a:r>
+                <a:r>
+                  <a:rPr lang="zh-CN" altLang="en-US" sz="2400" dirty="0">
+                    <a:solidFill>
+                      <a:schemeClr val="tx1">
+                        <a:lumMod val="85000"/>
+                        <a:lumOff val="15000"/>
+                      </a:schemeClr>
+                    </a:solidFill>
+                    <a:cs typeface="+mn-ea"/>
+                    <a:sym typeface="+mn-lt"/>
+                  </a:rPr>
+                  <a:t>查看</a:t>
                 </a:r>
                 <a:endParaRPr lang="zh-CN" altLang="en-US" sz="2400" dirty="0">
                   <a:solidFill>
@@ -10578,12 +10776,16 @@
             <p:nvSpPr>
               <p:cNvPr id="54" name="文本框 53"/>
               <p:cNvSpPr txBox="1"/>
-              <p:nvPr/>
+              <p:nvPr>
+                <p:custDataLst>
+                  <p:tags r:id="rId24"/>
+                </p:custDataLst>
+              </p:nvPr>
             </p:nvSpPr>
             <p:spPr>
               <a:xfrm>
                 <a:off x="1548791" y="4540711"/>
-                <a:ext cx="2469755" cy="1116965"/>
+                <a:ext cx="2469755" cy="860425"/>
               </a:xfrm>
               <a:prstGeom prst="rect">
                 <a:avLst/>
@@ -10612,7 +10814,20 @@
                     <a:cs typeface="+mn-ea"/>
                     <a:sym typeface="+mn-lt"/>
                   </a:rPr>
-                  <a:t>实现编辑各个权限具体所拥有的权限名称，权限内容备注，设置权限是否可用。</a:t>
+                  <a:t>可以查看本应用的一下基本信息，包括版本号，发布者姓名</a:t>
+                </a:r>
+                <a:r>
+                  <a:rPr lang="zh-CN" altLang="en-US" sz="1400" spc="300" dirty="0">
+                    <a:solidFill>
+                      <a:schemeClr val="tx1">
+                        <a:lumMod val="75000"/>
+                        <a:lumOff val="25000"/>
+                      </a:schemeClr>
+                    </a:solidFill>
+                    <a:cs typeface="+mn-ea"/>
+                    <a:sym typeface="+mn-lt"/>
+                  </a:rPr>
+                  <a:t>等。</a:t>
                 </a:r>
                 <a:endParaRPr lang="zh-CN" altLang="en-US" sz="1400" spc="300" dirty="0">
                   <a:solidFill>
@@ -10631,7 +10846,7 @@
       </p:grpSp>
     </p:spTree>
     <p:custDataLst>
-      <p:tags r:id="rId4"/>
+      <p:tags r:id="rId25"/>
     </p:custDataLst>
   </p:cSld>
   <p:clrMapOvr>
@@ -11297,21 +11512,29 @@
         <p:nvGrpSpPr>
           <p:cNvPr id="15" name="组合 14"/>
           <p:cNvGrpSpPr/>
-          <p:nvPr/>
+          <p:nvPr>
+            <p:custDataLst>
+              <p:tags r:id="rId2"/>
+            </p:custDataLst>
+          </p:nvPr>
         </p:nvGrpSpPr>
         <p:grpSpPr>
           <a:xfrm>
             <a:off x="5759450" y="1744177"/>
-            <a:ext cx="5546128" cy="1336067"/>
+            <a:ext cx="5546128" cy="1079527"/>
             <a:chOff x="595045" y="2045185"/>
-            <a:chExt cx="5546128" cy="1336067"/>
+            <a:chExt cx="5546128" cy="1079527"/>
           </a:xfrm>
         </p:grpSpPr>
         <p:sp>
           <p:nvSpPr>
             <p:cNvPr id="21" name="文本框 20"/>
             <p:cNvSpPr txBox="1"/>
-            <p:nvPr/>
+            <p:nvPr>
+              <p:custDataLst>
+                <p:tags r:id="rId3"/>
+              </p:custDataLst>
+            </p:nvPr>
           </p:nvSpPr>
           <p:spPr>
             <a:xfrm>
@@ -11340,20 +11563,7 @@
                   <a:cs typeface="+mn-ea"/>
                   <a:sym typeface="+mn-lt"/>
                 </a:rPr>
-                <a:t>营销机会</a:t>
-              </a:r>
-              <a:r>
-                <a:rPr lang="zh-CN" altLang="en-US" sz="2400" dirty="0">
-                  <a:solidFill>
-                    <a:schemeClr val="tx1">
-                      <a:lumMod val="85000"/>
-                      <a:lumOff val="15000"/>
-                    </a:schemeClr>
-                  </a:solidFill>
-                  <a:cs typeface="+mn-ea"/>
-                  <a:sym typeface="+mn-lt"/>
-                </a:rPr>
-                <a:t>管理</a:t>
+                <a:t>朋友圈发布</a:t>
               </a:r>
               <a:endParaRPr lang="zh-CN" altLang="en-US" sz="2400" dirty="0">
                 <a:solidFill>
@@ -11372,12 +11582,144 @@
           <p:nvSpPr>
             <p:cNvPr id="22" name="文本框 21"/>
             <p:cNvSpPr txBox="1"/>
-            <p:nvPr/>
+            <p:nvPr>
+              <p:custDataLst>
+                <p:tags r:id="rId4"/>
+              </p:custDataLst>
+            </p:nvPr>
           </p:nvSpPr>
           <p:spPr>
             <a:xfrm>
               <a:off x="595045" y="2520827"/>
-              <a:ext cx="5546128" cy="860425"/>
+              <a:ext cx="5546128" cy="603885"/>
+            </a:xfrm>
+            <a:prstGeom prst="rect">
+              <a:avLst/>
+            </a:prstGeom>
+            <a:noFill/>
+          </p:spPr>
+          <p:txBody>
+            <a:bodyPr wrap="square" rtlCol="0">
+              <a:spAutoFit/>
+            </a:bodyPr>
+            <a:lstStyle/>
+            <a:p>
+              <a:pPr algn="l" fontAlgn="auto">
+                <a:lnSpc>
+                  <a:spcPts val="2000"/>
+                </a:lnSpc>
+              </a:pPr>
+              <a:r>
+                <a:rPr lang="zh-CN" altLang="en-US" sz="1400" spc="300" dirty="0">
+                  <a:solidFill>
+                    <a:schemeClr val="tx1">
+                      <a:lumMod val="75000"/>
+                      <a:lumOff val="25000"/>
+                    </a:schemeClr>
+                  </a:solidFill>
+                  <a:cs typeface="+mn-ea"/>
+                  <a:sym typeface="+mn-lt"/>
+                </a:rPr>
+                <a:t>用户可以发布自己的朋友圈，记录生活，支持发布图片，发布后自己的好友可见</a:t>
+              </a:r>
+              <a:endParaRPr lang="zh-CN" altLang="en-US" sz="1400" spc="300" dirty="0">
+                <a:solidFill>
+                  <a:schemeClr val="tx1">
+                    <a:lumMod val="75000"/>
+                    <a:lumOff val="25000"/>
+                  </a:schemeClr>
+                </a:solidFill>
+                <a:cs typeface="+mn-ea"/>
+                <a:sym typeface="+mn-lt"/>
+              </a:endParaRPr>
+            </a:p>
+          </p:txBody>
+        </p:sp>
+      </p:grpSp>
+      <p:grpSp>
+        <p:nvGrpSpPr>
+          <p:cNvPr id="23" name="组合 22"/>
+          <p:cNvGrpSpPr/>
+          <p:nvPr>
+            <p:custDataLst>
+              <p:tags r:id="rId5"/>
+            </p:custDataLst>
+          </p:nvPr>
+        </p:nvGrpSpPr>
+        <p:grpSpPr>
+          <a:xfrm>
+            <a:off x="5759450" y="3279924"/>
+            <a:ext cx="5546128" cy="1079527"/>
+            <a:chOff x="595045" y="2045185"/>
+            <a:chExt cx="5546128" cy="1079527"/>
+          </a:xfrm>
+        </p:grpSpPr>
+        <p:sp>
+          <p:nvSpPr>
+            <p:cNvPr id="24" name="文本框 23"/>
+            <p:cNvSpPr txBox="1"/>
+            <p:nvPr>
+              <p:custDataLst>
+                <p:tags r:id="rId6"/>
+              </p:custDataLst>
+            </p:nvPr>
+          </p:nvSpPr>
+          <p:spPr>
+            <a:xfrm>
+              <a:off x="595045" y="2045185"/>
+              <a:ext cx="2139315" cy="460375"/>
+            </a:xfrm>
+            <a:prstGeom prst="rect">
+              <a:avLst/>
+            </a:prstGeom>
+            <a:noFill/>
+          </p:spPr>
+          <p:txBody>
+            <a:bodyPr wrap="square" rtlCol="0">
+              <a:spAutoFit/>
+            </a:bodyPr>
+            <a:lstStyle/>
+            <a:p>
+              <a:r>
+                <a:rPr lang="zh-CN" altLang="en-US" sz="2400" dirty="0">
+                  <a:solidFill>
+                    <a:schemeClr val="tx1">
+                      <a:lumMod val="85000"/>
+                      <a:lumOff val="15000"/>
+                    </a:schemeClr>
+                  </a:solidFill>
+                  <a:cs typeface="+mn-ea"/>
+                  <a:sym typeface="+mn-lt"/>
+                </a:rPr>
+                <a:t>点赞和评论</a:t>
+              </a:r>
+              <a:endParaRPr lang="zh-CN" altLang="en-US" sz="2400" dirty="0">
+                <a:solidFill>
+                  <a:schemeClr val="tx1">
+                    <a:lumMod val="85000"/>
+                    <a:lumOff val="15000"/>
+                  </a:schemeClr>
+                </a:solidFill>
+                <a:cs typeface="+mn-ea"/>
+                <a:sym typeface="+mn-lt"/>
+              </a:endParaRPr>
+            </a:p>
+          </p:txBody>
+        </p:sp>
+        <p:sp>
+          <p:nvSpPr>
+            <p:cNvPr id="25" name="文本框 24"/>
+            <p:cNvSpPr txBox="1"/>
+            <p:nvPr>
+              <p:custDataLst>
+                <p:tags r:id="rId7"/>
+              </p:custDataLst>
+            </p:nvPr>
+          </p:nvSpPr>
+          <p:spPr>
+            <a:xfrm>
+              <a:off x="595045" y="2520827"/>
+              <a:ext cx="5546128" cy="603885"/>
             </a:xfrm>
             <a:prstGeom prst="rect">
               <a:avLst/>
@@ -11406,263 +11748,7 @@
                   <a:cs typeface="+mn-ea"/>
                   <a:sym typeface="+mn-lt"/>
                 </a:rPr>
-                <a:t>实现记录对于每个客户的概述，包括客户名称，客户来源</a:t>
-              </a:r>
-              <a:r>
-                <a:rPr lang="zh-CN" altLang="en-US" sz="1400" spc="300" dirty="0">
-                  <a:solidFill>
-                    <a:schemeClr val="tx1">
-                      <a:lumMod val="75000"/>
-                      <a:lumOff val="25000"/>
-                    </a:schemeClr>
-                  </a:solidFill>
-                  <a:cs typeface="+mn-ea"/>
-                  <a:sym typeface="+mn-lt"/>
-                </a:rPr>
-                <a:t>等，记录对于客户的营销计划，记录客户对于公司产品的态度。</a:t>
-              </a:r>
-              <a:endParaRPr lang="zh-CN" altLang="en-US" sz="1400" spc="300" dirty="0">
-                <a:solidFill>
-                  <a:schemeClr val="tx1">
-                    <a:lumMod val="75000"/>
-                    <a:lumOff val="25000"/>
-                  </a:schemeClr>
-                </a:solidFill>
-                <a:cs typeface="+mn-ea"/>
-                <a:sym typeface="+mn-lt"/>
-              </a:endParaRPr>
-            </a:p>
-          </p:txBody>
-        </p:sp>
-      </p:grpSp>
-      <p:grpSp>
-        <p:nvGrpSpPr>
-          <p:cNvPr id="23" name="组合 22"/>
-          <p:cNvGrpSpPr/>
-          <p:nvPr/>
-        </p:nvGrpSpPr>
-        <p:grpSpPr>
-          <a:xfrm>
-            <a:off x="5759450" y="3279924"/>
-            <a:ext cx="5546128" cy="822987"/>
-            <a:chOff x="595045" y="2045185"/>
-            <a:chExt cx="5546128" cy="822987"/>
-          </a:xfrm>
-        </p:grpSpPr>
-        <p:sp>
-          <p:nvSpPr>
-            <p:cNvPr id="24" name="文本框 23"/>
-            <p:cNvSpPr txBox="1"/>
-            <p:nvPr/>
-          </p:nvSpPr>
-          <p:spPr>
-            <a:xfrm>
-              <a:off x="595045" y="2045185"/>
-              <a:ext cx="2139315" cy="460375"/>
-            </a:xfrm>
-            <a:prstGeom prst="rect">
-              <a:avLst/>
-            </a:prstGeom>
-            <a:noFill/>
-          </p:spPr>
-          <p:txBody>
-            <a:bodyPr wrap="square" rtlCol="0">
-              <a:spAutoFit/>
-            </a:bodyPr>
-            <a:lstStyle/>
-            <a:p>
-              <a:r>
-                <a:rPr lang="zh-CN" altLang="en-US" sz="2400" dirty="0">
-                  <a:solidFill>
-                    <a:schemeClr val="tx1">
-                      <a:lumMod val="85000"/>
-                      <a:lumOff val="15000"/>
-                    </a:schemeClr>
-                  </a:solidFill>
-                  <a:cs typeface="+mn-ea"/>
-                  <a:sym typeface="+mn-lt"/>
-                </a:rPr>
-                <a:t>客户开发</a:t>
-              </a:r>
-              <a:r>
-                <a:rPr lang="zh-CN" altLang="en-US" sz="2400" dirty="0">
-                  <a:solidFill>
-                    <a:schemeClr val="tx1">
-                      <a:lumMod val="85000"/>
-                      <a:lumOff val="15000"/>
-                    </a:schemeClr>
-                  </a:solidFill>
-                  <a:cs typeface="+mn-ea"/>
-                  <a:sym typeface="+mn-lt"/>
-                </a:rPr>
-                <a:t>计划</a:t>
-              </a:r>
-              <a:endParaRPr lang="zh-CN" altLang="en-US" sz="2400" dirty="0">
-                <a:solidFill>
-                  <a:schemeClr val="tx1">
-                    <a:lumMod val="85000"/>
-                    <a:lumOff val="15000"/>
-                  </a:schemeClr>
-                </a:solidFill>
-                <a:cs typeface="+mn-ea"/>
-                <a:sym typeface="+mn-lt"/>
-              </a:endParaRPr>
-            </a:p>
-          </p:txBody>
-        </p:sp>
-        <p:sp>
-          <p:nvSpPr>
-            <p:cNvPr id="25" name="文本框 24"/>
-            <p:cNvSpPr txBox="1"/>
-            <p:nvPr/>
-          </p:nvSpPr>
-          <p:spPr>
-            <a:xfrm>
-              <a:off x="595045" y="2520827"/>
-              <a:ext cx="5546128" cy="347345"/>
-            </a:xfrm>
-            <a:prstGeom prst="rect">
-              <a:avLst/>
-            </a:prstGeom>
-            <a:noFill/>
-          </p:spPr>
-          <p:txBody>
-            <a:bodyPr wrap="square" rtlCol="0">
-              <a:spAutoFit/>
-            </a:bodyPr>
-            <a:lstStyle/>
-            <a:p>
-              <a:pPr>
-                <a:lnSpc>
-                  <a:spcPts val="2000"/>
-                </a:lnSpc>
-              </a:pPr>
-              <a:r>
-                <a:rPr lang="zh-CN" altLang="en-US" sz="1400" spc="300" dirty="0">
-                  <a:solidFill>
-                    <a:schemeClr val="tx1">
-                      <a:lumMod val="75000"/>
-                      <a:lumOff val="25000"/>
-                    </a:schemeClr>
-                  </a:solidFill>
-                  <a:cs typeface="+mn-ea"/>
-                  <a:sym typeface="+mn-lt"/>
-                </a:rPr>
-                <a:t>记录公司对客户的开发计划描述以及开发进度等。</a:t>
-              </a:r>
-              <a:endParaRPr lang="zh-CN" altLang="en-US" sz="1400" spc="300" dirty="0">
-                <a:solidFill>
-                  <a:schemeClr val="tx1">
-                    <a:lumMod val="75000"/>
-                    <a:lumOff val="25000"/>
-                  </a:schemeClr>
-                </a:solidFill>
-                <a:cs typeface="+mn-ea"/>
-                <a:sym typeface="+mn-lt"/>
-              </a:endParaRPr>
-            </a:p>
-          </p:txBody>
-        </p:sp>
-      </p:grpSp>
-      <p:grpSp>
-        <p:nvGrpSpPr>
-          <p:cNvPr id="2" name="组合 1"/>
-          <p:cNvGrpSpPr/>
-          <p:nvPr/>
-        </p:nvGrpSpPr>
-        <p:grpSpPr>
-          <a:xfrm>
-            <a:off x="5759450" y="4461659"/>
-            <a:ext cx="5546128" cy="1079527"/>
-            <a:chOff x="595045" y="2045185"/>
-            <a:chExt cx="5546128" cy="1079527"/>
-          </a:xfrm>
-        </p:grpSpPr>
-        <p:sp>
-          <p:nvSpPr>
-            <p:cNvPr id="3" name="文本框 2"/>
-            <p:cNvSpPr txBox="1"/>
-            <p:nvPr/>
-          </p:nvSpPr>
-          <p:spPr>
-            <a:xfrm>
-              <a:off x="595045" y="2045185"/>
-              <a:ext cx="2139315" cy="460375"/>
-            </a:xfrm>
-            <a:prstGeom prst="rect">
-              <a:avLst/>
-            </a:prstGeom>
-            <a:noFill/>
-          </p:spPr>
-          <p:txBody>
-            <a:bodyPr wrap="square" rtlCol="0">
-              <a:spAutoFit/>
-            </a:bodyPr>
-            <a:p>
-              <a:r>
-                <a:rPr lang="zh-CN" altLang="en-US" sz="2400" dirty="0">
-                  <a:solidFill>
-                    <a:schemeClr val="tx1">
-                      <a:lumMod val="85000"/>
-                      <a:lumOff val="15000"/>
-                    </a:schemeClr>
-                  </a:solidFill>
-                  <a:cs typeface="+mn-ea"/>
-                  <a:sym typeface="+mn-lt"/>
-                </a:rPr>
-                <a:t>服务创建</a:t>
-              </a:r>
-              <a:endParaRPr lang="zh-CN" altLang="en-US" sz="2400" dirty="0">
-                <a:solidFill>
-                  <a:schemeClr val="tx1">
-                    <a:lumMod val="85000"/>
-                    <a:lumOff val="15000"/>
-                  </a:schemeClr>
-                </a:solidFill>
-                <a:cs typeface="+mn-ea"/>
-                <a:sym typeface="+mn-lt"/>
-              </a:endParaRPr>
-            </a:p>
-          </p:txBody>
-        </p:sp>
-        <p:sp>
-          <p:nvSpPr>
-            <p:cNvPr id="4" name="文本框 3"/>
-            <p:cNvSpPr txBox="1"/>
-            <p:nvPr/>
-          </p:nvSpPr>
-          <p:spPr>
-            <a:xfrm>
-              <a:off x="595045" y="2520827"/>
-              <a:ext cx="5546128" cy="603885"/>
-            </a:xfrm>
-            <a:prstGeom prst="rect">
-              <a:avLst/>
-            </a:prstGeom>
-            <a:noFill/>
-          </p:spPr>
-          <p:txBody>
-            <a:bodyPr wrap="square" rtlCol="0">
-              <a:spAutoFit/>
-            </a:bodyPr>
-            <a:p>
-              <a:pPr>
-                <a:lnSpc>
-                  <a:spcPts val="2000"/>
-                </a:lnSpc>
-              </a:pPr>
-              <a:r>
-                <a:rPr lang="zh-CN" altLang="en-US" sz="1400" spc="300" dirty="0">
-                  <a:solidFill>
-                    <a:schemeClr val="tx1">
-                      <a:lumMod val="75000"/>
-                      <a:lumOff val="25000"/>
-                    </a:schemeClr>
-                  </a:solidFill>
-                  <a:cs typeface="+mn-ea"/>
-                  <a:sym typeface="+mn-lt"/>
-                </a:rPr>
-                <a:t>记录客户要求的服务类型，类如售前服务，售后服务，以及客户的想法和生成订单。</a:t>
+                <a:t>用户可以对自己或者好友发布的朋友圈进行点赞和评论，增加社交的趣味性</a:t>
               </a:r>
               <a:endParaRPr lang="zh-CN" altLang="en-US" sz="1400" spc="300" dirty="0">
                 <a:solidFill>
@@ -11680,7 +11766,7 @@
       </p:grpSp>
     </p:spTree>
     <p:custDataLst>
-      <p:tags r:id="rId2"/>
+      <p:tags r:id="rId8"/>
     </p:custDataLst>
   </p:cSld>
   <p:clrMapOvr>
@@ -12076,79 +12162,6 @@
                                         <p:cTn id="29" dur="500" fill="hold"/>
                                         <p:tgtEl>
                                           <p:spTgt spid="23"/>
-                                        </p:tgtEl>
-                                        <p:attrNameLst>
-                                          <p:attrName>ppt_y</p:attrName>
-                                        </p:attrNameLst>
-                                      </p:cBhvr>
-                                      <p:tavLst>
-                                        <p:tav tm="0">
-                                          <p:val>
-                                            <p:strVal val="#ppt_y"/>
-                                          </p:val>
-                                        </p:tav>
-                                        <p:tav tm="100000">
-                                          <p:val>
-                                            <p:strVal val="#ppt_y"/>
-                                          </p:val>
-                                        </p:tav>
-                                      </p:tavLst>
-                                    </p:anim>
-                                  </p:childTnLst>
-                                </p:cTn>
-                              </p:par>
-                              <p:par>
-                                <p:cTn id="30" presetID="2" presetClass="entr" presetSubtype="2" fill="hold" nodeType="withEffect">
-                                  <p:stCondLst>
-                                    <p:cond delay="0"/>
-                                  </p:stCondLst>
-                                  <p:childTnLst>
-                                    <p:set>
-                                      <p:cBhvr>
-                                        <p:cTn id="31" dur="1" fill="hold">
-                                          <p:stCondLst>
-                                            <p:cond delay="0"/>
-                                          </p:stCondLst>
-                                        </p:cTn>
-                                        <p:tgtEl>
-                                          <p:spTgt spid="2"/>
-                                        </p:tgtEl>
-                                        <p:attrNameLst>
-                                          <p:attrName>style.visibility</p:attrName>
-                                        </p:attrNameLst>
-                                      </p:cBhvr>
-                                      <p:to>
-                                        <p:strVal val="visible"/>
-                                      </p:to>
-                                    </p:set>
-                                    <p:anim calcmode="lin" valueType="num">
-                                      <p:cBhvr additive="base">
-                                        <p:cTn id="32" dur="500" fill="hold"/>
-                                        <p:tgtEl>
-                                          <p:spTgt spid="2"/>
-                                        </p:tgtEl>
-                                        <p:attrNameLst>
-                                          <p:attrName>ppt_x</p:attrName>
-                                        </p:attrNameLst>
-                                      </p:cBhvr>
-                                      <p:tavLst>
-                                        <p:tav tm="0">
-                                          <p:val>
-                                            <p:strVal val="1+#ppt_w/2"/>
-                                          </p:val>
-                                        </p:tav>
-                                        <p:tav tm="100000">
-                                          <p:val>
-                                            <p:strVal val="#ppt_x"/>
-                                          </p:val>
-                                        </p:tav>
-                                      </p:tavLst>
-                                    </p:anim>
-                                    <p:anim calcmode="lin" valueType="num">
-                                      <p:cBhvr additive="base">
-                                        <p:cTn id="33" dur="500" fill="hold"/>
-                                        <p:tgtEl>
-                                          <p:spTgt spid="2"/>
                                         </p:tgtEl>
                                         <p:attrNameLst>
                                           <p:attrName>ppt_y</p:attrName>
@@ -13098,9 +13111,9 @@
         <p:grpSpPr>
           <a:xfrm>
             <a:off x="673100" y="1473723"/>
-            <a:ext cx="10879992" cy="5436086"/>
+            <a:ext cx="10879992" cy="5242440"/>
             <a:chOff x="673100" y="1473723"/>
-            <a:chExt cx="10879992" cy="5436086"/>
+            <a:chExt cx="10879992" cy="5242440"/>
           </a:xfrm>
         </p:grpSpPr>
         <p:grpSp>
@@ -14155,9 +14168,9 @@
           <p:grpSpPr>
             <a:xfrm>
               <a:off x="747522" y="4547582"/>
-              <a:ext cx="2558655" cy="2362227"/>
+              <a:ext cx="2558655" cy="1336067"/>
               <a:chOff x="776550" y="4750778"/>
-              <a:chExt cx="2558655" cy="2362227"/>
+              <a:chExt cx="2558655" cy="1336067"/>
             </a:xfrm>
           </p:grpSpPr>
           <p:sp>
@@ -14207,7 +14220,7 @@
                     <a:cs typeface="+mn-ea"/>
                     <a:sym typeface="+mn-lt"/>
                   </a:rPr>
-                  <a:t>idea</a:t>
+                  <a:t>vscode</a:t>
                 </a:r>
                 <a:endParaRPr lang="en-US" altLang="zh-CN" sz="2400" dirty="0">
                   <a:solidFill>
@@ -14231,7 +14244,7 @@
             <p:spPr>
               <a:xfrm>
                 <a:off x="865450" y="5226420"/>
-                <a:ext cx="2469755" cy="1886585"/>
+                <a:ext cx="2469755" cy="860425"/>
               </a:xfrm>
               <a:prstGeom prst="rect">
                 <a:avLst/>
@@ -14244,7 +14257,7 @@
               </a:bodyPr>
               <a:lstStyle/>
               <a:p>
-                <a:pPr algn="l" fontAlgn="auto">
+                <a:pPr algn="l">
                   <a:lnSpc>
                     <a:spcPts val="2000"/>
                   </a:lnSpc>
@@ -14260,25 +14273,8 @@
                     <a:cs typeface="+mn-ea"/>
                     <a:sym typeface="+mn-lt"/>
                   </a:rPr>
-                  <a:t>强大的整合能力：比如Git、Maven、Spring等支持。</a:t>
+                  <a:t>插件丰富，功能齐全，优秀的代码补全能力，主题丰富，生态</a:t>
                 </a:r>
-                <a:endParaRPr lang="zh-CN" altLang="en-US" sz="1400" spc="300" dirty="0">
-                  <a:solidFill>
-                    <a:schemeClr val="tx1">
-                      <a:lumMod val="75000"/>
-                      <a:lumOff val="25000"/>
-                    </a:schemeClr>
-                  </a:solidFill>
-                  <a:cs typeface="+mn-ea"/>
-                  <a:sym typeface="+mn-lt"/>
-                </a:endParaRPr>
-              </a:p>
-              <a:p>
-                <a:pPr algn="l" fontAlgn="auto">
-                  <a:lnSpc>
-                    <a:spcPts val="2000"/>
-                  </a:lnSpc>
-                </a:pPr>
                 <a:r>
                   <a:rPr lang="zh-CN" altLang="en-US" sz="1400" spc="300" dirty="0">
                     <a:solidFill>
@@ -14290,85 +14286,8 @@
                     <a:cs typeface="+mn-ea"/>
                     <a:sym typeface="+mn-lt"/>
                   </a:rPr>
-                  <a:t>提示功能的快速、便捷。</a:t>
+                  <a:t>完善</a:t>
                 </a:r>
-                <a:endParaRPr lang="zh-CN" altLang="en-US" sz="1400" spc="300" dirty="0">
-                  <a:solidFill>
-                    <a:schemeClr val="tx1">
-                      <a:lumMod val="75000"/>
-                      <a:lumOff val="25000"/>
-                    </a:schemeClr>
-                  </a:solidFill>
-                  <a:cs typeface="+mn-ea"/>
-                  <a:sym typeface="+mn-lt"/>
-                </a:endParaRPr>
-              </a:p>
-              <a:p>
-                <a:pPr algn="l" fontAlgn="auto">
-                  <a:lnSpc>
-                    <a:spcPts val="2000"/>
-                  </a:lnSpc>
-                </a:pPr>
-                <a:r>
-                  <a:rPr lang="zh-CN" altLang="en-US" sz="1400" spc="300" dirty="0">
-                    <a:solidFill>
-                      <a:schemeClr val="tx1">
-                        <a:lumMod val="75000"/>
-                        <a:lumOff val="25000"/>
-                      </a:schemeClr>
-                    </a:solidFill>
-                    <a:cs typeface="+mn-ea"/>
-                    <a:sym typeface="+mn-lt"/>
-                  </a:rPr>
-                  <a:t>提示功能的范围比较广。</a:t>
-                </a:r>
-                <a:endParaRPr lang="zh-CN" altLang="en-US" sz="1400" spc="300" dirty="0">
-                  <a:solidFill>
-                    <a:schemeClr val="tx1">
-                      <a:lumMod val="75000"/>
-                      <a:lumOff val="25000"/>
-                    </a:schemeClr>
-                  </a:solidFill>
-                  <a:cs typeface="+mn-ea"/>
-                  <a:sym typeface="+mn-lt"/>
-                </a:endParaRPr>
-              </a:p>
-              <a:p>
-                <a:pPr algn="l" fontAlgn="auto">
-                  <a:lnSpc>
-                    <a:spcPts val="2000"/>
-                  </a:lnSpc>
-                </a:pPr>
-                <a:r>
-                  <a:rPr lang="zh-CN" altLang="en-US" sz="1400" spc="300" dirty="0">
-                    <a:solidFill>
-                      <a:schemeClr val="tx1">
-                        <a:lumMod val="75000"/>
-                        <a:lumOff val="25000"/>
-                      </a:schemeClr>
-                    </a:solidFill>
-                    <a:cs typeface="+mn-ea"/>
-                    <a:sym typeface="+mn-lt"/>
-                  </a:rPr>
-                  <a:t>精准搜索。</a:t>
-                </a:r>
-                <a:endParaRPr lang="zh-CN" altLang="en-US" sz="1400" spc="300" dirty="0">
-                  <a:solidFill>
-                    <a:schemeClr val="tx1">
-                      <a:lumMod val="75000"/>
-                      <a:lumOff val="25000"/>
-                    </a:schemeClr>
-                  </a:solidFill>
-                  <a:cs typeface="+mn-ea"/>
-                  <a:sym typeface="+mn-lt"/>
-                </a:endParaRPr>
-              </a:p>
-              <a:p>
-                <a:pPr algn="l">
-                  <a:lnSpc>
-                    <a:spcPts val="2000"/>
-                  </a:lnSpc>
-                </a:pPr>
                 <a:endParaRPr lang="zh-CN" altLang="en-US" sz="1400" spc="300" dirty="0">
                   <a:solidFill>
                     <a:schemeClr val="tx1">
@@ -14521,10 +14440,10 @@
           </p:nvGrpSpPr>
           <p:grpSpPr>
             <a:xfrm>
-              <a:off x="6221072" y="3560018"/>
-              <a:ext cx="2469755" cy="2875307"/>
-              <a:chOff x="865450" y="4750778"/>
-              <a:chExt cx="2469755" cy="2875307"/>
+              <a:off x="6221072" y="3205688"/>
+              <a:ext cx="2469755" cy="3229637"/>
+              <a:chOff x="865450" y="4396448"/>
+              <a:chExt cx="2469755" cy="3229637"/>
             </a:xfrm>
           </p:grpSpPr>
           <p:sp>
@@ -14535,8 +14454,8 @@
             </p:nvSpPr>
             <p:spPr>
               <a:xfrm>
-                <a:off x="906090" y="4750778"/>
-                <a:ext cx="2273935" cy="460375"/>
+                <a:off x="905455" y="4396448"/>
+                <a:ext cx="2273935" cy="829945"/>
               </a:xfrm>
               <a:prstGeom prst="rect">
                 <a:avLst/>
@@ -14564,17 +14483,17 @@
                   <a:t>开发语言</a:t>
                 </a:r>
                 <a:r>
-                  <a:rPr lang="en-US" altLang="zh-CN" sz="2400" dirty="0">
+                  <a:rPr lang="en-US" altLang="zh-CN" sz="2400" spc="300" dirty="0">
                     <a:solidFill>
                       <a:schemeClr val="tx1">
-                        <a:lumMod val="85000"/>
-                        <a:lumOff val="15000"/>
+                        <a:lumMod val="75000"/>
+                        <a:lumOff val="25000"/>
                       </a:schemeClr>
                     </a:solidFill>
                     <a:cs typeface="+mn-ea"/>
                     <a:sym typeface="+mn-lt"/>
                   </a:rPr>
-                  <a:t>Java</a:t>
+                  <a:t>JavaScript</a:t>
                 </a:r>
                 <a:endParaRPr lang="en-US" altLang="zh-CN" sz="2400" dirty="0">
                   <a:solidFill>
@@ -14617,6 +14536,19 @@
                   </a:lnSpc>
                 </a:pPr>
                 <a:r>
+                  <a:rPr lang="en-US" altLang="zh-CN" sz="1400" spc="300" dirty="0">
+                    <a:solidFill>
+                      <a:schemeClr val="tx1">
+                        <a:lumMod val="75000"/>
+                        <a:lumOff val="25000"/>
+                      </a:schemeClr>
+                    </a:solidFill>
+                    <a:cs typeface="+mn-ea"/>
+                    <a:sym typeface="+mn-lt"/>
+                  </a:rPr>
+                  <a:t>JavaScript</a:t>
+                </a:r>
+                <a:r>
                   <a:rPr lang="zh-CN" altLang="en-US" sz="1400" spc="300" dirty="0">
                     <a:solidFill>
                       <a:schemeClr val="tx1">
@@ -14627,7 +14559,59 @@
                     <a:cs typeface="+mn-ea"/>
                     <a:sym typeface="+mn-lt"/>
                   </a:rPr>
-                  <a:t>Java 是由 Sun Microsystems 公司于 1995 年 5 月推出的 Java 面向对象程序设计语言和 Java 平台的总称。Java是一种面向对象的语言，拥有封装、继承、多态三大特性。</a:t>
+                  <a:t>（简称</a:t>
+                </a:r>
+                <a:r>
+                  <a:rPr lang="en-US" altLang="zh-CN" sz="1400" spc="300" dirty="0">
+                    <a:solidFill>
+                      <a:schemeClr val="tx1">
+                        <a:lumMod val="75000"/>
+                        <a:lumOff val="25000"/>
+                      </a:schemeClr>
+                    </a:solidFill>
+                    <a:cs typeface="+mn-ea"/>
+                    <a:sym typeface="+mn-lt"/>
+                  </a:rPr>
+                  <a:t>JS</a:t>
+                </a:r>
+                <a:r>
+                  <a:rPr lang="zh-CN" altLang="en-US" sz="1400" spc="300" dirty="0">
+                    <a:solidFill>
+                      <a:schemeClr val="tx1">
+                        <a:lumMod val="75000"/>
+                        <a:lumOff val="25000"/>
+                      </a:schemeClr>
+                    </a:solidFill>
+                    <a:cs typeface="+mn-ea"/>
+                    <a:sym typeface="+mn-lt"/>
+                  </a:rPr>
+                  <a:t>）是一种广泛使用的编程语言，主要用于网页和网络应用的开发，使网页具有交互性。它通常用于实现客户端的网页脚本，但随着</a:t>
+                </a:r>
+                <a:r>
+                  <a:rPr lang="en-US" altLang="zh-CN" sz="1400" spc="300" dirty="0">
+                    <a:solidFill>
+                      <a:schemeClr val="tx1">
+                        <a:lumMod val="75000"/>
+                        <a:lumOff val="25000"/>
+                      </a:schemeClr>
+                    </a:solidFill>
+                    <a:cs typeface="+mn-ea"/>
+                    <a:sym typeface="+mn-lt"/>
+                  </a:rPr>
+                  <a:t>Node.js</a:t>
+                </a:r>
+                <a:r>
+                  <a:rPr lang="zh-CN" altLang="en-US" sz="1400" spc="300" dirty="0">
+                    <a:solidFill>
+                      <a:schemeClr val="tx1">
+                        <a:lumMod val="75000"/>
+                        <a:lumOff val="25000"/>
+                      </a:schemeClr>
+                    </a:solidFill>
+                    <a:cs typeface="+mn-ea"/>
+                    <a:sym typeface="+mn-lt"/>
+                  </a:rPr>
+                  <a:t>的发展，现在也可以用于服务器端的编程。</a:t>
                 </a:r>
                 <a:endParaRPr lang="zh-CN" altLang="en-US" sz="1400" spc="300" dirty="0">
                   <a:solidFill>
@@ -14652,9 +14636,9 @@
           <p:grpSpPr>
             <a:xfrm>
               <a:off x="8501917" y="3071236"/>
-              <a:ext cx="3051175" cy="2875307"/>
+              <a:ext cx="3051175" cy="3644927"/>
               <a:chOff x="453970" y="4750778"/>
-              <a:chExt cx="3051175" cy="2875307"/>
+              <a:chExt cx="3051175" cy="3644927"/>
             </a:xfrm>
           </p:grpSpPr>
           <p:sp>
@@ -14704,7 +14688,7 @@
                     <a:cs typeface="+mn-ea"/>
                     <a:sym typeface="+mn-lt"/>
                   </a:rPr>
-                  <a:t>spring boot</a:t>
+                  <a:t>uni-app</a:t>
                 </a:r>
                 <a:endParaRPr lang="en-US" altLang="zh-CN" sz="2400" dirty="0">
                   <a:solidFill>
@@ -14728,7 +14712,7 @@
             <p:spPr>
               <a:xfrm>
                 <a:off x="865450" y="5226420"/>
-                <a:ext cx="2469755" cy="2399665"/>
+                <a:ext cx="2469755" cy="3169285"/>
               </a:xfrm>
               <a:prstGeom prst="rect">
                 <a:avLst/>
@@ -14747,6 +14731,19 @@
                   </a:lnSpc>
                 </a:pPr>
                 <a:r>
+                  <a:rPr lang="en-US" altLang="zh-CN" sz="1400" spc="300" dirty="0">
+                    <a:solidFill>
+                      <a:schemeClr val="tx1">
+                        <a:lumMod val="75000"/>
+                        <a:lumOff val="25000"/>
+                      </a:schemeClr>
+                    </a:solidFill>
+                    <a:cs typeface="+mn-ea"/>
+                    <a:sym typeface="+mn-lt"/>
+                  </a:rPr>
+                  <a:t>uni-app </a:t>
+                </a:r>
+                <a:r>
                   <a:rPr lang="zh-CN" altLang="en-US" sz="1400" spc="300" dirty="0">
                     <a:solidFill>
                       <a:schemeClr val="tx1">
@@ -14757,7 +14754,7 @@
                     <a:cs typeface="+mn-ea"/>
                     <a:sym typeface="+mn-lt"/>
                   </a:rPr>
-                  <a:t>设计目的是用来简化新 Spring 应用的初始搭建以及开发过程。该框架使用了特定的方式来进行配置，从而使开发人员不再需要定义样板化的配置。</a:t>
+                  <a:t>是一个使用</a:t>
                 </a:r>
                 <a:r>
                   <a:rPr lang="en-US" altLang="zh-CN" sz="1400" spc="300" dirty="0">
@@ -14770,7 +14767,7 @@
                     <a:cs typeface="+mn-ea"/>
                     <a:sym typeface="+mn-lt"/>
                   </a:rPr>
-                  <a:t>springboot</a:t>
+                  <a:t> vue</a:t>
                 </a:r>
                 <a:r>
                   <a:rPr lang="zh-CN" altLang="en-US" sz="1400" spc="300" dirty="0">
@@ -14783,7 +14780,20 @@
                     <a:cs typeface="+mn-ea"/>
                     <a:sym typeface="+mn-lt"/>
                   </a:rPr>
-                  <a:t>的优点</a:t>
+                  <a:t>开发所有前端应用的框架，开发者编写一套代码，可发布到</a:t>
+                </a:r>
+                <a:r>
+                  <a:rPr lang="en-US" altLang="zh-CN" sz="1400" spc="300" dirty="0">
+                    <a:solidFill>
+                      <a:schemeClr val="tx1">
+                        <a:lumMod val="75000"/>
+                        <a:lumOff val="25000"/>
+                      </a:schemeClr>
+                    </a:solidFill>
+                    <a:cs typeface="+mn-ea"/>
+                    <a:sym typeface="+mn-lt"/>
+                  </a:rPr>
+                  <a:t>iOS</a:t>
                 </a:r>
                 <a:r>
                   <a:rPr lang="zh-CN" altLang="en-US" sz="1400" spc="300" dirty="0">
@@ -14796,7 +14806,59 @@
                     <a:cs typeface="+mn-ea"/>
                     <a:sym typeface="+mn-lt"/>
                   </a:rPr>
-                  <a:t>就是简单、快速、方便。</a:t>
+                  <a:t>、</a:t>
+                </a:r>
+                <a:r>
+                  <a:rPr lang="en-US" altLang="zh-CN" sz="1400" spc="300" dirty="0">
+                    <a:solidFill>
+                      <a:schemeClr val="tx1">
+                        <a:lumMod val="75000"/>
+                        <a:lumOff val="25000"/>
+                      </a:schemeClr>
+                    </a:solidFill>
+                    <a:cs typeface="+mn-ea"/>
+                    <a:sym typeface="+mn-lt"/>
+                  </a:rPr>
+                  <a:t>Android</a:t>
+                </a:r>
+                <a:r>
+                  <a:rPr lang="zh-CN" altLang="en-US" sz="1400" spc="300" dirty="0">
+                    <a:solidFill>
+                      <a:schemeClr val="tx1">
+                        <a:lumMod val="75000"/>
+                        <a:lumOff val="25000"/>
+                      </a:schemeClr>
+                    </a:solidFill>
+                    <a:cs typeface="+mn-ea"/>
+                    <a:sym typeface="+mn-lt"/>
+                  </a:rPr>
+                  <a:t>、</a:t>
+                </a:r>
+                <a:r>
+                  <a:rPr lang="en-US" altLang="zh-CN" sz="1400" spc="300" dirty="0">
+                    <a:solidFill>
+                      <a:schemeClr val="tx1">
+                        <a:lumMod val="75000"/>
+                        <a:lumOff val="25000"/>
+                      </a:schemeClr>
+                    </a:solidFill>
+                    <a:cs typeface="+mn-ea"/>
+                    <a:sym typeface="+mn-lt"/>
+                  </a:rPr>
+                  <a:t>Web</a:t>
+                </a:r>
+                <a:r>
+                  <a:rPr lang="zh-CN" altLang="en-US" sz="1400" spc="300" dirty="0">
+                    <a:solidFill>
+                      <a:schemeClr val="tx1">
+                        <a:lumMod val="75000"/>
+                        <a:lumOff val="25000"/>
+                      </a:schemeClr>
+                    </a:solidFill>
+                    <a:cs typeface="+mn-ea"/>
+                    <a:sym typeface="+mn-lt"/>
+                  </a:rPr>
+                  <a:t>（响应式）、以及各种小程序多个平台。它旨在解决传统单一平台开发工具链冗长、学习成本高和跨平台兼容性差的问题，极大地提高了开发效率和代码复用率。</a:t>
                 </a:r>
                 <a:endParaRPr lang="zh-CN" altLang="en-US" sz="1400" spc="300" dirty="0">
                   <a:solidFill>
@@ -15409,7 +15471,11 @@
             <a:pPr algn="l" fontAlgn="auto"/>
             <a:r>
               <a:rPr lang="zh-CN" altLang="en-US" sz="2000"/>
-              <a:t>每个实体都在数据库中有相应的表，实体的每一个属性与相应表内的每一列列名对应。经过系统的考虑和设计，本系统主要有如下实体：客户实体，用户实体，流失客户实体，开发计划实体，订单实体，角色实体等等。</a:t>
+              <a:t>每个实体都在数据库中有相应的表，实体的每一个属性与相应表内的每一列列名对应。经过系统的考虑和设计，本系统主要有如下实体：用户实体，联系人实体，群组实体，</a:t>
+            </a:r>
+            <a:r>
+              <a:rPr lang="zh-CN" altLang="en-US" sz="2000"/>
+              <a:t>朋友圈实体等等。</a:t>
             </a:r>
             <a:endParaRPr lang="zh-CN" altLang="en-US" sz="2000"/>
           </a:p>
@@ -15417,54 +15483,47 @@
       </p:sp>
       <p:pic>
         <p:nvPicPr>
-          <p:cNvPr id="5" name="图片 2"/>
+          <p:cNvPr id="7" name="ECB019B1-382A-4266-B25C-5B523AA43C14-1" descr="C:/Users/18043/AppData/Local/Temp/wps.wlcEAQwps"/>
           <p:cNvPicPr>
             <a:picLocks noChangeAspect="1"/>
           </p:cNvPicPr>
-          <p:nvPr>
-            <p:custDataLst>
-              <p:tags r:id="rId1"/>
-            </p:custDataLst>
-          </p:nvPr>
+          <p:nvPr/>
         </p:nvPicPr>
         <p:blipFill>
-          <a:blip r:embed="rId2"/>
+          <a:blip r:embed="rId1"/>
           <a:stretch>
             <a:fillRect/>
           </a:stretch>
         </p:blipFill>
         <p:spPr>
           <a:xfrm>
-            <a:off x="505143" y="3041968"/>
-            <a:ext cx="4679315" cy="3396615"/>
+            <a:off x="882650" y="3082290"/>
+            <a:ext cx="4342765" cy="3443605"/>
           </a:xfrm>
           <a:prstGeom prst="rect">
             <a:avLst/>
           </a:prstGeom>
-          <a:noFill/>
-          <a:ln>
-            <a:noFill/>
-          </a:ln>
         </p:spPr>
       </p:pic>
       <p:pic>
         <p:nvPicPr>
-          <p:cNvPr id="6" name="图片 3"/>
+          <p:cNvPr id="9" name="图片 1"/>
           <p:cNvPicPr>
             <a:picLocks noChangeAspect="1"/>
           </p:cNvPicPr>
           <p:nvPr/>
         </p:nvPicPr>
         <p:blipFill>
-          <a:blip r:embed="rId3"/>
+          <a:blip r:embed="rId2"/>
+          <a:srcRect l="5058" t="9328" r="5058" b="4958"/>
           <a:stretch>
             <a:fillRect/>
           </a:stretch>
         </p:blipFill>
         <p:spPr>
           <a:xfrm>
-            <a:off x="6149658" y="2941320"/>
-            <a:ext cx="4628515" cy="3497580"/>
+            <a:off x="6414135" y="3175635"/>
+            <a:ext cx="4425315" cy="3256915"/>
           </a:xfrm>
           <a:prstGeom prst="rect">
             <a:avLst/>
@@ -15477,7 +15536,7 @@
       </p:pic>
     </p:spTree>
     <p:custDataLst>
-      <p:tags r:id="rId4"/>
+      <p:tags r:id="rId3"/>
     </p:custDataLst>
   </p:cSld>
   <p:clrMapOvr>
@@ -16024,82 +16083,6 @@
           </a:p>
           <a:p>
             <a:pPr algn="l" fontAlgn="auto"/>
-            <a:r>
-              <a:rPr lang="zh-CN" altLang="en-US"/>
-              <a:t>b)用户信息表（用户id，用户姓名，用户密码，真实姓名，邮箱，电话，有效状态，创建时间，更新时间）</a:t>
-            </a:r>
-            <a:endParaRPr lang="zh-CN" altLang="en-US"/>
-          </a:p>
-          <a:p>
-            <a:pPr algn="l" fontAlgn="auto"/>
-            <a:r>
-              <a:rPr lang="zh-CN" altLang="en-US"/>
-              <a:t>c)流失客户信息表（流失客户id，客户id，客户姓名，最后下单时间，确认流失时间，流失状态，流失原因，有效状态，创建时间，更新时间）</a:t>
-            </a:r>
-            <a:endParaRPr lang="zh-CN" altLang="en-US"/>
-          </a:p>
-          <a:p>
-            <a:pPr algn="l" fontAlgn="auto"/>
-            <a:r>
-              <a:rPr lang="zh-CN" altLang="en-US"/>
-              <a:t>d)客户开发计划表（客户开发计划id，销售机会id，计划内容，计划日期，执行效果，创建时间，更新时间，有效状态）</a:t>
-            </a:r>
-            <a:endParaRPr lang="zh-CN" altLang="en-US"/>
-          </a:p>
-          <a:p>
-            <a:pPr algn="l" fontAlgn="auto"/>
-            <a:r>
-              <a:rPr lang="zh-CN" altLang="en-US"/>
-              <a:t>e)客户服务表（客户服务id，服务类型，服务概要，客户id，服务创建人，有效状态，服务状态，服务请求，创建时间，更新时间）</a:t>
-            </a:r>
-            <a:endParaRPr lang="zh-CN" altLang="en-US"/>
-          </a:p>
-          <a:p>
-            <a:pPr algn="l" fontAlgn="auto"/>
-            <a:r>
-              <a:rPr lang="zh-CN" altLang="en-US"/>
-              <a:t>f)客户订单表（订单id，客户id，订单编号，金额，有效状态，创建时间，更新时间，下单时间，地址）</a:t>
-            </a:r>
-            <a:endParaRPr lang="zh-CN" altLang="en-US"/>
-          </a:p>
-          <a:p>
-            <a:pPr algn="l" fontAlgn="auto"/>
-            <a:r>
-              <a:rPr lang="zh-CN" altLang="en-US"/>
-              <a:t>g)角色表（角色id，角色名称，角色备注，有效状态，创建时间，更新时间）</a:t>
-            </a:r>
-            <a:endParaRPr lang="zh-CN" altLang="en-US"/>
-          </a:p>
-          <a:p>
-            <a:pPr algn="l" fontAlgn="auto"/>
-            <a:r>
-              <a:rPr lang="zh-CN" altLang="en-US"/>
-              <a:t>h)销售机会表（销售机会id，客户来源，客户名称，成功几率，概要描述，客户开发状态，创建时间，更新时间）</a:t>
-            </a:r>
-            <a:endParaRPr lang="zh-CN" altLang="en-US"/>
-          </a:p>
-          <a:p>
-            <a:pPr algn="l" fontAlgn="auto"/>
-            <a:r>
-              <a:rPr lang="zh-CN" altLang="en-US"/>
-              <a:t>i)权限信息表（权限id，权限等级，权限名称，权限备注，权限有效状态，创建时间，更新时间）</a:t>
-            </a:r>
-            <a:endParaRPr lang="zh-CN" altLang="en-US"/>
-          </a:p>
-          <a:p>
-            <a:pPr algn="l" fontAlgn="auto"/>
-            <a:r>
-              <a:rPr lang="zh-CN" altLang="en-US"/>
-              <a:t>j)用户权限表（用户权限id，用户id，角色id，有效状态，创建时间，更新时间）</a:t>
-            </a:r>
-            <a:endParaRPr lang="zh-CN" altLang="en-US"/>
-          </a:p>
-          <a:p>
-            <a:pPr algn="l" fontAlgn="auto"/>
-            <a:r>
-              <a:rPr lang="zh-CN" altLang="en-US"/>
-              <a:t>k)权限角色关联表（权限角色id，角色id，权限id，有效状态，创建时间，更新时间）</a:t>
-            </a:r>
             <a:endParaRPr lang="zh-CN" altLang="en-US"/>
           </a:p>
         </p:txBody>
@@ -33161,15 +33144,47 @@
             </a:r>
             <a:r>
               <a:rPr lang="zh-CN" altLang="en-US" sz="2000"/>
-              <a:t>随着现代科技的迅速发展，计算机已经成为人们日常生活中非常重要的一环。许多行业都已经离不开计算机了，因为计算机能够帮助人们做许多以前非常难做的事情，比如以前没有计算机的时候，记录客户信息需要纸和笔来记录客户的信息，这样不仅不好修改而且不易保存，在现代社会，人们早已学会使用计算机来存储客户信息，使用一款操作简单便捷，界面优美的客户关系管理系统能够记录好客户信息，记录客户需求，记录客户售后，记录客户计划，记录客户流失原因，使公司的事业越发蓬勃，使公司发展蒸蒸日上。国内外也有许多的客户关系管理系统，不过大多都是收费且价格对于小型公司来说不太友好，因此我决定本次毕业设计将设计一款客户关系管理系统供国内外小型公司使用，以此来记录客户信息。</a:t>
+              <a:t>近年来，移动互联网技术飞速发展，智能手机的普及使得人们的生活和工作方式发生了巨大变化。即时通讯应用作为人们日常沟通交流的重要工具，在社交、工作、学习等各个领域都发挥着至关重要的作用。人们对于即时通讯的需求也日益多样化和个性化，不仅要求能够实现文字、语音、图片等多种形式的信息交流，还希望具备高效稳定的性能、丰富的社交互动功能以及良好的跨平台使用体验。</a:t>
             </a:r>
             <a:endParaRPr lang="zh-CN" altLang="en-US" sz="2000"/>
           </a:p>
           <a:p>
-            <a:pPr algn="l" fontAlgn="auto"/>
+            <a:pPr indent="457200" algn="l" fontAlgn="auto"/>
             <a:r>
               <a:rPr lang="zh-CN" altLang="en-US" sz="2000"/>
-              <a:t>针对现在企业的实际需要和企业人员的计算机操作水平，我设计出了这款操作简单的客户关系管理系统，以此来让企业人员快速上手，学会使用这款客户关系管理系统。在开发过程中，我力求使这款客户关系管理系统操作简单便捷，并且不能占用太多计算机资源，这样才符合小型公司的需求，这样才能受到小型公司的青睐。</a:t>
+              <a:t>随着移动应用市场的不断扩大，企业和开发者面临着在多个平台（如</a:t>
+            </a:r>
+            <a:r>
+              <a:rPr lang="en-US" altLang="zh-CN" sz="2000"/>
+              <a:t> iOS</a:t>
+            </a:r>
+            <a:r>
+              <a:rPr lang="zh-CN" altLang="en-US" sz="2000"/>
+              <a:t>、</a:t>
+            </a:r>
+            <a:r>
+              <a:rPr lang="en-US" altLang="zh-CN" sz="2000"/>
+              <a:t>Android</a:t>
+            </a:r>
+            <a:r>
+              <a:rPr lang="zh-CN" altLang="en-US" sz="2000"/>
+              <a:t>、</a:t>
+            </a:r>
+            <a:r>
+              <a:rPr lang="en-US" altLang="zh-CN" sz="2000"/>
+              <a:t>Web </a:t>
+            </a:r>
+            <a:r>
+              <a:rPr lang="zh-CN" altLang="en-US" sz="2000"/>
+              <a:t>等）上开发和维护应用的挑战。传统的开发方式需要针对不同平台分别进行开发，这不仅增加了开发成本和时间，还难以保证各平台之间的用户体验一致性。因此，跨平台开发技术成为了一种趋势，能够帮助开发者更高效地开发出多平台兼容的应用程序。</a:t>
+            </a:r>
+            <a:endParaRPr lang="zh-CN" altLang="en-US" sz="2000"/>
+          </a:p>
+          <a:p>
+            <a:pPr indent="457200" algn="l" fontAlgn="auto"/>
+            <a:r>
+              <a:rPr lang="zh-CN" altLang="en-US" sz="2000"/>
+              <a:t>虽然市场上已经存在许多知名的即时通讯应用，但仍然存在一些不足之处。例如，部分应用在功能上过于复杂，导致操作不够简洁；一些应用在跨平台使用时存在兼容性问题，影响用户体验；还有一些应用在安全性和隐私保护方面存在隐患。因此，开发一款功能实用、操作便捷、跨平台性能良好且安全可靠的即时通讯应用具有重要的现实意义。</a:t>
             </a:r>
             <a:endParaRPr lang="zh-CN" altLang="en-US" sz="2000"/>
           </a:p>
@@ -33609,7 +33624,7 @@
         </p:nvSpPr>
         <p:spPr>
           <a:xfrm>
-            <a:off x="608965" y="1407795"/>
+            <a:off x="608965" y="1977390"/>
             <a:ext cx="8368030" cy="3661410"/>
           </a:xfrm>
           <a:prstGeom prst="rect">
@@ -33641,11 +33656,91 @@
         <p:txBody>
           <a:bodyPr rtlCol="0" anchor="ctr"/>
           <a:p>
-            <a:pPr algn="l" fontAlgn="auto"/>
+            <a:pPr indent="457200" algn="l" fontAlgn="auto"/>
+            <a:r>
+              <a:rPr lang="en-US" altLang="zh-CN" sz="2400"/>
+              <a:t>WhatsApp</a:t>
+            </a:r>
             <a:r>
               <a:rPr lang="zh-CN" altLang="en-US" sz="2400"/>
-              <a:t>国内外有很多比较出名的，可靠性高，功能强大，简单操作的客户关系管理系统，比如Oracle CRM，Oracle CRM产品系列包括销售、营销、交互中心、客户服务和电子商务等五大模块，这款软件在业内有着很高的呼声，使用过的公司都对其大加赞扬，但是在价格方面就有一定的门槛，所以不太适合小型公司使用。</a:t>
+              <a:t>、</a:t>
             </a:r>
+            <a:r>
+              <a:rPr lang="en-US" altLang="zh-CN" sz="2400"/>
+              <a:t>Facebook Messenger</a:t>
+            </a:r>
+            <a:r>
+              <a:rPr lang="zh-CN" altLang="en-US" sz="2400"/>
+              <a:t>、</a:t>
+            </a:r>
+            <a:r>
+              <a:rPr lang="en-US" altLang="zh-CN" sz="2400"/>
+              <a:t>Telegram </a:t>
+            </a:r>
+            <a:r>
+              <a:rPr lang="zh-CN" altLang="en-US" sz="2400"/>
+              <a:t>和</a:t>
+            </a:r>
+            <a:r>
+              <a:rPr lang="en-US" altLang="zh-CN" sz="2400"/>
+              <a:t> LINE </a:t>
+            </a:r>
+            <a:r>
+              <a:rPr lang="zh-CN" altLang="en-US" sz="2400"/>
+              <a:t>等在国际市场上拥有庞大用户群体。</a:t>
+            </a:r>
+            <a:r>
+              <a:rPr lang="en-US" altLang="zh-CN" sz="2400"/>
+              <a:t>WhatsApp </a:t>
+            </a:r>
+            <a:r>
+              <a:rPr lang="zh-CN" altLang="en-US" sz="2400"/>
+              <a:t>凭借</a:t>
+            </a:r>
+            <a:r>
+              <a:rPr lang="en-US" altLang="zh-CN" sz="2400"/>
+              <a:t> Facebook </a:t>
+            </a:r>
+            <a:r>
+              <a:rPr lang="zh-CN" altLang="en-US" sz="2400"/>
+              <a:t>的推广和自身简洁易用的特点，在欧美、南美、非洲等地区广泛使用，拥有数十亿用户。</a:t>
+            </a:r>
+            <a:r>
+              <a:rPr lang="en-US" altLang="zh-CN" sz="2400"/>
+              <a:t>Facebook Messenger </a:t>
+            </a:r>
+            <a:r>
+              <a:rPr lang="zh-CN" altLang="en-US" sz="2400"/>
+              <a:t>与社交平台</a:t>
+            </a:r>
+            <a:r>
+              <a:rPr lang="en-US" altLang="zh-CN" sz="2400"/>
+              <a:t> Facebook </a:t>
+            </a:r>
+            <a:r>
+              <a:rPr lang="zh-CN" altLang="en-US" sz="2400"/>
+              <a:t>深度整合，方便用户在社交网络基础上进行即时通讯。</a:t>
+            </a:r>
+            <a:r>
+              <a:rPr lang="en-US" altLang="zh-CN" sz="2400"/>
+              <a:t>Telegram </a:t>
+            </a:r>
+            <a:r>
+              <a:rPr lang="zh-CN" altLang="en-US" sz="2400"/>
+              <a:t>以注重隐私保护和强大的群组功能吸引了大量用户，尤其在一些对隐私较为敏感的地区和特定社群中很受欢迎。</a:t>
+            </a:r>
+            <a:r>
+              <a:rPr lang="en-US" altLang="zh-CN" sz="2400"/>
+              <a:t>LINE </a:t>
+            </a:r>
+            <a:r>
+              <a:rPr lang="zh-CN" altLang="en-US" sz="2400"/>
+              <a:t>则在日本、韩国等亚洲国家占据重要市场份额，除通讯外，还提供丰富的内容服务，如游戏、表情商店等。</a:t>
+            </a:r>
+            <a:endParaRPr lang="zh-CN" altLang="en-US" sz="2400"/>
+          </a:p>
+          <a:p>
+            <a:pPr algn="l" fontAlgn="auto"/>
             <a:endParaRPr lang="zh-CN" altLang="en-US" sz="2400"/>
           </a:p>
         </p:txBody>
@@ -34750,7 +34845,23 @@
             <a:pPr algn="l" fontAlgn="auto"/>
             <a:r>
               <a:rPr lang="zh-CN" altLang="en-US" sz="2800"/>
-              <a:t>国内软件厂家在客户关系管理系统也大有建树，金蝶作为国内知名软件厂商，国内首个具有中间件应用服务器的厂商之一，CRM逐渐成为其产品多元化战略的一部分，在CRM市场风头正劲。</a:t>
+              <a:t>国内即时通讯市场呈现出寡头垄断的局面，微信和</a:t>
+            </a:r>
+            <a:r>
+              <a:rPr lang="en-US" altLang="zh-CN" sz="2800"/>
+              <a:t> QQ </a:t>
+            </a:r>
+            <a:r>
+              <a:rPr lang="zh-CN" altLang="en-US" sz="2800"/>
+              <a:t>凭借庞大的用户基础和丰富的功能生态占据主导地位。微信作为国民级社交应用，不仅满足了人们日常的通讯需求，还集成了支付、购物、生活服务等多种功能，成为了一个综合性的生活平台。</a:t>
+            </a:r>
+            <a:r>
+              <a:rPr lang="en-US" altLang="zh-CN" sz="2800"/>
+              <a:t>QQ </a:t>
+            </a:r>
+            <a:r>
+              <a:rPr lang="zh-CN" altLang="en-US" sz="2800"/>
+              <a:t>则在年轻用户群体中拥有较高的人气，其丰富的个性化功能和社交玩法深受年轻人喜爱。</a:t>
             </a:r>
             <a:endParaRPr lang="zh-CN" altLang="en-US" sz="2800"/>
           </a:p>
@@ -35523,7 +35634,7 @@
         </p:nvSpPr>
         <p:spPr>
           <a:xfrm>
-            <a:off x="3143885" y="1842770"/>
+            <a:off x="3143885" y="2276475"/>
             <a:ext cx="8590915" cy="3529330"/>
           </a:xfrm>
           <a:prstGeom prst="rect">
@@ -35552,10 +35663,34 @@
         <p:txBody>
           <a:bodyPr rtlCol="0" anchor="ctr"/>
           <a:p>
-            <a:pPr algn="l" fontAlgn="auto"/>
+            <a:pPr indent="457200" algn="l" fontAlgn="auto"/>
             <a:r>
               <a:rPr lang="zh-CN" altLang="en-US" sz="2400"/>
-              <a:t>国内外都在研究安全可靠、概念性强、功能强大，简单易用的客户关系管理系统。在计算机还不发代的年代，各行各业的工作人员为了记录客户信息都会选择使用纸和笔来记录，使用纸笔不仅繁琐，而且不易保存，经常会出现遗失客户信息的情况出现，而在计算机相当普及的现在，各行各业的公司都会选择一款功能强大的客户客户关系管理系统。国内很多软件公司都在致力于该项目的开发。随着计算机在现代社会的普及，以及各行各业的公司兴起，越来越需要一款适合小型公司的客户关系管理系统。</a:t>
+              <a:t>基于</a:t>
+            </a:r>
+            <a:r>
+              <a:rPr lang="en-US" altLang="zh-CN" sz="2400"/>
+              <a:t> uni - app </a:t>
+            </a:r>
+            <a:r>
+              <a:rPr lang="zh-CN" altLang="en-US" sz="2400"/>
+              <a:t>框架开发即时通讯项目，能够为跨平台开发领域提供新的实践案例和理论参考。探索在不同平台上实现即时通讯功能的最佳实践，有助于完善跨平台开发的技术体系和方法论。</a:t>
+            </a:r>
+            <a:endParaRPr lang="zh-CN" altLang="en-US" sz="2400"/>
+          </a:p>
+          <a:p>
+            <a:pPr indent="457200" algn="l" fontAlgn="auto"/>
+            <a:r>
+              <a:rPr lang="zh-CN" altLang="en-US" sz="2400"/>
+              <a:t>深入研究即时通讯的核心技术，如实时消息传输、消息存储与管理、用户身份认证等，为该领域的学术研究提供新的思路和方向。通过项目实践，验证和改进现有即时通讯技术的理论模型，推动即时通讯技术的发展。</a:t>
+            </a:r>
+            <a:endParaRPr lang="zh-CN" altLang="en-US" sz="2400"/>
+          </a:p>
+          <a:p>
+            <a:pPr indent="457200" algn="l" fontAlgn="auto"/>
+            <a:r>
+              <a:rPr lang="zh-CN" altLang="en-US" sz="2400"/>
+              <a:t>实现跨平台的即时通讯应用，用户可以在不同的设备和操作系统上无缝使用，获得一致的用户体验。同时，简洁易用的界面设计和丰富的功能模块，能够满足用户多样化的沟通需求，提升用户的满意度和忠诚度。</a:t>
             </a:r>
             <a:endParaRPr lang="zh-CN" altLang="en-US" sz="2400"/>
           </a:p>
@@ -36687,7 +36822,11 @@
         <p:nvGrpSpPr>
           <p:cNvPr id="66" name="组合 65"/>
           <p:cNvGrpSpPr/>
-          <p:nvPr/>
+          <p:nvPr>
+            <p:custDataLst>
+              <p:tags r:id="rId1"/>
+            </p:custDataLst>
+          </p:nvPr>
         </p:nvGrpSpPr>
         <p:grpSpPr>
           <a:xfrm>
@@ -36715,7 +36854,11 @@
             <p:nvSpPr>
               <p:cNvPr id="2" name="矩形 1"/>
               <p:cNvSpPr/>
-              <p:nvPr/>
+              <p:nvPr>
+                <p:custDataLst>
+                  <p:tags r:id="rId2"/>
+                </p:custDataLst>
+              </p:nvPr>
             </p:nvSpPr>
             <p:spPr>
               <a:xfrm>
@@ -36778,7 +36921,11 @@
               <p:nvSpPr>
                 <p:cNvPr id="4" name="梯形 3"/>
                 <p:cNvSpPr/>
-                <p:nvPr/>
+                <p:nvPr>
+                  <p:custDataLst>
+                    <p:tags r:id="rId3"/>
+                  </p:custDataLst>
+                </p:nvPr>
               </p:nvSpPr>
               <p:spPr>
                 <a:xfrm rot="18953237">
@@ -36829,7 +36976,11 @@
               <p:nvSpPr>
                 <p:cNvPr id="5" name="等腰三角形 4"/>
                 <p:cNvSpPr/>
-                <p:nvPr/>
+                <p:nvPr>
+                  <p:custDataLst>
+                    <p:tags r:id="rId4"/>
+                  </p:custDataLst>
+                </p:nvPr>
               </p:nvSpPr>
               <p:spPr>
                 <a:xfrm>
@@ -36878,7 +37029,11 @@
               <p:nvSpPr>
                 <p:cNvPr id="21" name="等腰三角形 20"/>
                 <p:cNvSpPr/>
-                <p:nvPr/>
+                <p:nvPr>
+                  <p:custDataLst>
+                    <p:tags r:id="rId5"/>
+                  </p:custDataLst>
+                </p:nvPr>
               </p:nvSpPr>
               <p:spPr>
                 <a:xfrm rot="16200000">
@@ -36931,10 +37086,14 @@
             <p:cNvPicPr>
               <a:picLocks noChangeAspect="1"/>
             </p:cNvPicPr>
-            <p:nvPr/>
+            <p:nvPr>
+              <p:custDataLst>
+                <p:tags r:id="rId6"/>
+              </p:custDataLst>
+            </p:nvPr>
           </p:nvPicPr>
           <p:blipFill>
-            <a:blip r:embed="rId1"/>
+            <a:blip r:embed="rId7"/>
             <a:stretch>
               <a:fillRect/>
             </a:stretch>
@@ -36953,12 +37112,16 @@
           <p:nvSpPr>
             <p:cNvPr id="51" name="文本框 50"/>
             <p:cNvSpPr txBox="1"/>
-            <p:nvPr/>
+            <p:nvPr>
+              <p:custDataLst>
+                <p:tags r:id="rId8"/>
+              </p:custDataLst>
+            </p:nvPr>
           </p:nvSpPr>
           <p:spPr>
             <a:xfrm>
               <a:off x="670418" y="3116273"/>
-              <a:ext cx="2056702" cy="1116965"/>
+              <a:ext cx="2056702" cy="860425"/>
             </a:xfrm>
             <a:prstGeom prst="rect">
               <a:avLst/>
@@ -36987,7 +37150,20 @@
                   <a:cs typeface="+mn-ea"/>
                   <a:sym typeface="+mn-lt"/>
                 </a:rPr>
-                <a:t>客户信息管理</a:t>
+                <a:t>用户注册与</a:t>
+              </a:r>
+              <a:r>
+                <a:rPr lang="zh-CN" altLang="en-US" sz="1400" spc="300" dirty="0">
+                  <a:solidFill>
+                    <a:schemeClr val="tx1">
+                      <a:lumMod val="75000"/>
+                      <a:lumOff val="25000"/>
+                    </a:schemeClr>
+                  </a:solidFill>
+                  <a:cs typeface="+mn-ea"/>
+                  <a:sym typeface="+mn-lt"/>
+                </a:rPr>
+                <a:t>登录</a:t>
               </a:r>
               <a:endParaRPr lang="zh-CN" altLang="en-US" sz="1400" spc="300" dirty="0">
                 <a:solidFill>
@@ -37017,7 +37193,20 @@
                   <a:cs typeface="+mn-ea"/>
                   <a:sym typeface="+mn-lt"/>
                 </a:rPr>
-                <a:t>客户订单查看</a:t>
+                <a:t>用户信息</a:t>
+              </a:r>
+              <a:r>
+                <a:rPr lang="zh-CN" altLang="en-US" sz="1400" spc="300" dirty="0">
+                  <a:solidFill>
+                    <a:schemeClr val="tx1">
+                      <a:lumMod val="75000"/>
+                      <a:lumOff val="25000"/>
+                    </a:schemeClr>
+                  </a:solidFill>
+                  <a:cs typeface="+mn-ea"/>
+                  <a:sym typeface="+mn-lt"/>
+                </a:rPr>
+                <a:t>修改</a:t>
               </a:r>
               <a:endParaRPr lang="zh-CN" altLang="en-US" sz="1400" spc="300" dirty="0">
                 <a:solidFill>
@@ -37047,37 +37236,7 @@
                   <a:cs typeface="+mn-ea"/>
                   <a:sym typeface="+mn-lt"/>
                 </a:rPr>
-                <a:t>流失客户管理</a:t>
-              </a:r>
-              <a:endParaRPr lang="zh-CN" altLang="en-US" sz="1400" spc="300" dirty="0">
-                <a:solidFill>
-                  <a:schemeClr val="tx1">
-                    <a:lumMod val="75000"/>
-                    <a:lumOff val="25000"/>
-                  </a:schemeClr>
-                </a:solidFill>
-                <a:cs typeface="+mn-ea"/>
-                <a:sym typeface="+mn-lt"/>
-              </a:endParaRPr>
-            </a:p>
-            <a:p>
-              <a:pPr algn="ctr">
-                <a:lnSpc>
-                  <a:spcPts val="2000"/>
-                </a:lnSpc>
-              </a:pPr>
-              <a:r>
-                <a:rPr lang="zh-CN" altLang="en-US" sz="1400" spc="300" dirty="0">
-                  <a:solidFill>
-                    <a:schemeClr val="tx1">
-                      <a:lumMod val="75000"/>
-                      <a:lumOff val="25000"/>
-                    </a:schemeClr>
-                  </a:solidFill>
-                  <a:cs typeface="+mn-ea"/>
-                  <a:sym typeface="+mn-lt"/>
-                </a:rPr>
-                <a:t>重点客户</a:t>
+                <a:t>好友添加和</a:t>
               </a:r>
               <a:r>
                 <a:rPr lang="zh-CN" altLang="en-US" sz="1400" spc="300" dirty="0">
@@ -37090,7 +37249,7 @@
                   <a:cs typeface="+mn-ea"/>
                   <a:sym typeface="+mn-lt"/>
                 </a:rPr>
-                <a:t>管理</a:t>
+                <a:t>删除</a:t>
               </a:r>
               <a:endParaRPr lang="zh-CN" altLang="en-US" sz="1400" spc="300" dirty="0">
                 <a:solidFill>
@@ -37123,7 +37282,11 @@
             <p:nvSpPr>
               <p:cNvPr id="53" name="矩形: 圆角 52"/>
               <p:cNvSpPr/>
-              <p:nvPr/>
+              <p:nvPr>
+                <p:custDataLst>
+                  <p:tags r:id="rId9"/>
+                </p:custDataLst>
+              </p:nvPr>
             </p:nvSpPr>
             <p:spPr>
               <a:xfrm>
@@ -37174,7 +37337,11 @@
             <p:nvSpPr>
               <p:cNvPr id="57" name="文本框 56"/>
               <p:cNvSpPr txBox="1"/>
-              <p:nvPr/>
+              <p:nvPr>
+                <p:custDataLst>
+                  <p:tags r:id="rId10"/>
+                </p:custDataLst>
+              </p:nvPr>
             </p:nvSpPr>
             <p:spPr>
               <a:xfrm>
@@ -37201,7 +37368,17 @@
                     <a:cs typeface="+mn-ea"/>
                     <a:sym typeface="+mn-lt"/>
                   </a:rPr>
-                  <a:t>客户管理模块</a:t>
+                  <a:t>用户</a:t>
+                </a:r>
+                <a:r>
+                  <a:rPr lang="zh-CN" altLang="en-US" sz="1400" dirty="0">
+                    <a:solidFill>
+                      <a:schemeClr val="bg1"/>
+                    </a:solidFill>
+                    <a:cs typeface="+mn-ea"/>
+                    <a:sym typeface="+mn-lt"/>
+                  </a:rPr>
+                  <a:t>管理</a:t>
                 </a:r>
                 <a:endParaRPr lang="zh-CN" altLang="en-US" sz="1400" dirty="0">
                   <a:solidFill>
@@ -37219,7 +37396,11 @@
         <p:nvGrpSpPr>
           <p:cNvPr id="67" name="组合 66"/>
           <p:cNvGrpSpPr/>
-          <p:nvPr/>
+          <p:nvPr>
+            <p:custDataLst>
+              <p:tags r:id="rId11"/>
+            </p:custDataLst>
+          </p:nvPr>
         </p:nvGrpSpPr>
         <p:grpSpPr>
           <a:xfrm>
@@ -37247,7 +37428,11 @@
             <p:nvSpPr>
               <p:cNvPr id="23" name="矩形 22"/>
               <p:cNvSpPr/>
-              <p:nvPr/>
+              <p:nvPr>
+                <p:custDataLst>
+                  <p:tags r:id="rId12"/>
+                </p:custDataLst>
+              </p:nvPr>
             </p:nvSpPr>
             <p:spPr>
               <a:xfrm>
@@ -37310,7 +37495,11 @@
               <p:nvSpPr>
                 <p:cNvPr id="25" name="梯形 24"/>
                 <p:cNvSpPr/>
-                <p:nvPr/>
+                <p:nvPr>
+                  <p:custDataLst>
+                    <p:tags r:id="rId13"/>
+                  </p:custDataLst>
+                </p:nvPr>
               </p:nvSpPr>
               <p:spPr>
                 <a:xfrm rot="18953237">
@@ -37361,7 +37550,11 @@
               <p:nvSpPr>
                 <p:cNvPr id="26" name="等腰三角形 25"/>
                 <p:cNvSpPr/>
-                <p:nvPr/>
+                <p:nvPr>
+                  <p:custDataLst>
+                    <p:tags r:id="rId14"/>
+                  </p:custDataLst>
+                </p:nvPr>
               </p:nvSpPr>
               <p:spPr>
                 <a:xfrm>
@@ -37410,7 +37603,11 @@
               <p:nvSpPr>
                 <p:cNvPr id="27" name="等腰三角形 26"/>
                 <p:cNvSpPr/>
-                <p:nvPr/>
+                <p:nvPr>
+                  <p:custDataLst>
+                    <p:tags r:id="rId15"/>
+                  </p:custDataLst>
+                </p:nvPr>
               </p:nvSpPr>
               <p:spPr>
                 <a:xfrm rot="16200000">
@@ -37463,10 +37660,14 @@
             <p:cNvPicPr>
               <a:picLocks noChangeAspect="1"/>
             </p:cNvPicPr>
-            <p:nvPr/>
+            <p:nvPr>
+              <p:custDataLst>
+                <p:tags r:id="rId16"/>
+              </p:custDataLst>
+            </p:nvPr>
           </p:nvPicPr>
           <p:blipFill>
-            <a:blip r:embed="rId2"/>
+            <a:blip r:embed="rId17"/>
             <a:stretch>
               <a:fillRect/>
             </a:stretch>
@@ -37485,12 +37686,16 @@
           <p:nvSpPr>
             <p:cNvPr id="50" name="文本框 49"/>
             <p:cNvSpPr txBox="1"/>
-            <p:nvPr/>
+            <p:nvPr>
+              <p:custDataLst>
+                <p:tags r:id="rId18"/>
+              </p:custDataLst>
+            </p:nvPr>
           </p:nvSpPr>
           <p:spPr>
             <a:xfrm>
               <a:off x="3652305" y="3116273"/>
-              <a:ext cx="2056702" cy="860425"/>
+              <a:ext cx="2056702" cy="603885"/>
             </a:xfrm>
             <a:prstGeom prst="rect">
               <a:avLst/>
@@ -37519,7 +37724,20 @@
                   <a:cs typeface="+mn-ea"/>
                   <a:sym typeface="+mn-lt"/>
                 </a:rPr>
-                <a:t>用户管理</a:t>
+                <a:t>单聊和</a:t>
+              </a:r>
+              <a:r>
+                <a:rPr lang="zh-CN" altLang="en-US" sz="1400" spc="300" dirty="0">
+                  <a:solidFill>
+                    <a:schemeClr val="tx1">
+                      <a:lumMod val="75000"/>
+                      <a:lumOff val="25000"/>
+                    </a:schemeClr>
+                  </a:solidFill>
+                  <a:cs typeface="+mn-ea"/>
+                  <a:sym typeface="+mn-lt"/>
+                </a:rPr>
+                <a:t>群聊</a:t>
               </a:r>
               <a:endParaRPr lang="zh-CN" altLang="en-US" sz="1400" spc="300" dirty="0">
                 <a:solidFill>
@@ -37549,7 +37767,7 @@
                   <a:cs typeface="+mn-ea"/>
                   <a:sym typeface="+mn-lt"/>
                 </a:rPr>
-                <a:t>角色</a:t>
+                <a:t>聊天</a:t>
               </a:r>
               <a:r>
                 <a:rPr lang="zh-CN" altLang="en-US" sz="1400" spc="300" dirty="0">
@@ -37562,37 +37780,7 @@
                   <a:cs typeface="+mn-ea"/>
                   <a:sym typeface="+mn-lt"/>
                 </a:rPr>
-                <a:t>管理</a:t>
-              </a:r>
-              <a:endParaRPr lang="zh-CN" altLang="en-US" sz="1400" spc="300" dirty="0">
-                <a:solidFill>
-                  <a:schemeClr val="tx1">
-                    <a:lumMod val="75000"/>
-                    <a:lumOff val="25000"/>
-                  </a:schemeClr>
-                </a:solidFill>
-                <a:cs typeface="+mn-ea"/>
-                <a:sym typeface="+mn-lt"/>
-              </a:endParaRPr>
-            </a:p>
-            <a:p>
-              <a:pPr algn="ctr">
-                <a:lnSpc>
-                  <a:spcPts val="2000"/>
-                </a:lnSpc>
-              </a:pPr>
-              <a:r>
-                <a:rPr lang="zh-CN" altLang="en-US" sz="1400" spc="300" dirty="0">
-                  <a:solidFill>
-                    <a:schemeClr val="tx1">
-                      <a:lumMod val="75000"/>
-                      <a:lumOff val="25000"/>
-                    </a:schemeClr>
-                  </a:solidFill>
-                  <a:cs typeface="+mn-ea"/>
-                  <a:sym typeface="+mn-lt"/>
-                </a:rPr>
-                <a:t>资源管理</a:t>
+                <a:t>方式多样</a:t>
               </a:r>
               <a:endParaRPr lang="zh-CN" altLang="en-US" sz="1400" spc="300" dirty="0">
                 <a:solidFill>
@@ -37625,7 +37813,11 @@
             <p:nvSpPr>
               <p:cNvPr id="54" name="矩形: 圆角 53"/>
               <p:cNvSpPr/>
-              <p:nvPr/>
+              <p:nvPr>
+                <p:custDataLst>
+                  <p:tags r:id="rId19"/>
+                </p:custDataLst>
+              </p:nvPr>
             </p:nvSpPr>
             <p:spPr>
               <a:xfrm>
@@ -37676,7 +37868,11 @@
             <p:nvSpPr>
               <p:cNvPr id="58" name="文本框 57"/>
               <p:cNvSpPr txBox="1"/>
-              <p:nvPr/>
+              <p:nvPr>
+                <p:custDataLst>
+                  <p:tags r:id="rId20"/>
+                </p:custDataLst>
+              </p:nvPr>
             </p:nvSpPr>
             <p:spPr>
               <a:xfrm>
@@ -37703,7 +37899,7 @@
                     <a:cs typeface="+mn-ea"/>
                     <a:sym typeface="+mn-lt"/>
                   </a:rPr>
-                  <a:t>用户管理</a:t>
+                  <a:t>即时</a:t>
                 </a:r>
                 <a:r>
                   <a:rPr lang="zh-CN" altLang="en-US" sz="1400" dirty="0">
@@ -37713,7 +37909,7 @@
                     <a:cs typeface="+mn-ea"/>
                     <a:sym typeface="+mn-lt"/>
                   </a:rPr>
-                  <a:t>模块</a:t>
+                  <a:t>通讯</a:t>
                 </a:r>
                 <a:endParaRPr lang="zh-CN" altLang="en-US" sz="1400" dirty="0">
                   <a:solidFill>
@@ -37731,7 +37927,11 @@
         <p:nvGrpSpPr>
           <p:cNvPr id="68" name="组合 67"/>
           <p:cNvGrpSpPr/>
-          <p:nvPr/>
+          <p:nvPr>
+            <p:custDataLst>
+              <p:tags r:id="rId21"/>
+            </p:custDataLst>
+          </p:nvPr>
         </p:nvGrpSpPr>
         <p:grpSpPr>
           <a:xfrm>
@@ -37759,7 +37959,11 @@
             <p:nvSpPr>
               <p:cNvPr id="29" name="矩形 28"/>
               <p:cNvSpPr/>
-              <p:nvPr/>
+              <p:nvPr>
+                <p:custDataLst>
+                  <p:tags r:id="rId22"/>
+                </p:custDataLst>
+              </p:nvPr>
             </p:nvSpPr>
             <p:spPr>
               <a:xfrm>
@@ -37822,7 +38026,11 @@
               <p:nvSpPr>
                 <p:cNvPr id="31" name="梯形 30"/>
                 <p:cNvSpPr/>
-                <p:nvPr/>
+                <p:nvPr>
+                  <p:custDataLst>
+                    <p:tags r:id="rId23"/>
+                  </p:custDataLst>
+                </p:nvPr>
               </p:nvSpPr>
               <p:spPr>
                 <a:xfrm rot="18953237">
@@ -37873,7 +38081,11 @@
               <p:nvSpPr>
                 <p:cNvPr id="32" name="等腰三角形 31"/>
                 <p:cNvSpPr/>
-                <p:nvPr/>
+                <p:nvPr>
+                  <p:custDataLst>
+                    <p:tags r:id="rId24"/>
+                  </p:custDataLst>
+                </p:nvPr>
               </p:nvSpPr>
               <p:spPr>
                 <a:xfrm>
@@ -37922,7 +38134,11 @@
               <p:nvSpPr>
                 <p:cNvPr id="33" name="等腰三角形 32"/>
                 <p:cNvSpPr/>
-                <p:nvPr/>
+                <p:nvPr>
+                  <p:custDataLst>
+                    <p:tags r:id="rId25"/>
+                  </p:custDataLst>
+                </p:nvPr>
               </p:nvSpPr>
               <p:spPr>
                 <a:xfrm rot="16200000">
@@ -37975,10 +38191,14 @@
             <p:cNvPicPr>
               <a:picLocks noChangeAspect="1"/>
             </p:cNvPicPr>
-            <p:nvPr/>
+            <p:nvPr>
+              <p:custDataLst>
+                <p:tags r:id="rId26"/>
+              </p:custDataLst>
+            </p:nvPr>
           </p:nvPicPr>
           <p:blipFill>
-            <a:blip r:embed="rId3"/>
+            <a:blip r:embed="rId27"/>
             <a:stretch>
               <a:fillRect/>
             </a:stretch>
@@ -37997,12 +38217,16 @@
           <p:nvSpPr>
             <p:cNvPr id="49" name="文本框 48"/>
             <p:cNvSpPr txBox="1"/>
-            <p:nvPr/>
+            <p:nvPr>
+              <p:custDataLst>
+                <p:tags r:id="rId28"/>
+              </p:custDataLst>
+            </p:nvPr>
           </p:nvSpPr>
           <p:spPr>
             <a:xfrm>
               <a:off x="6536221" y="3116273"/>
-              <a:ext cx="2056702" cy="603885"/>
+              <a:ext cx="2056702" cy="1116965"/>
             </a:xfrm>
             <a:prstGeom prst="rect">
               <a:avLst/>
@@ -38031,7 +38255,20 @@
                   <a:cs typeface="+mn-ea"/>
                   <a:sym typeface="+mn-lt"/>
                 </a:rPr>
-                <a:t>营销机会管理</a:t>
+                <a:t>创建</a:t>
+              </a:r>
+              <a:r>
+                <a:rPr lang="zh-CN" altLang="en-US" sz="1400" spc="300" dirty="0">
+                  <a:solidFill>
+                    <a:schemeClr val="tx1">
+                      <a:lumMod val="75000"/>
+                      <a:lumOff val="25000"/>
+                    </a:schemeClr>
+                  </a:solidFill>
+                  <a:cs typeface="+mn-ea"/>
+                  <a:sym typeface="+mn-lt"/>
+                </a:rPr>
+                <a:t>群聊</a:t>
               </a:r>
               <a:endParaRPr lang="zh-CN" altLang="en-US" sz="1400" spc="300" dirty="0">
                 <a:solidFill>
@@ -38061,7 +38298,106 @@
                   <a:cs typeface="+mn-ea"/>
                   <a:sym typeface="+mn-lt"/>
                 </a:rPr>
-                <a:t>客户开发计划</a:t>
+                <a:t>群聊信息</a:t>
+              </a:r>
+              <a:r>
+                <a:rPr lang="zh-CN" altLang="en-US" sz="1400" spc="300" dirty="0">
+                  <a:solidFill>
+                    <a:schemeClr val="tx1">
+                      <a:lumMod val="75000"/>
+                      <a:lumOff val="25000"/>
+                    </a:schemeClr>
+                  </a:solidFill>
+                  <a:cs typeface="+mn-ea"/>
+                  <a:sym typeface="+mn-lt"/>
+                </a:rPr>
+                <a:t>设置</a:t>
+              </a:r>
+              <a:endParaRPr lang="zh-CN" altLang="en-US" sz="1400" spc="300" dirty="0">
+                <a:solidFill>
+                  <a:schemeClr val="tx1">
+                    <a:lumMod val="75000"/>
+                    <a:lumOff val="25000"/>
+                  </a:schemeClr>
+                </a:solidFill>
+                <a:cs typeface="+mn-ea"/>
+                <a:sym typeface="+mn-lt"/>
+              </a:endParaRPr>
+            </a:p>
+            <a:p>
+              <a:pPr algn="ctr">
+                <a:lnSpc>
+                  <a:spcPts val="2000"/>
+                </a:lnSpc>
+              </a:pPr>
+              <a:r>
+                <a:rPr lang="zh-CN" altLang="en-US" sz="1400" spc="300" dirty="0">
+                  <a:solidFill>
+                    <a:schemeClr val="tx1">
+                      <a:lumMod val="75000"/>
+                      <a:lumOff val="25000"/>
+                    </a:schemeClr>
+                  </a:solidFill>
+                  <a:cs typeface="+mn-ea"/>
+                  <a:sym typeface="+mn-lt"/>
+                </a:rPr>
+                <a:t>群主</a:t>
+              </a:r>
+              <a:r>
+                <a:rPr lang="zh-CN" altLang="en-US" sz="1400" spc="300" dirty="0">
+                  <a:solidFill>
+                    <a:schemeClr val="tx1">
+                      <a:lumMod val="75000"/>
+                      <a:lumOff val="25000"/>
+                    </a:schemeClr>
+                  </a:solidFill>
+                  <a:cs typeface="+mn-ea"/>
+                  <a:sym typeface="+mn-lt"/>
+                </a:rPr>
+                <a:t>踢人</a:t>
+              </a:r>
+              <a:endParaRPr lang="zh-CN" altLang="en-US" sz="1400" spc="300" dirty="0">
+                <a:solidFill>
+                  <a:schemeClr val="tx1">
+                    <a:lumMod val="75000"/>
+                    <a:lumOff val="25000"/>
+                  </a:schemeClr>
+                </a:solidFill>
+                <a:cs typeface="+mn-ea"/>
+                <a:sym typeface="+mn-lt"/>
+              </a:endParaRPr>
+            </a:p>
+            <a:p>
+              <a:pPr algn="ctr">
+                <a:lnSpc>
+                  <a:spcPts val="2000"/>
+                </a:lnSpc>
+              </a:pPr>
+              <a:r>
+                <a:rPr lang="zh-CN" altLang="en-US" sz="1400" spc="300" dirty="0">
+                  <a:solidFill>
+                    <a:schemeClr val="tx1">
+                      <a:lumMod val="75000"/>
+                      <a:lumOff val="25000"/>
+                    </a:schemeClr>
+                  </a:solidFill>
+                  <a:cs typeface="+mn-ea"/>
+                  <a:sym typeface="+mn-lt"/>
+                </a:rPr>
+                <a:t>退出</a:t>
+              </a:r>
+              <a:r>
+                <a:rPr lang="zh-CN" altLang="en-US" sz="1400" spc="300" dirty="0">
+                  <a:solidFill>
+                    <a:schemeClr val="tx1">
+                      <a:lumMod val="75000"/>
+                      <a:lumOff val="25000"/>
+                    </a:schemeClr>
+                  </a:solidFill>
+                  <a:cs typeface="+mn-ea"/>
+                  <a:sym typeface="+mn-lt"/>
+                </a:rPr>
+                <a:t>群聊</a:t>
               </a:r>
               <a:endParaRPr lang="zh-CN" altLang="en-US" sz="1400" spc="300" dirty="0">
                 <a:solidFill>
@@ -38094,7 +38430,11 @@
             <p:nvSpPr>
               <p:cNvPr id="55" name="矩形: 圆角 54"/>
               <p:cNvSpPr/>
-              <p:nvPr/>
+              <p:nvPr>
+                <p:custDataLst>
+                  <p:tags r:id="rId29"/>
+                </p:custDataLst>
+              </p:nvPr>
             </p:nvSpPr>
             <p:spPr>
               <a:xfrm>
@@ -38145,7 +38485,11 @@
             <p:nvSpPr>
               <p:cNvPr id="59" name="文本框 58"/>
               <p:cNvSpPr txBox="1"/>
-              <p:nvPr/>
+              <p:nvPr>
+                <p:custDataLst>
+                  <p:tags r:id="rId30"/>
+                </p:custDataLst>
+              </p:nvPr>
             </p:nvSpPr>
             <p:spPr>
               <a:xfrm>
@@ -38172,7 +38516,7 @@
                     <a:cs typeface="+mn-ea"/>
                     <a:sym typeface="+mn-lt"/>
                   </a:rPr>
-                  <a:t>营销管理模块</a:t>
+                  <a:t>群组管理模块</a:t>
                 </a:r>
                 <a:endParaRPr lang="zh-CN" altLang="en-US" sz="1400" dirty="0">
                   <a:solidFill>
@@ -38190,7 +38534,11 @@
         <p:nvGrpSpPr>
           <p:cNvPr id="69" name="组合 68"/>
           <p:cNvGrpSpPr/>
-          <p:nvPr/>
+          <p:nvPr>
+            <p:custDataLst>
+              <p:tags r:id="rId31"/>
+            </p:custDataLst>
+          </p:nvPr>
         </p:nvGrpSpPr>
         <p:grpSpPr>
           <a:xfrm>
@@ -38218,7 +38566,11 @@
             <p:nvSpPr>
               <p:cNvPr id="35" name="矩形 34"/>
               <p:cNvSpPr/>
-              <p:nvPr/>
+              <p:nvPr>
+                <p:custDataLst>
+                  <p:tags r:id="rId32"/>
+                </p:custDataLst>
+              </p:nvPr>
             </p:nvSpPr>
             <p:spPr>
               <a:xfrm>
@@ -38281,7 +38633,11 @@
               <p:nvSpPr>
                 <p:cNvPr id="37" name="梯形 36"/>
                 <p:cNvSpPr/>
-                <p:nvPr/>
+                <p:nvPr>
+                  <p:custDataLst>
+                    <p:tags r:id="rId33"/>
+                  </p:custDataLst>
+                </p:nvPr>
               </p:nvSpPr>
               <p:spPr>
                 <a:xfrm rot="18953237">
@@ -38332,7 +38688,11 @@
               <p:nvSpPr>
                 <p:cNvPr id="38" name="等腰三角形 37"/>
                 <p:cNvSpPr/>
-                <p:nvPr/>
+                <p:nvPr>
+                  <p:custDataLst>
+                    <p:tags r:id="rId34"/>
+                  </p:custDataLst>
+                </p:nvPr>
               </p:nvSpPr>
               <p:spPr>
                 <a:xfrm>
@@ -38381,7 +38741,11 @@
               <p:nvSpPr>
                 <p:cNvPr id="39" name="等腰三角形 38"/>
                 <p:cNvSpPr/>
-                <p:nvPr/>
+                <p:nvPr>
+                  <p:custDataLst>
+                    <p:tags r:id="rId35"/>
+                  </p:custDataLst>
+                </p:nvPr>
               </p:nvSpPr>
               <p:spPr>
                 <a:xfrm rot="16200000">
@@ -38434,10 +38798,14 @@
             <p:cNvPicPr>
               <a:picLocks noChangeAspect="1"/>
             </p:cNvPicPr>
-            <p:nvPr/>
+            <p:nvPr>
+              <p:custDataLst>
+                <p:tags r:id="rId36"/>
+              </p:custDataLst>
+            </p:nvPr>
           </p:nvPicPr>
           <p:blipFill>
-            <a:blip r:embed="rId4"/>
+            <a:blip r:embed="rId37"/>
             <a:stretch>
               <a:fillRect/>
             </a:stretch>
@@ -38456,12 +38824,16 @@
           <p:nvSpPr>
             <p:cNvPr id="52" name="文本框 51"/>
             <p:cNvSpPr txBox="1"/>
-            <p:nvPr/>
+            <p:nvPr>
+              <p:custDataLst>
+                <p:tags r:id="rId38"/>
+              </p:custDataLst>
+            </p:nvPr>
           </p:nvSpPr>
           <p:spPr>
             <a:xfrm>
               <a:off x="9420136" y="3116273"/>
-              <a:ext cx="2056702" cy="347345"/>
+              <a:ext cx="2056702" cy="860425"/>
             </a:xfrm>
             <a:prstGeom prst="rect">
               <a:avLst/>
@@ -38490,7 +38862,106 @@
                   <a:cs typeface="+mn-ea"/>
                   <a:sym typeface="+mn-lt"/>
                 </a:rPr>
-                <a:t>服务创建</a:t>
+                <a:t>发布</a:t>
+              </a:r>
+              <a:r>
+                <a:rPr lang="zh-CN" altLang="en-US" sz="1400" spc="300" dirty="0">
+                  <a:solidFill>
+                    <a:schemeClr val="tx1">
+                      <a:lumMod val="75000"/>
+                      <a:lumOff val="25000"/>
+                    </a:schemeClr>
+                  </a:solidFill>
+                  <a:cs typeface="+mn-ea"/>
+                  <a:sym typeface="+mn-lt"/>
+                </a:rPr>
+                <a:t>朋友圈</a:t>
+              </a:r>
+              <a:endParaRPr lang="zh-CN" altLang="en-US" sz="1400" spc="300" dirty="0">
+                <a:solidFill>
+                  <a:schemeClr val="tx1">
+                    <a:lumMod val="75000"/>
+                    <a:lumOff val="25000"/>
+                  </a:schemeClr>
+                </a:solidFill>
+                <a:cs typeface="+mn-ea"/>
+                <a:sym typeface="+mn-lt"/>
+              </a:endParaRPr>
+            </a:p>
+            <a:p>
+              <a:pPr algn="ctr">
+                <a:lnSpc>
+                  <a:spcPts val="2000"/>
+                </a:lnSpc>
+              </a:pPr>
+              <a:r>
+                <a:rPr lang="zh-CN" altLang="en-US" sz="1400" spc="300" dirty="0">
+                  <a:solidFill>
+                    <a:schemeClr val="tx1">
+                      <a:lumMod val="75000"/>
+                      <a:lumOff val="25000"/>
+                    </a:schemeClr>
+                  </a:solidFill>
+                  <a:cs typeface="+mn-ea"/>
+                  <a:sym typeface="+mn-lt"/>
+                </a:rPr>
+                <a:t>点赞和</a:t>
+              </a:r>
+              <a:r>
+                <a:rPr lang="zh-CN" altLang="en-US" sz="1400" spc="300" dirty="0">
+                  <a:solidFill>
+                    <a:schemeClr val="tx1">
+                      <a:lumMod val="75000"/>
+                      <a:lumOff val="25000"/>
+                    </a:schemeClr>
+                  </a:solidFill>
+                  <a:cs typeface="+mn-ea"/>
+                  <a:sym typeface="+mn-lt"/>
+                </a:rPr>
+                <a:t>评论</a:t>
+              </a:r>
+              <a:endParaRPr lang="zh-CN" altLang="en-US" sz="1400" spc="300" dirty="0">
+                <a:solidFill>
+                  <a:schemeClr val="tx1">
+                    <a:lumMod val="75000"/>
+                    <a:lumOff val="25000"/>
+                  </a:schemeClr>
+                </a:solidFill>
+                <a:cs typeface="+mn-ea"/>
+                <a:sym typeface="+mn-lt"/>
+              </a:endParaRPr>
+            </a:p>
+            <a:p>
+              <a:pPr algn="ctr">
+                <a:lnSpc>
+                  <a:spcPts val="2000"/>
+                </a:lnSpc>
+              </a:pPr>
+              <a:r>
+                <a:rPr lang="zh-CN" altLang="en-US" sz="1400" spc="300" dirty="0">
+                  <a:solidFill>
+                    <a:schemeClr val="tx1">
+                      <a:lumMod val="75000"/>
+                      <a:lumOff val="25000"/>
+                    </a:schemeClr>
+                  </a:solidFill>
+                  <a:cs typeface="+mn-ea"/>
+                  <a:sym typeface="+mn-lt"/>
+                </a:rPr>
+                <a:t>朋友圈</a:t>
+              </a:r>
+              <a:r>
+                <a:rPr lang="zh-CN" altLang="en-US" sz="1400" spc="300" dirty="0">
+                  <a:solidFill>
+                    <a:schemeClr val="tx1">
+                      <a:lumMod val="75000"/>
+                      <a:lumOff val="25000"/>
+                    </a:schemeClr>
+                  </a:solidFill>
+                  <a:cs typeface="+mn-ea"/>
+                  <a:sym typeface="+mn-lt"/>
+                </a:rPr>
+                <a:t>列表</a:t>
               </a:r>
               <a:endParaRPr lang="zh-CN" altLang="en-US" sz="1400" spc="300" dirty="0">
                 <a:solidFill>
@@ -38523,7 +38994,11 @@
             <p:nvSpPr>
               <p:cNvPr id="56" name="矩形: 圆角 55"/>
               <p:cNvSpPr/>
-              <p:nvPr/>
+              <p:nvPr>
+                <p:custDataLst>
+                  <p:tags r:id="rId39"/>
+                </p:custDataLst>
+              </p:nvPr>
             </p:nvSpPr>
             <p:spPr>
               <a:xfrm>
@@ -38574,7 +39049,11 @@
             <p:nvSpPr>
               <p:cNvPr id="60" name="文本框 59"/>
               <p:cNvSpPr txBox="1"/>
-              <p:nvPr/>
+              <p:nvPr>
+                <p:custDataLst>
+                  <p:tags r:id="rId40"/>
+                </p:custDataLst>
+              </p:nvPr>
             </p:nvSpPr>
             <p:spPr>
               <a:xfrm>
@@ -38601,7 +39080,7 @@
                     <a:cs typeface="+mn-ea"/>
                     <a:sym typeface="+mn-lt"/>
                   </a:rPr>
-                  <a:t>服务管理模块</a:t>
+                  <a:t>朋友圈模块</a:t>
                 </a:r>
                 <a:endParaRPr lang="zh-CN" altLang="en-US" sz="1400" dirty="0">
                   <a:solidFill>
@@ -38617,7 +39096,7 @@
       </p:grpSp>
     </p:spTree>
     <p:custDataLst>
-      <p:tags r:id="rId5"/>
+      <p:tags r:id="rId41"/>
     </p:custDataLst>
   </p:cSld>
   <p:clrMapOvr>
@@ -39155,61 +39634,61 @@
 
 <file path=ppt/tags/tag10.xml><?xml version="1.0" encoding="utf-8"?>
 <p:tagLst xmlns:p="http://schemas.openxmlformats.org/presentationml/2006/main">
-  <p:tag name="TIMING" val="|0.3|0.3|0.3"/>
+  <p:tag name="KSO_WM_DIAGRAM_VIRTUALLY_FRAME" val="{&quot;height&quot;:287.93110236220474,&quot;left&quot;:22.49787401574803,&quot;top&quot;:150.85338582677167,&quot;width&quot;:899.0042519685039}"/>
 </p:tagLst>
 </file>
 
 <file path=ppt/tags/tag11.xml><?xml version="1.0" encoding="utf-8"?>
 <p:tagLst xmlns:p="http://schemas.openxmlformats.org/presentationml/2006/main">
-  <p:tag name="TIMING" val="|0.3"/>
+  <p:tag name="KSO_WM_DIAGRAM_VIRTUALLY_FRAME" val="{&quot;height&quot;:287.93110236220474,&quot;left&quot;:22.49787401574803,&quot;top&quot;:150.85338582677167,&quot;width&quot;:899.0042519685039}"/>
 </p:tagLst>
 </file>
 
 <file path=ppt/tags/tag12.xml><?xml version="1.0" encoding="utf-8"?>
 <p:tagLst xmlns:p="http://schemas.openxmlformats.org/presentationml/2006/main">
-  <p:tag name="TIMING" val="|0.3|0.3|0.4"/>
+  <p:tag name="KSO_WM_DIAGRAM_VIRTUALLY_FRAME" val="{&quot;height&quot;:287.93110236220474,&quot;left&quot;:22.49787401574803,&quot;top&quot;:150.85338582677167,&quot;width&quot;:899.0042519685039}"/>
 </p:tagLst>
 </file>
 
 <file path=ppt/tags/tag13.xml><?xml version="1.0" encoding="utf-8"?>
 <p:tagLst xmlns:p="http://schemas.openxmlformats.org/presentationml/2006/main">
-  <p:tag name="TIMING" val="|0.3|0.4|0.3|0.3"/>
+  <p:tag name="KSO_WM_DIAGRAM_VIRTUALLY_FRAME" val="{&quot;height&quot;:287.93110236220474,&quot;left&quot;:22.49787401574803,&quot;top&quot;:150.85338582677167,&quot;width&quot;:899.0042519685039}"/>
 </p:tagLst>
 </file>
 
 <file path=ppt/tags/tag14.xml><?xml version="1.0" encoding="utf-8"?>
 <p:tagLst xmlns:p="http://schemas.openxmlformats.org/presentationml/2006/main">
-  <p:tag name="TIMING" val="|0.3"/>
+  <p:tag name="KSO_WM_DIAGRAM_VIRTUALLY_FRAME" val="{&quot;height&quot;:287.93110236220474,&quot;left&quot;:22.49787401574803,&quot;top&quot;:150.85338582677167,&quot;width&quot;:899.0042519685039}"/>
 </p:tagLst>
 </file>
 
 <file path=ppt/tags/tag15.xml><?xml version="1.0" encoding="utf-8"?>
 <p:tagLst xmlns:p="http://schemas.openxmlformats.org/presentationml/2006/main">
-  <p:tag name="KSO_WM_UNIT_PLACING_PICTURE_USER_VIEWPORT" val="{&quot;height&quot;:5349,&quot;width&quot;:7369}"/>
+  <p:tag name="KSO_WM_DIAGRAM_VIRTUALLY_FRAME" val="{&quot;height&quot;:287.93110236220474,&quot;left&quot;:22.49787401574803,&quot;top&quot;:150.85338582677167,&quot;width&quot;:899.0042519685039}"/>
 </p:tagLst>
 </file>
 
 <file path=ppt/tags/tag16.xml><?xml version="1.0" encoding="utf-8"?>
 <p:tagLst xmlns:p="http://schemas.openxmlformats.org/presentationml/2006/main">
-  <p:tag name="TIMING" val="|0.3|0.4|0.4|0.4|0.3|0.2|0.2"/>
+  <p:tag name="KSO_WM_DIAGRAM_VIRTUALLY_FRAME" val="{&quot;height&quot;:287.93110236220474,&quot;left&quot;:22.49787401574803,&quot;top&quot;:150.85338582677167,&quot;width&quot;:899.0042519685039}"/>
 </p:tagLst>
 </file>
 
 <file path=ppt/tags/tag17.xml><?xml version="1.0" encoding="utf-8"?>
 <p:tagLst xmlns:p="http://schemas.openxmlformats.org/presentationml/2006/main">
-  <p:tag name="TIMING" val="|0.3|0.4|0.4|0.4|0.3|0.2|0.2"/>
+  <p:tag name="KSO_WM_DIAGRAM_VIRTUALLY_FRAME" val="{&quot;height&quot;:287.93110236220474,&quot;left&quot;:22.49787401574803,&quot;top&quot;:150.85338582677167,&quot;width&quot;:899.0042519685039}"/>
 </p:tagLst>
 </file>
 
 <file path=ppt/tags/tag18.xml><?xml version="1.0" encoding="utf-8"?>
 <p:tagLst xmlns:p="http://schemas.openxmlformats.org/presentationml/2006/main">
-  <p:tag name="TIMING" val="|0.3|0.4|0.4|0.4|0.3|0.2|0.2"/>
+  <p:tag name="KSO_WM_DIAGRAM_VIRTUALLY_FRAME" val="{&quot;height&quot;:287.93110236220474,&quot;left&quot;:22.49787401574803,&quot;top&quot;:150.85338582677167,&quot;width&quot;:899.0042519685039}"/>
 </p:tagLst>
 </file>
 
 <file path=ppt/tags/tag19.xml><?xml version="1.0" encoding="utf-8"?>
 <p:tagLst xmlns:p="http://schemas.openxmlformats.org/presentationml/2006/main">
-  <p:tag name="TIMING" val="|0.3|0.4|0.4|0.4|0.3|0.2|0.2"/>
+  <p:tag name="KSO_WM_DIAGRAM_VIRTUALLY_FRAME" val="{&quot;height&quot;:287.93110236220474,&quot;left&quot;:22.49787401574803,&quot;top&quot;:150.85338582677167,&quot;width&quot;:899.0042519685039}"/>
 </p:tagLst>
 </file>
 
@@ -39221,61 +39700,61 @@
 
 <file path=ppt/tags/tag20.xml><?xml version="1.0" encoding="utf-8"?>
 <p:tagLst xmlns:p="http://schemas.openxmlformats.org/presentationml/2006/main">
-  <p:tag name="TIMING" val="|0.3|0.4|0.4|0.4|0.3|0.2|0.2"/>
+  <p:tag name="KSO_WM_DIAGRAM_VIRTUALLY_FRAME" val="{&quot;height&quot;:287.93110236220474,&quot;left&quot;:22.49787401574803,&quot;top&quot;:150.85338582677167,&quot;width&quot;:899.0042519685039}"/>
 </p:tagLst>
 </file>
 
 <file path=ppt/tags/tag21.xml><?xml version="1.0" encoding="utf-8"?>
 <p:tagLst xmlns:p="http://schemas.openxmlformats.org/presentationml/2006/main">
-  <p:tag name="TIMING" val="|0.3|0.4|0.4|0.4|0.3|0.2|0.2"/>
+  <p:tag name="KSO_WM_DIAGRAM_VIRTUALLY_FRAME" val="{&quot;height&quot;:287.93110236220474,&quot;left&quot;:22.49787401574803,&quot;top&quot;:150.85338582677167,&quot;width&quot;:899.0042519685039}"/>
 </p:tagLst>
 </file>
 
 <file path=ppt/tags/tag22.xml><?xml version="1.0" encoding="utf-8"?>
 <p:tagLst xmlns:p="http://schemas.openxmlformats.org/presentationml/2006/main">
-  <p:tag name="TIMING" val="|0.3|0.4|0.4|0.4|0.3|0.2|0.2"/>
+  <p:tag name="KSO_WM_DIAGRAM_VIRTUALLY_FRAME" val="{&quot;height&quot;:287.93110236220474,&quot;left&quot;:22.49787401574803,&quot;top&quot;:150.85338582677167,&quot;width&quot;:899.0042519685039}"/>
 </p:tagLst>
 </file>
 
 <file path=ppt/tags/tag23.xml><?xml version="1.0" encoding="utf-8"?>
 <p:tagLst xmlns:p="http://schemas.openxmlformats.org/presentationml/2006/main">
-  <p:tag name="TIMING" val="|0.3|0.4|0.4|0.4|0.3|0.2|0.2"/>
+  <p:tag name="KSO_WM_DIAGRAM_VIRTUALLY_FRAME" val="{&quot;height&quot;:287.93110236220474,&quot;left&quot;:22.49787401574803,&quot;top&quot;:150.85338582677167,&quot;width&quot;:899.0042519685039}"/>
 </p:tagLst>
 </file>
 
 <file path=ppt/tags/tag24.xml><?xml version="1.0" encoding="utf-8"?>
 <p:tagLst xmlns:p="http://schemas.openxmlformats.org/presentationml/2006/main">
-  <p:tag name="TIMING" val="|0.3|0.4|0.4|0.4|0.3|0.2|0.2"/>
+  <p:tag name="KSO_WM_DIAGRAM_VIRTUALLY_FRAME" val="{&quot;height&quot;:287.93110236220474,&quot;left&quot;:22.49787401574803,&quot;top&quot;:150.85338582677167,&quot;width&quot;:899.0042519685039}"/>
 </p:tagLst>
 </file>
 
 <file path=ppt/tags/tag25.xml><?xml version="1.0" encoding="utf-8"?>
 <p:tagLst xmlns:p="http://schemas.openxmlformats.org/presentationml/2006/main">
-  <p:tag name="TIMING" val="|0.3|0.4|0.4|0.4|0.3|0.2|0.2"/>
+  <p:tag name="KSO_WM_DIAGRAM_VIRTUALLY_FRAME" val="{&quot;height&quot;:287.93110236220474,&quot;left&quot;:22.49787401574803,&quot;top&quot;:150.85338582677167,&quot;width&quot;:899.0042519685039}"/>
 </p:tagLst>
 </file>
 
 <file path=ppt/tags/tag26.xml><?xml version="1.0" encoding="utf-8"?>
 <p:tagLst xmlns:p="http://schemas.openxmlformats.org/presentationml/2006/main">
-  <p:tag name="TIMING" val="|0.3|0.4|0.4|0.4|0.3|0.2|0.2"/>
+  <p:tag name="KSO_WM_DIAGRAM_VIRTUALLY_FRAME" val="{&quot;height&quot;:287.93110236220474,&quot;left&quot;:22.49787401574803,&quot;top&quot;:150.85338582677167,&quot;width&quot;:899.0042519685039}"/>
 </p:tagLst>
 </file>
 
 <file path=ppt/tags/tag27.xml><?xml version="1.0" encoding="utf-8"?>
 <p:tagLst xmlns:p="http://schemas.openxmlformats.org/presentationml/2006/main">
-  <p:tag name="TIMING" val="|0.3|0.4|0.4|0.4|0.3|0.2|0.2"/>
+  <p:tag name="KSO_WM_DIAGRAM_VIRTUALLY_FRAME" val="{&quot;height&quot;:287.93110236220474,&quot;left&quot;:22.49787401574803,&quot;top&quot;:150.85338582677167,&quot;width&quot;:899.0042519685039}"/>
 </p:tagLst>
 </file>
 
 <file path=ppt/tags/tag28.xml><?xml version="1.0" encoding="utf-8"?>
 <p:tagLst xmlns:p="http://schemas.openxmlformats.org/presentationml/2006/main">
-  <p:tag name="TIMING" val="|0.3|0.4|0.4|0.4|0.3|0.2|0.2"/>
+  <p:tag name="KSO_WM_DIAGRAM_VIRTUALLY_FRAME" val="{&quot;height&quot;:287.93110236220474,&quot;left&quot;:22.49787401574803,&quot;top&quot;:150.85338582677167,&quot;width&quot;:899.0042519685039}"/>
 </p:tagLst>
 </file>
 
 <file path=ppt/tags/tag29.xml><?xml version="1.0" encoding="utf-8"?>
 <p:tagLst xmlns:p="http://schemas.openxmlformats.org/presentationml/2006/main">
-  <p:tag name="TIMING" val="|0.3|0.4|0.4|0.4|0.3|0.2|0.2"/>
+  <p:tag name="KSO_WM_DIAGRAM_VIRTUALLY_FRAME" val="{&quot;height&quot;:287.93110236220474,&quot;left&quot;:22.49787401574803,&quot;top&quot;:150.85338582677167,&quot;width&quot;:899.0042519685039}"/>
 </p:tagLst>
 </file>
 
@@ -39287,44 +39766,61 @@
 
 <file path=ppt/tags/tag30.xml><?xml version="1.0" encoding="utf-8"?>
 <p:tagLst xmlns:p="http://schemas.openxmlformats.org/presentationml/2006/main">
-  <p:tag name="TIMING" val="|0.3|0.4|0.4|0.4|0.3|0.2|0.2"/>
+  <p:tag name="KSO_WM_DIAGRAM_VIRTUALLY_FRAME" val="{&quot;height&quot;:287.93110236220474,&quot;left&quot;:22.49787401574803,&quot;top&quot;:150.85338582677167,&quot;width&quot;:899.0042519685039}"/>
 </p:tagLst>
 </file>
 
 <file path=ppt/tags/tag31.xml><?xml version="1.0" encoding="utf-8"?>
 <p:tagLst xmlns:p="http://schemas.openxmlformats.org/presentationml/2006/main">
-  <p:tag name="TIMING" val="|0.3|0.3|0.3|0.4"/>
+  <p:tag name="KSO_WM_DIAGRAM_VIRTUALLY_FRAME" val="{&quot;height&quot;:287.93110236220474,&quot;left&quot;:22.49787401574803,&quot;top&quot;:150.85338582677167,&quot;width&quot;:899.0042519685039}"/>
 </p:tagLst>
 </file>
 
 <file path=ppt/tags/tag32.xml><?xml version="1.0" encoding="utf-8"?>
 <p:tagLst xmlns:p="http://schemas.openxmlformats.org/presentationml/2006/main">
-  <p:tag name="TIMING" val="|0.3|0.2|0.1|0.2|0.3|0.2|0.3|0.3|0.3|0.3|0.3|0.3"/>
+  <p:tag name="KSO_WM_DIAGRAM_VIRTUALLY_FRAME" val="{&quot;height&quot;:287.93110236220474,&quot;left&quot;:22.49787401574803,&quot;top&quot;:150.85338582677167,&quot;width&quot;:899.0042519685039}"/>
 </p:tagLst>
 </file>
 
 <file path=ppt/tags/tag33.xml><?xml version="1.0" encoding="utf-8"?>
 <p:tagLst xmlns:p="http://schemas.openxmlformats.org/presentationml/2006/main">
-  <p:tag name="TIMING" val="|0.3|0.3|0.3|0.4"/>
+  <p:tag name="KSO_WM_DIAGRAM_VIRTUALLY_FRAME" val="{&quot;height&quot;:287.93110236220474,&quot;left&quot;:22.49787401574803,&quot;top&quot;:150.85338582677167,&quot;width&quot;:899.0042519685039}"/>
 </p:tagLst>
 </file>
 
 <file path=ppt/tags/tag34.xml><?xml version="1.0" encoding="utf-8"?>
 <p:tagLst xmlns:p="http://schemas.openxmlformats.org/presentationml/2006/main">
-  <p:tag name="TIMING" val="|0.3|0.3|0.3|0.3|0.3"/>
+  <p:tag name="KSO_WM_DIAGRAM_VIRTUALLY_FRAME" val="{&quot;height&quot;:287.93110236220474,&quot;left&quot;:22.49787401574803,&quot;top&quot;:150.85338582677167,&quot;width&quot;:899.0042519685039}"/>
 </p:tagLst>
 </file>
 
 <file path=ppt/tags/tag35.xml><?xml version="1.0" encoding="utf-8"?>
 <p:tagLst xmlns:p="http://schemas.openxmlformats.org/presentationml/2006/main">
-  <p:tag name="TIMING" val="|0.3|0.2|0.2|0.2"/>
+  <p:tag name="KSO_WM_DIAGRAM_VIRTUALLY_FRAME" val="{&quot;height&quot;:287.93110236220474,&quot;left&quot;:22.49787401574803,&quot;top&quot;:150.85338582677167,&quot;width&quot;:899.0042519685039}"/>
 </p:tagLst>
 </file>
 
 <file path=ppt/tags/tag36.xml><?xml version="1.0" encoding="utf-8"?>
 <p:tagLst xmlns:p="http://schemas.openxmlformats.org/presentationml/2006/main">
-  <p:tag name="COMMONDATA" val="eyJoZGlkIjoiN2E1NmRjNzhlMjE3N2Q3ZjMyMTFkMWQ1ZmM5MTFhNjYifQ=="/>
-  <p:tag name="KSO_WPP_MARK_KEY" val="67848404-78da-4217-895d-bac7dbbd95fd"/>
+  <p:tag name="KSO_WM_DIAGRAM_VIRTUALLY_FRAME" val="{&quot;height&quot;:287.93110236220474,&quot;left&quot;:22.49787401574803,&quot;top&quot;:150.85338582677167,&quot;width&quot;:899.0042519685039}"/>
+</p:tagLst>
+</file>
+
+<file path=ppt/tags/tag37.xml><?xml version="1.0" encoding="utf-8"?>
+<p:tagLst xmlns:p="http://schemas.openxmlformats.org/presentationml/2006/main">
+  <p:tag name="KSO_WM_DIAGRAM_VIRTUALLY_FRAME" val="{&quot;height&quot;:287.93110236220474,&quot;left&quot;:22.49787401574803,&quot;top&quot;:150.85338582677167,&quot;width&quot;:899.0042519685039}"/>
+</p:tagLst>
+</file>
+
+<file path=ppt/tags/tag38.xml><?xml version="1.0" encoding="utf-8"?>
+<p:tagLst xmlns:p="http://schemas.openxmlformats.org/presentationml/2006/main">
+  <p:tag name="KSO_WM_DIAGRAM_VIRTUALLY_FRAME" val="{&quot;height&quot;:287.93110236220474,&quot;left&quot;:22.49787401574803,&quot;top&quot;:150.85338582677167,&quot;width&quot;:899.0042519685039}"/>
+</p:tagLst>
+</file>
+
+<file path=ppt/tags/tag39.xml><?xml version="1.0" encoding="utf-8"?>
+<p:tagLst xmlns:p="http://schemas.openxmlformats.org/presentationml/2006/main">
+  <p:tag name="KSO_WM_DIAGRAM_VIRTUALLY_FRAME" val="{&quot;height&quot;:287.93110236220474,&quot;left&quot;:22.49787401574803,&quot;top&quot;:150.85338582677167,&quot;width&quot;:899.0042519685039}"/>
 </p:tagLst>
 </file>
 
@@ -39334,9 +39830,129 @@
 </p:tagLst>
 </file>
 
+<file path=ppt/tags/tag40.xml><?xml version="1.0" encoding="utf-8"?>
+<p:tagLst xmlns:p="http://schemas.openxmlformats.org/presentationml/2006/main">
+  <p:tag name="KSO_WM_DIAGRAM_VIRTUALLY_FRAME" val="{&quot;height&quot;:287.93110236220474,&quot;left&quot;:22.49787401574803,&quot;top&quot;:150.85338582677167,&quot;width&quot;:899.0042519685039}"/>
+</p:tagLst>
+</file>
+
+<file path=ppt/tags/tag41.xml><?xml version="1.0" encoding="utf-8"?>
+<p:tagLst xmlns:p="http://schemas.openxmlformats.org/presentationml/2006/main">
+  <p:tag name="KSO_WM_DIAGRAM_VIRTUALLY_FRAME" val="{&quot;height&quot;:287.93110236220474,&quot;left&quot;:22.49787401574803,&quot;top&quot;:150.85338582677167,&quot;width&quot;:899.0042519685039}"/>
+</p:tagLst>
+</file>
+
+<file path=ppt/tags/tag42.xml><?xml version="1.0" encoding="utf-8"?>
+<p:tagLst xmlns:p="http://schemas.openxmlformats.org/presentationml/2006/main">
+  <p:tag name="KSO_WM_DIAGRAM_VIRTUALLY_FRAME" val="{&quot;height&quot;:287.93110236220474,&quot;left&quot;:22.49787401574803,&quot;top&quot;:150.85338582677167,&quot;width&quot;:899.0042519685039}"/>
+</p:tagLst>
+</file>
+
+<file path=ppt/tags/tag43.xml><?xml version="1.0" encoding="utf-8"?>
+<p:tagLst xmlns:p="http://schemas.openxmlformats.org/presentationml/2006/main">
+  <p:tag name="KSO_WM_DIAGRAM_VIRTUALLY_FRAME" val="{&quot;height&quot;:287.93110236220474,&quot;left&quot;:22.49787401574803,&quot;top&quot;:150.85338582677167,&quot;width&quot;:899.0042519685039}"/>
+</p:tagLst>
+</file>
+
+<file path=ppt/tags/tag44.xml><?xml version="1.0" encoding="utf-8"?>
+<p:tagLst xmlns:p="http://schemas.openxmlformats.org/presentationml/2006/main">
+  <p:tag name="KSO_WM_DIAGRAM_VIRTUALLY_FRAME" val="{&quot;height&quot;:287.93110236220474,&quot;left&quot;:22.49787401574803,&quot;top&quot;:150.85338582677167,&quot;width&quot;:899.0042519685039}"/>
+</p:tagLst>
+</file>
+
+<file path=ppt/tags/tag45.xml><?xml version="1.0" encoding="utf-8"?>
+<p:tagLst xmlns:p="http://schemas.openxmlformats.org/presentationml/2006/main">
+  <p:tag name="TIMING" val="|0.3|0.3"/>
+</p:tagLst>
+</file>
+
+<file path=ppt/tags/tag46.xml><?xml version="1.0" encoding="utf-8"?>
+<p:tagLst xmlns:p="http://schemas.openxmlformats.org/presentationml/2006/main">
+  <p:tag name="TIMING" val="|0.3|0.3|0.3"/>
+</p:tagLst>
+</file>
+
+<file path=ppt/tags/tag47.xml><?xml version="1.0" encoding="utf-8"?>
+<p:tagLst xmlns:p="http://schemas.openxmlformats.org/presentationml/2006/main">
+  <p:tag name="KSO_WM_DIAGRAM_VIRTUALLY_FRAME" val="{&quot;height&quot;:412.61748031496063,&quot;left&quot;:89.28409448818897,&quot;top&quot;:88.92858267716535,&quot;width&quot;:781.431968503937}"/>
+</p:tagLst>
+</file>
+
+<file path=ppt/tags/tag48.xml><?xml version="1.0" encoding="utf-8"?>
+<p:tagLst xmlns:p="http://schemas.openxmlformats.org/presentationml/2006/main">
+  <p:tag name="KSO_WM_DIAGRAM_VIRTUALLY_FRAME" val="{&quot;height&quot;:412.61748031496063,&quot;left&quot;:89.28409448818897,&quot;top&quot;:88.92858267716535,&quot;width&quot;:781.431968503937}"/>
+</p:tagLst>
+</file>
+
+<file path=ppt/tags/tag49.xml><?xml version="1.0" encoding="utf-8"?>
+<p:tagLst xmlns:p="http://schemas.openxmlformats.org/presentationml/2006/main">
+  <p:tag name="KSO_WM_DIAGRAM_VIRTUALLY_FRAME" val="{&quot;height&quot;:412.61748031496063,&quot;left&quot;:89.28409448818897,&quot;top&quot;:88.92858267716535,&quot;width&quot;:781.431968503937}"/>
+</p:tagLst>
+</file>
+
 <file path=ppt/tags/tag5.xml><?xml version="1.0" encoding="utf-8"?>
 <p:tagLst xmlns:p="http://schemas.openxmlformats.org/presentationml/2006/main">
   <p:tag name="TIMING" val="|0.4|0.4|0.4"/>
+</p:tagLst>
+</file>
+
+<file path=ppt/tags/tag50.xml><?xml version="1.0" encoding="utf-8"?>
+<p:tagLst xmlns:p="http://schemas.openxmlformats.org/presentationml/2006/main">
+  <p:tag name="KSO_WM_DIAGRAM_VIRTUALLY_FRAME" val="{&quot;height&quot;:412.61748031496063,&quot;left&quot;:89.28409448818897,&quot;top&quot;:88.92858267716535,&quot;width&quot;:781.431968503937}"/>
+</p:tagLst>
+</file>
+
+<file path=ppt/tags/tag51.xml><?xml version="1.0" encoding="utf-8"?>
+<p:tagLst xmlns:p="http://schemas.openxmlformats.org/presentationml/2006/main">
+  <p:tag name="KSO_WM_DIAGRAM_VIRTUALLY_FRAME" val="{&quot;height&quot;:412.61748031496063,&quot;left&quot;:89.28409448818897,&quot;top&quot;:88.92858267716535,&quot;width&quot;:781.431968503937}"/>
+</p:tagLst>
+</file>
+
+<file path=ppt/tags/tag52.xml><?xml version="1.0" encoding="utf-8"?>
+<p:tagLst xmlns:p="http://schemas.openxmlformats.org/presentationml/2006/main">
+  <p:tag name="KSO_WM_DIAGRAM_VIRTUALLY_FRAME" val="{&quot;height&quot;:412.61748031496063,&quot;left&quot;:89.28409448818897,&quot;top&quot;:88.92858267716535,&quot;width&quot;:781.431968503937}"/>
+</p:tagLst>
+</file>
+
+<file path=ppt/tags/tag53.xml><?xml version="1.0" encoding="utf-8"?>
+<p:tagLst xmlns:p="http://schemas.openxmlformats.org/presentationml/2006/main">
+  <p:tag name="KSO_WM_DIAGRAM_VIRTUALLY_FRAME" val="{&quot;height&quot;:412.61748031496063,&quot;left&quot;:89.28409448818897,&quot;top&quot;:88.92858267716535,&quot;width&quot;:781.431968503937}"/>
+</p:tagLst>
+</file>
+
+<file path=ppt/tags/tag54.xml><?xml version="1.0" encoding="utf-8"?>
+<p:tagLst xmlns:p="http://schemas.openxmlformats.org/presentationml/2006/main">
+  <p:tag name="KSO_WM_DIAGRAM_VIRTUALLY_FRAME" val="{&quot;height&quot;:412.61748031496063,&quot;left&quot;:89.28409448818897,&quot;top&quot;:88.92858267716535,&quot;width&quot;:781.431968503937}"/>
+</p:tagLst>
+</file>
+
+<file path=ppt/tags/tag55.xml><?xml version="1.0" encoding="utf-8"?>
+<p:tagLst xmlns:p="http://schemas.openxmlformats.org/presentationml/2006/main">
+  <p:tag name="KSO_WM_DIAGRAM_VIRTUALLY_FRAME" val="{&quot;height&quot;:412.61748031496063,&quot;left&quot;:89.28409448818897,&quot;top&quot;:88.92858267716535,&quot;width&quot;:781.431968503937}"/>
+</p:tagLst>
+</file>
+
+<file path=ppt/tags/tag56.xml><?xml version="1.0" encoding="utf-8"?>
+<p:tagLst xmlns:p="http://schemas.openxmlformats.org/presentationml/2006/main">
+  <p:tag name="KSO_WM_DIAGRAM_VIRTUALLY_FRAME" val="{&quot;height&quot;:412.61748031496063,&quot;left&quot;:89.28409448818897,&quot;top&quot;:88.92858267716535,&quot;width&quot;:781.431968503937}"/>
+</p:tagLst>
+</file>
+
+<file path=ppt/tags/tag57.xml><?xml version="1.0" encoding="utf-8"?>
+<p:tagLst xmlns:p="http://schemas.openxmlformats.org/presentationml/2006/main">
+  <p:tag name="KSO_WM_DIAGRAM_VIRTUALLY_FRAME" val="{&quot;height&quot;:412.61748031496063,&quot;left&quot;:89.28409448818897,&quot;top&quot;:88.92858267716535,&quot;width&quot;:781.431968503937}"/>
+</p:tagLst>
+</file>
+
+<file path=ppt/tags/tag58.xml><?xml version="1.0" encoding="utf-8"?>
+<p:tagLst xmlns:p="http://schemas.openxmlformats.org/presentationml/2006/main">
+  <p:tag name="KSO_WM_DIAGRAM_VIRTUALLY_FRAME" val="{&quot;height&quot;:412.61748031496063,&quot;left&quot;:89.28409448818897,&quot;top&quot;:88.92858267716535,&quot;width&quot;:781.431968503937}"/>
+</p:tagLst>
+</file>
+
+<file path=ppt/tags/tag59.xml><?xml version="1.0" encoding="utf-8"?>
+<p:tagLst xmlns:p="http://schemas.openxmlformats.org/presentationml/2006/main">
+  <p:tag name="KSO_WM_DIAGRAM_VIRTUALLY_FRAME" val="{&quot;height&quot;:412.61748031496063,&quot;left&quot;:89.28409448818897,&quot;top&quot;:88.92858267716535,&quot;width&quot;:781.431968503937}"/>
 </p:tagLst>
 </file>
 
@@ -39346,9 +39962,129 @@
 </p:tagLst>
 </file>
 
+<file path=ppt/tags/tag60.xml><?xml version="1.0" encoding="utf-8"?>
+<p:tagLst xmlns:p="http://schemas.openxmlformats.org/presentationml/2006/main">
+  <p:tag name="KSO_WM_DIAGRAM_VIRTUALLY_FRAME" val="{&quot;height&quot;:412.61748031496063,&quot;left&quot;:89.28409448818897,&quot;top&quot;:88.92858267716535,&quot;width&quot;:781.431968503937}"/>
+</p:tagLst>
+</file>
+
+<file path=ppt/tags/tag61.xml><?xml version="1.0" encoding="utf-8"?>
+<p:tagLst xmlns:p="http://schemas.openxmlformats.org/presentationml/2006/main">
+  <p:tag name="KSO_WM_DIAGRAM_VIRTUALLY_FRAME" val="{&quot;height&quot;:412.61748031496063,&quot;left&quot;:89.28409448818897,&quot;top&quot;:88.92858267716535,&quot;width&quot;:781.431968503937}"/>
+</p:tagLst>
+</file>
+
+<file path=ppt/tags/tag62.xml><?xml version="1.0" encoding="utf-8"?>
+<p:tagLst xmlns:p="http://schemas.openxmlformats.org/presentationml/2006/main">
+  <p:tag name="KSO_WM_DIAGRAM_VIRTUALLY_FRAME" val="{&quot;height&quot;:412.61748031496063,&quot;left&quot;:89.28409448818897,&quot;top&quot;:88.92858267716535,&quot;width&quot;:781.431968503937}"/>
+</p:tagLst>
+</file>
+
+<file path=ppt/tags/tag63.xml><?xml version="1.0" encoding="utf-8"?>
+<p:tagLst xmlns:p="http://schemas.openxmlformats.org/presentationml/2006/main">
+  <p:tag name="KSO_WM_DIAGRAM_VIRTUALLY_FRAME" val="{&quot;height&quot;:412.61748031496063,&quot;left&quot;:89.28409448818897,&quot;top&quot;:88.92858267716535,&quot;width&quot;:781.431968503937}"/>
+</p:tagLst>
+</file>
+
+<file path=ppt/tags/tag64.xml><?xml version="1.0" encoding="utf-8"?>
+<p:tagLst xmlns:p="http://schemas.openxmlformats.org/presentationml/2006/main">
+  <p:tag name="KSO_WM_DIAGRAM_VIRTUALLY_FRAME" val="{&quot;height&quot;:412.61748031496063,&quot;left&quot;:89.28409448818897,&quot;top&quot;:88.92858267716535,&quot;width&quot;:781.431968503937}"/>
+</p:tagLst>
+</file>
+
+<file path=ppt/tags/tag65.xml><?xml version="1.0" encoding="utf-8"?>
+<p:tagLst xmlns:p="http://schemas.openxmlformats.org/presentationml/2006/main">
+  <p:tag name="KSO_WM_DIAGRAM_VIRTUALLY_FRAME" val="{&quot;height&quot;:412.61748031496063,&quot;left&quot;:89.28409448818897,&quot;top&quot;:88.92858267716535,&quot;width&quot;:781.431968503937}"/>
+</p:tagLst>
+</file>
+
+<file path=ppt/tags/tag66.xml><?xml version="1.0" encoding="utf-8"?>
+<p:tagLst xmlns:p="http://schemas.openxmlformats.org/presentationml/2006/main">
+  <p:tag name="KSO_WM_DIAGRAM_VIRTUALLY_FRAME" val="{&quot;height&quot;:412.61748031496063,&quot;left&quot;:89.28409448818897,&quot;top&quot;:88.92858267716535,&quot;width&quot;:781.431968503937}"/>
+</p:tagLst>
+</file>
+
+<file path=ppt/tags/tag67.xml><?xml version="1.0" encoding="utf-8"?>
+<p:tagLst xmlns:p="http://schemas.openxmlformats.org/presentationml/2006/main">
+  <p:tag name="KSO_WM_DIAGRAM_VIRTUALLY_FRAME" val="{&quot;height&quot;:412.61748031496063,&quot;left&quot;:89.28409448818897,&quot;top&quot;:88.92858267716535,&quot;width&quot;:781.431968503937}"/>
+</p:tagLst>
+</file>
+
+<file path=ppt/tags/tag68.xml><?xml version="1.0" encoding="utf-8"?>
+<p:tagLst xmlns:p="http://schemas.openxmlformats.org/presentationml/2006/main">
+  <p:tag name="TIMING" val="|0.3"/>
+</p:tagLst>
+</file>
+
+<file path=ppt/tags/tag69.xml><?xml version="1.0" encoding="utf-8"?>
+<p:tagLst xmlns:p="http://schemas.openxmlformats.org/presentationml/2006/main">
+  <p:tag name="KSO_WM_DIAGRAM_VIRTUALLY_FRAME" val="{&quot;height&quot;:298.9770866141733,&quot;left&quot;:453.5,&quot;top&quot;:137.3367716535433,&quot;width&quot;:436.7029921259842}"/>
+</p:tagLst>
+</file>
+
 <file path=ppt/tags/tag7.xml><?xml version="1.0" encoding="utf-8"?>
 <p:tagLst xmlns:p="http://schemas.openxmlformats.org/presentationml/2006/main">
   <p:tag name="TIMING" val="|0.4|0.4|0.4"/>
+</p:tagLst>
+</file>
+
+<file path=ppt/tags/tag70.xml><?xml version="1.0" encoding="utf-8"?>
+<p:tagLst xmlns:p="http://schemas.openxmlformats.org/presentationml/2006/main">
+  <p:tag name="KSO_WM_DIAGRAM_VIRTUALLY_FRAME" val="{&quot;height&quot;:298.9770866141733,&quot;left&quot;:453.5,&quot;top&quot;:137.3367716535433,&quot;width&quot;:436.7029921259842}"/>
+</p:tagLst>
+</file>
+
+<file path=ppt/tags/tag71.xml><?xml version="1.0" encoding="utf-8"?>
+<p:tagLst xmlns:p="http://schemas.openxmlformats.org/presentationml/2006/main">
+  <p:tag name="KSO_WM_DIAGRAM_VIRTUALLY_FRAME" val="{&quot;height&quot;:298.9770866141733,&quot;left&quot;:453.5,&quot;top&quot;:137.3367716535433,&quot;width&quot;:436.7029921259842}"/>
+</p:tagLst>
+</file>
+
+<file path=ppt/tags/tag72.xml><?xml version="1.0" encoding="utf-8"?>
+<p:tagLst xmlns:p="http://schemas.openxmlformats.org/presentationml/2006/main">
+  <p:tag name="KSO_WM_DIAGRAM_VIRTUALLY_FRAME" val="{&quot;height&quot;:298.9770866141733,&quot;left&quot;:453.5,&quot;top&quot;:137.3367716535433,&quot;width&quot;:436.7029921259842}"/>
+</p:tagLst>
+</file>
+
+<file path=ppt/tags/tag73.xml><?xml version="1.0" encoding="utf-8"?>
+<p:tagLst xmlns:p="http://schemas.openxmlformats.org/presentationml/2006/main">
+  <p:tag name="KSO_WM_DIAGRAM_VIRTUALLY_FRAME" val="{&quot;height&quot;:298.9770866141733,&quot;left&quot;:453.5,&quot;top&quot;:137.3367716535433,&quot;width&quot;:436.7029921259842}"/>
+</p:tagLst>
+</file>
+
+<file path=ppt/tags/tag74.xml><?xml version="1.0" encoding="utf-8"?>
+<p:tagLst xmlns:p="http://schemas.openxmlformats.org/presentationml/2006/main">
+  <p:tag name="KSO_WM_DIAGRAM_VIRTUALLY_FRAME" val="{&quot;height&quot;:298.9770866141733,&quot;left&quot;:453.5,&quot;top&quot;:137.3367716535433,&quot;width&quot;:436.7029921259842}"/>
+</p:tagLst>
+</file>
+
+<file path=ppt/tags/tag75.xml><?xml version="1.0" encoding="utf-8"?>
+<p:tagLst xmlns:p="http://schemas.openxmlformats.org/presentationml/2006/main">
+  <p:tag name="TIMING" val="|0.3|0.3|0.4"/>
+</p:tagLst>
+</file>
+
+<file path=ppt/tags/tag76.xml><?xml version="1.0" encoding="utf-8"?>
+<p:tagLst xmlns:p="http://schemas.openxmlformats.org/presentationml/2006/main">
+  <p:tag name="TIMING" val="|0.3|0.4|0.3|0.3"/>
+</p:tagLst>
+</file>
+
+<file path=ppt/tags/tag77.xml><?xml version="1.0" encoding="utf-8"?>
+<p:tagLst xmlns:p="http://schemas.openxmlformats.org/presentationml/2006/main">
+  <p:tag name="TIMING" val="|0.3"/>
+</p:tagLst>
+</file>
+
+<file path=ppt/tags/tag78.xml><?xml version="1.0" encoding="utf-8"?>
+<p:tagLst xmlns:p="http://schemas.openxmlformats.org/presentationml/2006/main">
+  <p:tag name="TIMING" val="|0.3|0.4|0.4|0.4|0.3|0.2|0.2"/>
+</p:tagLst>
+</file>
+
+<file path=ppt/tags/tag79.xml><?xml version="1.0" encoding="utf-8"?>
+<p:tagLst xmlns:p="http://schemas.openxmlformats.org/presentationml/2006/main">
+  <p:tag name="TIMING" val="|0.3|0.4|0.4|0.4|0.3|0.2|0.2"/>
 </p:tagLst>
 </file>
 
@@ -39358,9 +40094,124 @@
 </p:tagLst>
 </file>
 
+<file path=ppt/tags/tag80.xml><?xml version="1.0" encoding="utf-8"?>
+<p:tagLst xmlns:p="http://schemas.openxmlformats.org/presentationml/2006/main">
+  <p:tag name="TIMING" val="|0.3|0.4|0.4|0.4|0.3|0.2|0.2"/>
+</p:tagLst>
+</file>
+
+<file path=ppt/tags/tag81.xml><?xml version="1.0" encoding="utf-8"?>
+<p:tagLst xmlns:p="http://schemas.openxmlformats.org/presentationml/2006/main">
+  <p:tag name="TIMING" val="|0.3|0.4|0.4|0.4|0.3|0.2|0.2"/>
+</p:tagLst>
+</file>
+
+<file path=ppt/tags/tag82.xml><?xml version="1.0" encoding="utf-8"?>
+<p:tagLst xmlns:p="http://schemas.openxmlformats.org/presentationml/2006/main">
+  <p:tag name="TIMING" val="|0.3|0.4|0.4|0.4|0.3|0.2|0.2"/>
+</p:tagLst>
+</file>
+
+<file path=ppt/tags/tag83.xml><?xml version="1.0" encoding="utf-8"?>
+<p:tagLst xmlns:p="http://schemas.openxmlformats.org/presentationml/2006/main">
+  <p:tag name="TIMING" val="|0.3|0.4|0.4|0.4|0.3|0.2|0.2"/>
+</p:tagLst>
+</file>
+
+<file path=ppt/tags/tag84.xml><?xml version="1.0" encoding="utf-8"?>
+<p:tagLst xmlns:p="http://schemas.openxmlformats.org/presentationml/2006/main">
+  <p:tag name="TIMING" val="|0.3|0.4|0.4|0.4|0.3|0.2|0.2"/>
+</p:tagLst>
+</file>
+
+<file path=ppt/tags/tag85.xml><?xml version="1.0" encoding="utf-8"?>
+<p:tagLst xmlns:p="http://schemas.openxmlformats.org/presentationml/2006/main">
+  <p:tag name="TIMING" val="|0.3|0.4|0.4|0.4|0.3|0.2|0.2"/>
+</p:tagLst>
+</file>
+
+<file path=ppt/tags/tag86.xml><?xml version="1.0" encoding="utf-8"?>
+<p:tagLst xmlns:p="http://schemas.openxmlformats.org/presentationml/2006/main">
+  <p:tag name="TIMING" val="|0.3|0.4|0.4|0.4|0.3|0.2|0.2"/>
+</p:tagLst>
+</file>
+
+<file path=ppt/tags/tag87.xml><?xml version="1.0" encoding="utf-8"?>
+<p:tagLst xmlns:p="http://schemas.openxmlformats.org/presentationml/2006/main">
+  <p:tag name="TIMING" val="|0.3|0.4|0.4|0.4|0.3|0.2|0.2"/>
+</p:tagLst>
+</file>
+
+<file path=ppt/tags/tag88.xml><?xml version="1.0" encoding="utf-8"?>
+<p:tagLst xmlns:p="http://schemas.openxmlformats.org/presentationml/2006/main">
+  <p:tag name="TIMING" val="|0.3|0.4|0.4|0.4|0.3|0.2|0.2"/>
+</p:tagLst>
+</file>
+
+<file path=ppt/tags/tag89.xml><?xml version="1.0" encoding="utf-8"?>
+<p:tagLst xmlns:p="http://schemas.openxmlformats.org/presentationml/2006/main">
+  <p:tag name="TIMING" val="|0.3|0.4|0.4|0.4|0.3|0.2|0.2"/>
+</p:tagLst>
+</file>
+
 <file path=ppt/tags/tag9.xml><?xml version="1.0" encoding="utf-8"?>
 <p:tagLst xmlns:p="http://schemas.openxmlformats.org/presentationml/2006/main">
-  <p:tag name="TIMING" val="|0.3|0.3"/>
+  <p:tag name="KSO_WM_DIAGRAM_VIRTUALLY_FRAME" val="{&quot;height&quot;:287.93110236220474,&quot;left&quot;:22.49787401574803,&quot;top&quot;:150.85338582677167,&quot;width&quot;:899.0042519685039}"/>
+</p:tagLst>
+</file>
+
+<file path=ppt/tags/tag90.xml><?xml version="1.0" encoding="utf-8"?>
+<p:tagLst xmlns:p="http://schemas.openxmlformats.org/presentationml/2006/main">
+  <p:tag name="TIMING" val="|0.3|0.4|0.4|0.4|0.3|0.2|0.2"/>
+</p:tagLst>
+</file>
+
+<file path=ppt/tags/tag91.xml><?xml version="1.0" encoding="utf-8"?>
+<p:tagLst xmlns:p="http://schemas.openxmlformats.org/presentationml/2006/main">
+  <p:tag name="TIMING" val="|0.3|0.4|0.4|0.4|0.3|0.2|0.2"/>
+</p:tagLst>
+</file>
+
+<file path=ppt/tags/tag92.xml><?xml version="1.0" encoding="utf-8"?>
+<p:tagLst xmlns:p="http://schemas.openxmlformats.org/presentationml/2006/main">
+  <p:tag name="TIMING" val="|0.3|0.4|0.4|0.4|0.3|0.2|0.2"/>
+</p:tagLst>
+</file>
+
+<file path=ppt/tags/tag93.xml><?xml version="1.0" encoding="utf-8"?>
+<p:tagLst xmlns:p="http://schemas.openxmlformats.org/presentationml/2006/main">
+  <p:tag name="TIMING" val="|0.3|0.3|0.3|0.4"/>
+</p:tagLst>
+</file>
+
+<file path=ppt/tags/tag94.xml><?xml version="1.0" encoding="utf-8"?>
+<p:tagLst xmlns:p="http://schemas.openxmlformats.org/presentationml/2006/main">
+  <p:tag name="TIMING" val="|0.3|0.2|0.1|0.2|0.3|0.2|0.3|0.3|0.3|0.3|0.3|0.3"/>
+</p:tagLst>
+</file>
+
+<file path=ppt/tags/tag95.xml><?xml version="1.0" encoding="utf-8"?>
+<p:tagLst xmlns:p="http://schemas.openxmlformats.org/presentationml/2006/main">
+  <p:tag name="TIMING" val="|0.3|0.3|0.3|0.4"/>
+</p:tagLst>
+</file>
+
+<file path=ppt/tags/tag96.xml><?xml version="1.0" encoding="utf-8"?>
+<p:tagLst xmlns:p="http://schemas.openxmlformats.org/presentationml/2006/main">
+  <p:tag name="TIMING" val="|0.3|0.3|0.3|0.3|0.3"/>
+</p:tagLst>
+</file>
+
+<file path=ppt/tags/tag97.xml><?xml version="1.0" encoding="utf-8"?>
+<p:tagLst xmlns:p="http://schemas.openxmlformats.org/presentationml/2006/main">
+  <p:tag name="TIMING" val="|0.3|0.2|0.2|0.2"/>
+</p:tagLst>
+</file>
+
+<file path=ppt/tags/tag98.xml><?xml version="1.0" encoding="utf-8"?>
+<p:tagLst xmlns:p="http://schemas.openxmlformats.org/presentationml/2006/main">
+  <p:tag name="COMMONDATA" val="eyJoZGlkIjoiN2E1NmRjNzhlMjE3N2Q3ZjMyMTFkMWQ1ZmM5MTFhNjYifQ=="/>
+  <p:tag name="KSO_WPP_MARK_KEY" val="67848404-78da-4217-895d-bac7dbbd95fd"/>
 </p:tagLst>
 </file>
 

--- a/毕业论文/毕业答辩(系统开发）.pptx
+++ b/毕业论文/毕业答辩(系统开发）.pptx
@@ -149,7 +149,7 @@
             <a:srgbClr val="A4A3A4"/>
           </p15:clr>
         </p15:guide>
-        <p15:guide id="2" pos="3874" userDrawn="1">
+        <p15:guide id="2" pos="3835" userDrawn="1">
           <p15:clr>
             <a:srgbClr val="A4A3A4"/>
           </p15:clr>
@@ -16045,8 +16045,8 @@
         </p:nvSpPr>
         <p:spPr>
           <a:xfrm>
-            <a:off x="244475" y="1529080"/>
-            <a:ext cx="11688445" cy="5136515"/>
+            <a:off x="329565" y="1603375"/>
+            <a:ext cx="11688445" cy="2159000"/>
           </a:xfrm>
           <a:prstGeom prst="rect">
             <a:avLst/>
@@ -16076,13 +16076,331 @@
           <a:p>
             <a:pPr algn="l" fontAlgn="auto"/>
             <a:r>
-              <a:rPr lang="zh-CN" altLang="en-US"/>
-              <a:t>a)客户信息表（客户id，客户姓名，地区，类别，级别，客户地址，邮编，手机号，流失状态，有效状态，创建时间，更新时间。）</a:t>
+              <a:rPr lang="en-US" altLang="zh-CN">
+                <a:sym typeface="+mn-ea"/>
+              </a:rPr>
+              <a:t>1. </a:t>
+            </a:r>
+            <a:r>
+              <a:rPr lang="zh-CN" altLang="en-US">
+                <a:sym typeface="+mn-ea"/>
+              </a:rPr>
+              <a:t>用户信息表（用户</a:t>
+            </a:r>
+            <a:r>
+              <a:rPr lang="en-US" altLang="zh-CN">
+                <a:sym typeface="+mn-ea"/>
+              </a:rPr>
+              <a:t>ID</a:t>
+            </a:r>
+            <a:r>
+              <a:rPr lang="zh-CN" altLang="en-US">
+                <a:sym typeface="+mn-ea"/>
+              </a:rPr>
+              <a:t>，用户姓名，用户头像，账号，密码，个性签名，创建时间）</a:t>
             </a:r>
             <a:endParaRPr lang="zh-CN" altLang="en-US"/>
           </a:p>
           <a:p>
             <a:pPr algn="l" fontAlgn="auto"/>
+            <a:r>
+              <a:rPr lang="en-US" altLang="zh-CN">
+                <a:sym typeface="+mn-ea"/>
+              </a:rPr>
+              <a:t>2. </a:t>
+            </a:r>
+            <a:r>
+              <a:rPr lang="zh-CN" altLang="en-US">
+                <a:sym typeface="+mn-ea"/>
+              </a:rPr>
+              <a:t>联系人信息表（唯一</a:t>
+            </a:r>
+            <a:r>
+              <a:rPr lang="en-US" altLang="zh-CN">
+                <a:sym typeface="+mn-ea"/>
+              </a:rPr>
+              <a:t>ID</a:t>
+            </a:r>
+            <a:r>
+              <a:rPr lang="zh-CN" altLang="en-US">
+                <a:sym typeface="+mn-ea"/>
+              </a:rPr>
+              <a:t>，用户</a:t>
+            </a:r>
+            <a:r>
+              <a:rPr lang="en-US" altLang="zh-CN">
+                <a:sym typeface="+mn-ea"/>
+              </a:rPr>
+              <a:t>ID</a:t>
+            </a:r>
+            <a:r>
+              <a:rPr lang="zh-CN" altLang="en-US">
+                <a:sym typeface="+mn-ea"/>
+              </a:rPr>
+              <a:t>，联系人</a:t>
+            </a:r>
+            <a:r>
+              <a:rPr lang="en-US" altLang="zh-CN">
+                <a:sym typeface="+mn-ea"/>
+              </a:rPr>
+              <a:t>ID</a:t>
+            </a:r>
+            <a:r>
+              <a:rPr lang="zh-CN" altLang="en-US">
+                <a:sym typeface="+mn-ea"/>
+              </a:rPr>
+              <a:t>，联系人名称，联系人头像，联系人分组）</a:t>
+            </a:r>
+            <a:endParaRPr lang="zh-CN" altLang="en-US"/>
+          </a:p>
+          <a:p>
+            <a:pPr algn="l" fontAlgn="auto"/>
+            <a:r>
+              <a:rPr lang="en-US" altLang="zh-CN">
+                <a:sym typeface="+mn-ea"/>
+              </a:rPr>
+              <a:t>3. </a:t>
+            </a:r>
+            <a:r>
+              <a:rPr lang="zh-CN" altLang="en-US">
+                <a:sym typeface="+mn-ea"/>
+              </a:rPr>
+              <a:t>群组信息表（群</a:t>
+            </a:r>
+            <a:r>
+              <a:rPr lang="en-US" altLang="zh-CN">
+                <a:sym typeface="+mn-ea"/>
+              </a:rPr>
+              <a:t>ID</a:t>
+            </a:r>
+            <a:r>
+              <a:rPr lang="zh-CN" altLang="en-US">
+                <a:sym typeface="+mn-ea"/>
+              </a:rPr>
+              <a:t>，群名称，群头像，禁言状态，创建时间）</a:t>
+            </a:r>
+            <a:endParaRPr lang="zh-CN" altLang="en-US"/>
+          </a:p>
+          <a:p>
+            <a:pPr algn="l" fontAlgn="auto"/>
+            <a:r>
+              <a:rPr lang="en-US" altLang="zh-CN">
+                <a:sym typeface="+mn-ea"/>
+              </a:rPr>
+              <a:t>4. </a:t>
+            </a:r>
+            <a:r>
+              <a:rPr lang="zh-CN" altLang="en-US">
+                <a:sym typeface="+mn-ea"/>
+              </a:rPr>
+              <a:t>群成员信息表（唯一</a:t>
+            </a:r>
+            <a:r>
+              <a:rPr lang="en-US" altLang="zh-CN">
+                <a:sym typeface="+mn-ea"/>
+              </a:rPr>
+              <a:t>ID</a:t>
+            </a:r>
+            <a:r>
+              <a:rPr lang="zh-CN" altLang="en-US">
+                <a:sym typeface="+mn-ea"/>
+              </a:rPr>
+              <a:t>，群</a:t>
+            </a:r>
+            <a:r>
+              <a:rPr lang="en-US" altLang="zh-CN">
+                <a:sym typeface="+mn-ea"/>
+              </a:rPr>
+              <a:t>ID</a:t>
+            </a:r>
+            <a:r>
+              <a:rPr lang="zh-CN" altLang="en-US">
+                <a:sym typeface="+mn-ea"/>
+              </a:rPr>
+              <a:t>，用户</a:t>
+            </a:r>
+            <a:r>
+              <a:rPr lang="en-US" altLang="zh-CN">
+                <a:sym typeface="+mn-ea"/>
+              </a:rPr>
+              <a:t>ID</a:t>
+            </a:r>
+            <a:r>
+              <a:rPr lang="zh-CN" altLang="en-US">
+                <a:sym typeface="+mn-ea"/>
+              </a:rPr>
+              <a:t>，用户昵称，用户头像，角色，禁言状态，加入时间）</a:t>
+            </a:r>
+            <a:endParaRPr lang="zh-CN" altLang="en-US"/>
+          </a:p>
+          <a:p>
+            <a:pPr algn="l" fontAlgn="auto"/>
+            <a:r>
+              <a:rPr lang="en-US" altLang="zh-CN">
+                <a:sym typeface="+mn-ea"/>
+              </a:rPr>
+              <a:t>5. </a:t>
+            </a:r>
+            <a:r>
+              <a:rPr lang="zh-CN" altLang="en-US">
+                <a:sym typeface="+mn-ea"/>
+              </a:rPr>
+              <a:t>表情包信息表（唯一</a:t>
+            </a:r>
+            <a:r>
+              <a:rPr lang="en-US" altLang="zh-CN">
+                <a:sym typeface="+mn-ea"/>
+              </a:rPr>
+              <a:t>ID</a:t>
+            </a:r>
+            <a:r>
+              <a:rPr lang="zh-CN" altLang="en-US">
+                <a:sym typeface="+mn-ea"/>
+              </a:rPr>
+              <a:t>，用户</a:t>
+            </a:r>
+            <a:r>
+              <a:rPr lang="en-US" altLang="zh-CN">
+                <a:sym typeface="+mn-ea"/>
+              </a:rPr>
+              <a:t>ID</a:t>
+            </a:r>
+            <a:r>
+              <a:rPr lang="zh-CN" altLang="en-US">
+                <a:sym typeface="+mn-ea"/>
+              </a:rPr>
+              <a:t>，表情包链接）</a:t>
+            </a:r>
+            <a:endParaRPr lang="zh-CN" altLang="en-US"/>
+          </a:p>
+          <a:p>
+            <a:pPr algn="l" fontAlgn="auto"/>
+            <a:r>
+              <a:rPr lang="en-US" altLang="zh-CN">
+                <a:sym typeface="+mn-ea"/>
+              </a:rPr>
+              <a:t>6.</a:t>
+            </a:r>
+            <a:r>
+              <a:rPr lang="zh-CN" altLang="en-US">
+                <a:sym typeface="+mn-ea"/>
+              </a:rPr>
+              <a:t>朋友圈信息表（唯一</a:t>
+            </a:r>
+            <a:r>
+              <a:rPr lang="en-US" altLang="zh-CN">
+                <a:sym typeface="+mn-ea"/>
+              </a:rPr>
+              <a:t>ID</a:t>
+            </a:r>
+            <a:r>
+              <a:rPr lang="zh-CN" altLang="en-US">
+                <a:sym typeface="+mn-ea"/>
+              </a:rPr>
+              <a:t>，用户</a:t>
+            </a:r>
+            <a:r>
+              <a:rPr lang="en-US" altLang="zh-CN">
+                <a:sym typeface="+mn-ea"/>
+              </a:rPr>
+              <a:t>ID</a:t>
+            </a:r>
+            <a:r>
+              <a:rPr lang="zh-CN" altLang="en-US">
+                <a:sym typeface="+mn-ea"/>
+              </a:rPr>
+              <a:t>，内容，图片列表，点赞列表，评论列表，发布时间）</a:t>
+            </a:r>
+            <a:endParaRPr lang="zh-CN" altLang="en-US">
+              <a:sym typeface="+mn-ea"/>
+            </a:endParaRPr>
+          </a:p>
+          <a:p>
+            <a:pPr algn="l" fontAlgn="auto"/>
+            <a:r>
+              <a:rPr lang="en-US" altLang="zh-CN"/>
+              <a:t>7. </a:t>
+            </a:r>
+            <a:r>
+              <a:rPr lang="zh-CN" altLang="en-US"/>
+              <a:t>联系人申请表（唯一</a:t>
+            </a:r>
+            <a:r>
+              <a:rPr lang="en-US" altLang="zh-CN"/>
+              <a:t>ID</a:t>
+            </a:r>
+            <a:r>
+              <a:rPr lang="zh-CN" altLang="en-US"/>
+              <a:t>，用户</a:t>
+            </a:r>
+            <a:r>
+              <a:rPr lang="en-US" altLang="zh-CN"/>
+              <a:t>ID</a:t>
+            </a:r>
+            <a:r>
+              <a:rPr lang="zh-CN" altLang="en-US"/>
+              <a:t>，联系人</a:t>
+            </a:r>
+            <a:r>
+              <a:rPr lang="en-US" altLang="zh-CN"/>
+              <a:t>ID</a:t>
+            </a:r>
+            <a:r>
+              <a:rPr lang="zh-CN" altLang="en-US"/>
+              <a:t>，是否</a:t>
+            </a:r>
+            <a:r>
+              <a:rPr lang="zh-CN" altLang="en-US"/>
+              <a:t>同意）</a:t>
+            </a:r>
+            <a:endParaRPr lang="zh-CN" altLang="en-US"/>
+          </a:p>
+          <a:p>
+            <a:pPr algn="l" fontAlgn="auto"/>
+            <a:r>
+              <a:rPr lang="en-US" altLang="zh-CN"/>
+              <a:t>8. </a:t>
+            </a:r>
+            <a:r>
+              <a:rPr lang="zh-CN" altLang="en-US"/>
+              <a:t>群聊申请表（唯一</a:t>
+            </a:r>
+            <a:r>
+              <a:rPr lang="en-US" altLang="zh-CN"/>
+              <a:t>ID</a:t>
+            </a:r>
+            <a:r>
+              <a:rPr lang="zh-CN" altLang="en-US"/>
+              <a:t>，用户</a:t>
+            </a:r>
+            <a:r>
+              <a:rPr lang="en-US" altLang="zh-CN"/>
+              <a:t>ID</a:t>
+            </a:r>
+            <a:r>
+              <a:rPr lang="zh-CN" altLang="en-US"/>
+              <a:t>，群</a:t>
+            </a:r>
+            <a:r>
+              <a:rPr lang="en-US" altLang="zh-CN"/>
+              <a:t>ID</a:t>
+            </a:r>
+            <a:r>
+              <a:rPr lang="zh-CN" altLang="en-US"/>
+              <a:t>，创建者</a:t>
+            </a:r>
+            <a:r>
+              <a:rPr lang="en-US" altLang="zh-CN"/>
+              <a:t>ID</a:t>
+            </a:r>
+            <a:r>
+              <a:rPr lang="zh-CN" altLang="en-US"/>
+              <a:t>，是否</a:t>
+            </a:r>
+            <a:r>
+              <a:rPr lang="zh-CN" altLang="en-US"/>
+              <a:t>同意）</a:t>
+            </a:r>
             <a:endParaRPr lang="zh-CN" altLang="en-US"/>
           </a:p>
         </p:txBody>
@@ -16634,7 +16952,23 @@
             </a:r>
             <a:r>
               <a:rPr lang="zh-CN" altLang="en-US" sz="2000"/>
-              <a:t>本系统采用的后台数据库是MySQL数据库系统，本数据库名称为“crm.db”，根据实体及其属性共设计出11张数据表。</a:t>
+              <a:t>本系统采用的后台数据库是MySQL数据库系统，本数据库名称为“</a:t>
+            </a:r>
+            <a:r>
+              <a:rPr lang="en-US" altLang="zh-CN" sz="2000"/>
+              <a:t>chat-app</a:t>
+            </a:r>
+            <a:r>
+              <a:rPr lang="zh-CN" altLang="en-US" sz="2000"/>
+              <a:t>”，根据实体及其属性共设计出</a:t>
+            </a:r>
+            <a:r>
+              <a:rPr lang="en-US" altLang="zh-CN" sz="2000"/>
+              <a:t>8</a:t>
+            </a:r>
+            <a:r>
+              <a:rPr lang="zh-CN" altLang="en-US" sz="2000"/>
+              <a:t>张数据表。</a:t>
             </a:r>
             <a:endParaRPr lang="zh-CN" altLang="en-US" sz="2000"/>
           </a:p>
@@ -16642,7 +16976,7 @@
       </p:sp>
       <p:pic>
         <p:nvPicPr>
-          <p:cNvPr id="134" name="图片 1"/>
+          <p:cNvPr id="4" name="图片 3"/>
           <p:cNvPicPr>
             <a:picLocks noChangeAspect="1"/>
           </p:cNvPicPr>
@@ -16656,49 +16990,17 @@
         </p:blipFill>
         <p:spPr>
           <a:xfrm>
-            <a:off x="516890" y="3008630"/>
-            <a:ext cx="5251450" cy="2636520"/>
+            <a:off x="433705" y="2559685"/>
+            <a:ext cx="7327265" cy="4197350"/>
           </a:xfrm>
           <a:prstGeom prst="rect">
             <a:avLst/>
           </a:prstGeom>
-          <a:noFill/>
-          <a:ln>
-            <a:noFill/>
-          </a:ln>
-        </p:spPr>
-      </p:pic>
-      <p:pic>
-        <p:nvPicPr>
-          <p:cNvPr id="36" name="图片 12"/>
-          <p:cNvPicPr>
-            <a:picLocks noChangeAspect="1"/>
-          </p:cNvPicPr>
-          <p:nvPr/>
-        </p:nvPicPr>
-        <p:blipFill>
-          <a:blip r:embed="rId2"/>
-          <a:stretch>
-            <a:fillRect/>
-          </a:stretch>
-        </p:blipFill>
-        <p:spPr>
-          <a:xfrm>
-            <a:off x="6078855" y="2690495"/>
-            <a:ext cx="5808980" cy="3273425"/>
-          </a:xfrm>
-          <a:prstGeom prst="rect">
-            <a:avLst/>
-          </a:prstGeom>
-          <a:noFill/>
-          <a:ln>
-            <a:noFill/>
-          </a:ln>
         </p:spPr>
       </p:pic>
     </p:spTree>
     <p:custDataLst>
-      <p:tags r:id="rId3"/>
+      <p:tags r:id="rId2"/>
     </p:custDataLst>
   </p:cSld>
   <p:clrMapOvr>

--- a/毕业论文/毕业答辩(系统开发）.pptx
+++ b/毕业论文/毕业答辩(系统开发）.pptx
@@ -34,17 +34,16 @@
     <p:sldId id="332" r:id="rId29"/>
     <p:sldId id="333" r:id="rId30"/>
     <p:sldId id="334" r:id="rId31"/>
-    <p:sldId id="335" r:id="rId32"/>
-    <p:sldId id="276" r:id="rId33"/>
-    <p:sldId id="278" r:id="rId34"/>
-    <p:sldId id="317" r:id="rId35"/>
-    <p:sldId id="279" r:id="rId36"/>
-    <p:sldId id="280" r:id="rId37"/>
+    <p:sldId id="276" r:id="rId32"/>
+    <p:sldId id="278" r:id="rId33"/>
+    <p:sldId id="317" r:id="rId34"/>
+    <p:sldId id="279" r:id="rId35"/>
+    <p:sldId id="280" r:id="rId36"/>
   </p:sldIdLst>
   <p:sldSz cx="12192000" cy="6858000"/>
   <p:notesSz cx="6858000" cy="9144000"/>
   <p:custDataLst>
-    <p:tags r:id="rId41"/>
+    <p:tags r:id="rId40"/>
   </p:custDataLst>
   <p:defaultTextStyle>
     <a:defPPr>
@@ -144,12 +143,12 @@
   <p:extLst>
     <p:ext uri="{EFAFB233-063F-42B5-8137-9DF3F51BA10A}">
       <p15:sldGuideLst xmlns:p15="http://schemas.microsoft.com/office/powerpoint/2012/main">
-        <p15:guide id="1" orient="horz" pos="2200" userDrawn="1">
+        <p15:guide id="1" orient="horz" pos="2186" userDrawn="1">
           <p15:clr>
             <a:srgbClr val="A4A3A4"/>
           </p15:clr>
         </p15:guide>
-        <p15:guide id="2" pos="3835" userDrawn="1">
+        <p15:guide id="2" pos="3815" userDrawn="1">
           <p15:clr>
             <a:srgbClr val="A4A3A4"/>
           </p15:clr>
@@ -17463,8 +17462,8 @@
         </p:nvSpPr>
         <p:spPr>
           <a:xfrm>
-            <a:off x="976630" y="1092200"/>
-            <a:ext cx="2030730" cy="436880"/>
+            <a:off x="0" y="1015365"/>
+            <a:ext cx="3331845" cy="436880"/>
           </a:xfrm>
           <a:prstGeom prst="rect">
             <a:avLst/>
@@ -17495,7 +17494,11 @@
             <a:pPr algn="ctr"/>
             <a:r>
               <a:rPr lang="zh-CN" altLang="en-US" sz="2400"/>
-              <a:t>用户登录界</a:t>
+              <a:t>用户登录与</a:t>
+            </a:r>
+            <a:r>
+              <a:rPr lang="zh-CN" altLang="en-US" sz="2400"/>
+              <a:t>注册界</a:t>
             </a:r>
             <a:r>
               <a:rPr lang="zh-CN" altLang="en-US" sz="2400"/>
@@ -17549,7 +17552,19 @@
             </a:r>
             <a:r>
               <a:rPr lang="zh-CN" altLang="en-US" sz="2000"/>
-              <a:t>用户想要使用本客户关系管理系统时，需输入用户名和密码和随机生成的验证码，系统验证用户输入的用户名和密码与数据库中用户表进行比对，如果账号密码与数据库中的用户名、密码相匹配就准许进入系统，否则提示用户名或密码错误。</a:t>
+              <a:t>使用本应用前必须进行登录操作，暂不支持游客登录，登录后会在本地保存用户登录状态，下次进入应用时，不需要再次登录，直接读取本地</a:t>
+            </a:r>
+            <a:r>
+              <a:rPr lang="en-US" altLang="zh-CN" sz="2000"/>
+              <a:t>token</a:t>
+            </a:r>
+            <a:r>
+              <a:rPr lang="zh-CN" altLang="en-US" sz="2000"/>
+              <a:t>即可，对于第一次使用改应用的用户，需要先注册本平台</a:t>
+            </a:r>
+            <a:r>
+              <a:rPr lang="zh-CN" altLang="en-US" sz="2000"/>
+              <a:t>账号。</a:t>
             </a:r>
             <a:endParaRPr lang="zh-CN" altLang="en-US" sz="2000"/>
           </a:p>
@@ -17557,7 +17572,7 @@
       </p:sp>
       <p:pic>
         <p:nvPicPr>
-          <p:cNvPr id="138" name="图片 2"/>
+          <p:cNvPr id="4" name="图片 3"/>
           <p:cNvPicPr>
             <a:picLocks noChangeAspect="1"/>
           </p:cNvPicPr>
@@ -17571,21 +17586,41 @@
         </p:blipFill>
         <p:spPr>
           <a:xfrm>
-            <a:off x="4039235" y="2482850"/>
-            <a:ext cx="4357370" cy="3767455"/>
+            <a:off x="1248410" y="2666365"/>
+            <a:ext cx="2300605" cy="4060825"/>
           </a:xfrm>
           <a:prstGeom prst="rect">
             <a:avLst/>
           </a:prstGeom>
-          <a:noFill/>
-          <a:ln>
-            <a:noFill/>
-          </a:ln>
+        </p:spPr>
+      </p:pic>
+      <p:pic>
+        <p:nvPicPr>
+          <p:cNvPr id="5" name="图片 4"/>
+          <p:cNvPicPr>
+            <a:picLocks noChangeAspect="1"/>
+          </p:cNvPicPr>
+          <p:nvPr/>
+        </p:nvPicPr>
+        <p:blipFill>
+          <a:blip r:embed="rId2"/>
+          <a:stretch>
+            <a:fillRect/>
+          </a:stretch>
+        </p:blipFill>
+        <p:spPr>
+          <a:xfrm>
+            <a:off x="3963035" y="2667000"/>
+            <a:ext cx="2310130" cy="4060190"/>
+          </a:xfrm>
+          <a:prstGeom prst="rect">
+            <a:avLst/>
+          </a:prstGeom>
         </p:spPr>
       </p:pic>
     </p:spTree>
     <p:custDataLst>
-      <p:tags r:id="rId2"/>
+      <p:tags r:id="rId3"/>
     </p:custDataLst>
   </p:cSld>
   <p:clrMapOvr>
@@ -18048,8 +18083,8 @@
         </p:nvSpPr>
         <p:spPr>
           <a:xfrm>
-            <a:off x="976630" y="1092200"/>
-            <a:ext cx="2030730" cy="436880"/>
+            <a:off x="91440" y="1092200"/>
+            <a:ext cx="1675130" cy="436880"/>
           </a:xfrm>
           <a:prstGeom prst="rect">
             <a:avLst/>
@@ -18080,11 +18115,11 @@
             <a:pPr algn="ctr"/>
             <a:r>
               <a:rPr lang="zh-CN" altLang="en-US" sz="2400"/>
-              <a:t>主界</a:t>
+              <a:t>聊天</a:t>
             </a:r>
             <a:r>
               <a:rPr lang="zh-CN" altLang="en-US" sz="2400"/>
-              <a:t>面</a:t>
+              <a:t>列表</a:t>
             </a:r>
             <a:endParaRPr lang="zh-CN" altLang="en-US" sz="2400"/>
           </a:p>
@@ -18130,7 +18165,27 @@
             <a:pPr algn="l" fontAlgn="auto"/>
             <a:r>
               <a:rPr lang="zh-CN" altLang="en-US" sz="2000"/>
-              <a:t>用户成功登陆系统后将进入主页面，在主页面的左侧就是功能菜单，用户可以选择自己想要的功能，点击即可进入功能页面，但不同用户权限不同，没有模块的权限是无法访问的，管理员账号拥有所有权限。</a:t>
+              <a:t>用户登录后首先看到的就是聊天的列表页，这里可以看到最近的一些聊天消息，聊天消息保存在</a:t>
+            </a:r>
+            <a:r>
+              <a:rPr lang="en-US" altLang="zh-CN" sz="2000"/>
+              <a:t>redis</a:t>
+            </a:r>
+            <a:r>
+              <a:rPr lang="zh-CN" altLang="en-US" sz="2000"/>
+              <a:t>，并且对一些重要消息会进行加密处理，保护用户隐私。然后可以看到上方的导航栏，和下方的</a:t>
+            </a:r>
+            <a:r>
+              <a:rPr lang="en-US" altLang="zh-CN" sz="2000"/>
+              <a:t>tabbar</a:t>
+            </a:r>
+            <a:r>
+              <a:rPr lang="zh-CN" altLang="en-US" sz="2000"/>
+              <a:t>菜单，上方导航栏的加号包括好友搜索、群聊创建、动态发布的功能，下方的菜单可以切换到不同的页面，而上方导航栏的头像点击后即可弹出用户的信息查看和</a:t>
+            </a:r>
+            <a:r>
+              <a:rPr lang="zh-CN" altLang="en-US" sz="2000"/>
+              <a:t>设置</a:t>
             </a:r>
             <a:endParaRPr lang="zh-CN" altLang="en-US" sz="2000"/>
           </a:p>
@@ -18138,7 +18193,7 @@
       </p:sp>
       <p:pic>
         <p:nvPicPr>
-          <p:cNvPr id="4" name="图片 1"/>
+          <p:cNvPr id="5" name="图片 4"/>
           <p:cNvPicPr>
             <a:picLocks noChangeAspect="1"/>
           </p:cNvPicPr>
@@ -18152,21 +18207,65 @@
         </p:blipFill>
         <p:spPr>
           <a:xfrm>
-            <a:off x="1248410" y="2538730"/>
-            <a:ext cx="9645015" cy="3930015"/>
+            <a:off x="584835" y="2771140"/>
+            <a:ext cx="2301875" cy="4086860"/>
           </a:xfrm>
           <a:prstGeom prst="rect">
             <a:avLst/>
           </a:prstGeom>
-          <a:noFill/>
-          <a:ln>
-            <a:noFill/>
-          </a:ln>
+        </p:spPr>
+      </p:pic>
+      <p:pic>
+        <p:nvPicPr>
+          <p:cNvPr id="6" name="图片 5"/>
+          <p:cNvPicPr>
+            <a:picLocks noChangeAspect="1"/>
+          </p:cNvPicPr>
+          <p:nvPr/>
+        </p:nvPicPr>
+        <p:blipFill>
+          <a:blip r:embed="rId2"/>
+          <a:stretch>
+            <a:fillRect/>
+          </a:stretch>
+        </p:blipFill>
+        <p:spPr>
+          <a:xfrm>
+            <a:off x="3141980" y="2782570"/>
+            <a:ext cx="2296795" cy="4075430"/>
+          </a:xfrm>
+          <a:prstGeom prst="rect">
+            <a:avLst/>
+          </a:prstGeom>
+        </p:spPr>
+      </p:pic>
+      <p:pic>
+        <p:nvPicPr>
+          <p:cNvPr id="7" name="图片 6"/>
+          <p:cNvPicPr>
+            <a:picLocks noChangeAspect="1"/>
+          </p:cNvPicPr>
+          <p:nvPr/>
+        </p:nvPicPr>
+        <p:blipFill>
+          <a:blip r:embed="rId3"/>
+          <a:stretch>
+            <a:fillRect/>
+          </a:stretch>
+        </p:blipFill>
+        <p:spPr>
+          <a:xfrm>
+            <a:off x="5591810" y="2782570"/>
+            <a:ext cx="2308225" cy="3999230"/>
+          </a:xfrm>
+          <a:prstGeom prst="rect">
+            <a:avLst/>
+          </a:prstGeom>
         </p:spPr>
       </p:pic>
     </p:spTree>
     <p:custDataLst>
-      <p:tags r:id="rId2"/>
+      <p:tags r:id="rId4"/>
     </p:custDataLst>
   </p:cSld>
   <p:clrMapOvr>
@@ -20895,8 +20994,8 @@
         </p:nvSpPr>
         <p:spPr>
           <a:xfrm>
-            <a:off x="976630" y="1092200"/>
-            <a:ext cx="3605530" cy="436880"/>
+            <a:off x="0" y="1050290"/>
+            <a:ext cx="2511425" cy="436880"/>
           </a:xfrm>
           <a:prstGeom prst="rect">
             <a:avLst/>
@@ -20927,7 +21026,11 @@
             <a:pPr algn="ctr"/>
             <a:r>
               <a:rPr lang="zh-CN" altLang="en-US" sz="2400"/>
-              <a:t>客户信息管理界面</a:t>
+              <a:t>个人信息</a:t>
+            </a:r>
+            <a:r>
+              <a:rPr lang="zh-CN" altLang="en-US" sz="2400"/>
+              <a:t>设置</a:t>
             </a:r>
             <a:endParaRPr lang="zh-CN" altLang="en-US" sz="2400"/>
           </a:p>
@@ -20942,7 +21045,7 @@
         <p:spPr>
           <a:xfrm>
             <a:off x="244475" y="1529080"/>
-            <a:ext cx="11947525" cy="1329690"/>
+            <a:ext cx="11947525" cy="1131570"/>
           </a:xfrm>
           <a:prstGeom prst="rect">
             <a:avLst/>
@@ -20973,15 +21076,35 @@
             <a:pPr algn="l" fontAlgn="auto"/>
             <a:r>
               <a:rPr lang="zh-CN" altLang="en-US" sz="2000"/>
-              <a:t>点击主界面中左侧“客户管理”进入此模块。点击“客户信息管理”，可以查看客户的基本信息完成客户的增加、删除、更改、查询客户信息。可以点击“企业”按钮或者“个人按钮”来进行筛选，筛选出企业客户或者个人客户。</a:t>
+              <a:t>点击导航栏的头像即可看到个人信息设置的入口，在这里可以进行一些个性化的设置，本应用后续会</a:t>
             </a:r>
+            <a:r>
+              <a:rPr lang="zh-CN" altLang="en-US" sz="2000"/>
+              <a:t>增加</a:t>
+            </a:r>
+            <a:endParaRPr lang="zh-CN" altLang="en-US" sz="2000"/>
+          </a:p>
+          <a:p>
+            <a:pPr algn="l" fontAlgn="auto"/>
+            <a:r>
+              <a:rPr lang="zh-CN" altLang="en-US" sz="2000"/>
+              <a:t>更多的趣味性设置，尽情期待</a:t>
+            </a:r>
+            <a:r>
+              <a:rPr lang="zh-CN" altLang="en-US" sz="2000"/>
+              <a:t>哦！</a:t>
+            </a:r>
+            <a:endParaRPr lang="zh-CN" altLang="en-US" sz="2000"/>
+          </a:p>
+          <a:p>
+            <a:pPr algn="l" fontAlgn="auto"/>
             <a:endParaRPr lang="zh-CN" altLang="en-US" sz="2000"/>
           </a:p>
         </p:txBody>
       </p:sp>
       <p:pic>
         <p:nvPicPr>
-          <p:cNvPr id="10" name="图片 3"/>
+          <p:cNvPr id="5" name="图片 4"/>
           <p:cNvPicPr>
             <a:picLocks noChangeAspect="1"/>
           </p:cNvPicPr>
@@ -20995,16 +21118,12 @@
         </p:blipFill>
         <p:spPr>
           <a:xfrm>
-            <a:off x="493395" y="2730500"/>
-            <a:ext cx="10038715" cy="3701415"/>
+            <a:off x="381000" y="2320925"/>
+            <a:ext cx="2632710" cy="4458335"/>
           </a:xfrm>
           <a:prstGeom prst="rect">
             <a:avLst/>
           </a:prstGeom>
-          <a:noFill/>
-          <a:ln>
-            <a:noFill/>
-          </a:ln>
         </p:spPr>
       </p:pic>
     </p:spTree>
@@ -21472,7 +21591,7 @@
         </p:nvSpPr>
         <p:spPr>
           <a:xfrm>
-            <a:off x="976630" y="1092200"/>
+            <a:off x="-118110" y="1092200"/>
             <a:ext cx="2859405" cy="436880"/>
           </a:xfrm>
           <a:prstGeom prst="rect">
@@ -21504,7 +21623,11 @@
             <a:pPr algn="ctr"/>
             <a:r>
               <a:rPr lang="zh-CN" altLang="en-US" sz="2400"/>
-              <a:t>客户订单查看界面</a:t>
+              <a:t>表情包的</a:t>
+            </a:r>
+            <a:r>
+              <a:rPr lang="zh-CN" altLang="en-US" sz="2400"/>
+              <a:t>添加</a:t>
             </a:r>
             <a:endParaRPr lang="zh-CN" altLang="en-US" sz="2400"/>
           </a:p>
@@ -21550,7 +21673,19 @@
             <a:pPr algn="l" fontAlgn="auto"/>
             <a:r>
               <a:rPr lang="zh-CN" altLang="en-US" sz="2000"/>
-              <a:t>点击主界面中左侧“客户管理”进入此模块。点击客户订单查看，可以进入客户订单查看页面，查看客户订单。可以根据客户编号来查询不同客户的订单，在搜索客户编号框内输入客户编号，进行查询某个客户的所有订单。当某个客户订单总额大于10000时，将自动升级为重点客户。</a:t>
+              <a:t>点击我的表情包即可查看和添加表情包，添加后可以在聊天页面中直接进行发送自己添加好的表情包，支持</a:t>
+            </a:r>
+            <a:r>
+              <a:rPr lang="en-US" altLang="zh-CN" sz="2000"/>
+              <a:t>gif</a:t>
+            </a:r>
+            <a:r>
+              <a:rPr lang="zh-CN" altLang="en-US" sz="2000"/>
+              <a:t>动图的添加</a:t>
+            </a:r>
+            <a:r>
+              <a:rPr lang="zh-CN" altLang="en-US" sz="2000"/>
+              <a:t>哦</a:t>
             </a:r>
             <a:endParaRPr lang="zh-CN" altLang="en-US" sz="2000"/>
           </a:p>
@@ -21558,7 +21693,7 @@
       </p:sp>
       <p:pic>
         <p:nvPicPr>
-          <p:cNvPr id="13" name="图片 5"/>
+          <p:cNvPr id="4" name="图片 3"/>
           <p:cNvPicPr>
             <a:picLocks noChangeAspect="1"/>
           </p:cNvPicPr>
@@ -21572,16 +21707,12 @@
         </p:blipFill>
         <p:spPr>
           <a:xfrm>
-            <a:off x="713105" y="2758440"/>
-            <a:ext cx="10765790" cy="3649345"/>
+            <a:off x="327025" y="2580005"/>
+            <a:ext cx="2414270" cy="4166235"/>
           </a:xfrm>
           <a:prstGeom prst="rect">
             <a:avLst/>
           </a:prstGeom>
-          <a:noFill/>
-          <a:ln>
-            <a:noFill/>
-          </a:ln>
         </p:spPr>
       </p:pic>
     </p:spTree>
@@ -22049,8 +22180,8 @@
         </p:nvSpPr>
         <p:spPr>
           <a:xfrm>
-            <a:off x="976630" y="1092200"/>
-            <a:ext cx="2859405" cy="436880"/>
+            <a:off x="85090" y="1092200"/>
+            <a:ext cx="2638425" cy="436880"/>
           </a:xfrm>
           <a:prstGeom prst="rect">
             <a:avLst/>
@@ -22081,7 +22212,11 @@
             <a:pPr algn="ctr"/>
             <a:r>
               <a:rPr lang="zh-CN" altLang="en-US" sz="2400"/>
-              <a:t>流失客户管理界面</a:t>
+              <a:t>好友添加和</a:t>
+            </a:r>
+            <a:r>
+              <a:rPr lang="zh-CN" altLang="en-US" sz="2400"/>
+              <a:t>删除</a:t>
             </a:r>
             <a:endParaRPr lang="zh-CN" altLang="en-US" sz="2400"/>
           </a:p>
@@ -22126,12 +22261,12 @@
           <a:p>
             <a:pPr algn="l" fontAlgn="auto"/>
             <a:r>
-              <a:rPr lang="en-US" altLang="zh-CN" sz="2000"/>
-              <a:t>    </a:t>
+              <a:rPr lang="zh-CN" altLang="en-US" sz="2000"/>
+              <a:t>如果要添加好友，首先需要进入搜索用户界面，输入用户昵称或者账号进行搜索，如果搜索到了，点击对应的添加即可发送好友申请，等待对方同意后，就会成为好友，并且可以在联系人详情页右上角进入联系人设置页，删除</a:t>
             </a:r>
             <a:r>
               <a:rPr lang="zh-CN" altLang="en-US" sz="2000"/>
-              <a:t>在主界面中左侧“客户管理”进入此模块。点击流失客户管理，可以进入流失客户管理页面，增加、删除、更改、查询流失客户。可以根据流失的姓名来进行查询流失客户，在“搜索客户姓名”框内输入姓名，可以进行流失客户的查询。</a:t>
+              <a:t>好友</a:t>
             </a:r>
             <a:endParaRPr lang="zh-CN" altLang="en-US" sz="2000"/>
           </a:p>
@@ -22139,7 +22274,7 @@
       </p:sp>
       <p:pic>
         <p:nvPicPr>
-          <p:cNvPr id="4" name="图片 7"/>
+          <p:cNvPr id="5" name="图片 4"/>
           <p:cNvPicPr>
             <a:picLocks noChangeAspect="1"/>
           </p:cNvPicPr>
@@ -22153,21 +22288,65 @@
         </p:blipFill>
         <p:spPr>
           <a:xfrm>
-            <a:off x="531495" y="2775585"/>
-            <a:ext cx="10318750" cy="3345815"/>
+            <a:off x="381000" y="2543810"/>
+            <a:ext cx="2462530" cy="4314190"/>
           </a:xfrm>
           <a:prstGeom prst="rect">
             <a:avLst/>
           </a:prstGeom>
-          <a:noFill/>
-          <a:ln>
-            <a:noFill/>
-          </a:ln>
+        </p:spPr>
+      </p:pic>
+      <p:pic>
+        <p:nvPicPr>
+          <p:cNvPr id="6" name="图片 5"/>
+          <p:cNvPicPr>
+            <a:picLocks noChangeAspect="1"/>
+          </p:cNvPicPr>
+          <p:nvPr/>
+        </p:nvPicPr>
+        <p:blipFill>
+          <a:blip r:embed="rId2"/>
+          <a:stretch>
+            <a:fillRect/>
+          </a:stretch>
+        </p:blipFill>
+        <p:spPr>
+          <a:xfrm>
+            <a:off x="3200400" y="2552065"/>
+            <a:ext cx="2503170" cy="4305935"/>
+          </a:xfrm>
+          <a:prstGeom prst="rect">
+            <a:avLst/>
+          </a:prstGeom>
+        </p:spPr>
+      </p:pic>
+      <p:pic>
+        <p:nvPicPr>
+          <p:cNvPr id="7" name="图片 6"/>
+          <p:cNvPicPr>
+            <a:picLocks noChangeAspect="1"/>
+          </p:cNvPicPr>
+          <p:nvPr/>
+        </p:nvPicPr>
+        <p:blipFill>
+          <a:blip r:embed="rId3"/>
+          <a:stretch>
+            <a:fillRect/>
+          </a:stretch>
+        </p:blipFill>
+        <p:spPr>
+          <a:xfrm>
+            <a:off x="6060440" y="2552065"/>
+            <a:ext cx="2443480" cy="4243070"/>
+          </a:xfrm>
+          <a:prstGeom prst="rect">
+            <a:avLst/>
+          </a:prstGeom>
         </p:spPr>
       </p:pic>
     </p:spTree>
     <p:custDataLst>
-      <p:tags r:id="rId2"/>
+      <p:tags r:id="rId4"/>
     </p:custDataLst>
   </p:cSld>
   <p:clrMapOvr>
@@ -22630,8 +22809,8 @@
         </p:nvSpPr>
         <p:spPr>
           <a:xfrm>
-            <a:off x="976630" y="1092200"/>
-            <a:ext cx="3387090" cy="436880"/>
+            <a:off x="244475" y="1092200"/>
+            <a:ext cx="1851660" cy="436880"/>
           </a:xfrm>
           <a:prstGeom prst="rect">
             <a:avLst/>
@@ -22662,7 +22841,11 @@
             <a:pPr algn="ctr"/>
             <a:r>
               <a:rPr lang="zh-CN" altLang="en-US" sz="2400"/>
-              <a:t>重点客户管理</a:t>
+              <a:t>联系人</a:t>
+            </a:r>
+            <a:r>
+              <a:rPr lang="zh-CN" altLang="en-US" sz="2400"/>
+              <a:t>列表</a:t>
             </a:r>
             <a:endParaRPr lang="zh-CN" altLang="en-US" sz="2400"/>
           </a:p>
@@ -22677,7 +22860,7 @@
         <p:spPr>
           <a:xfrm>
             <a:off x="244475" y="1529080"/>
-            <a:ext cx="11947525" cy="1329690"/>
+            <a:ext cx="11947525" cy="687705"/>
           </a:xfrm>
           <a:prstGeom prst="rect">
             <a:avLst/>
@@ -22708,7 +22891,11 @@
             <a:pPr algn="l" fontAlgn="auto"/>
             <a:r>
               <a:rPr lang="zh-CN" altLang="en-US" sz="2000"/>
-              <a:t>点击主界面中左侧“客户管理”进入此模块。点击重点客户管理，可以进入重点客户管理页面，增加、删除、更改、查询重点客户。</a:t>
+              <a:t>点击底部菜单的联系人，即可查看目前添加的所有好友，点击头像还可以查看好友的具体</a:t>
+            </a:r>
+            <a:r>
+              <a:rPr lang="zh-CN" altLang="en-US" sz="2000"/>
+              <a:t>信息。</a:t>
             </a:r>
             <a:endParaRPr lang="zh-CN" altLang="en-US" sz="2000"/>
           </a:p>
@@ -22716,7 +22903,7 @@
       </p:sp>
       <p:pic>
         <p:nvPicPr>
-          <p:cNvPr id="22" name="图片 9"/>
+          <p:cNvPr id="4" name="图片 3"/>
           <p:cNvPicPr>
             <a:picLocks noChangeAspect="1"/>
           </p:cNvPicPr>
@@ -22730,21 +22917,41 @@
         </p:blipFill>
         <p:spPr>
           <a:xfrm>
-            <a:off x="1176020" y="2492375"/>
-            <a:ext cx="10209530" cy="3804285"/>
+            <a:off x="381000" y="2280285"/>
+            <a:ext cx="2534285" cy="4433570"/>
           </a:xfrm>
           <a:prstGeom prst="rect">
             <a:avLst/>
           </a:prstGeom>
-          <a:noFill/>
-          <a:ln>
-            <a:noFill/>
-          </a:ln>
+        </p:spPr>
+      </p:pic>
+      <p:pic>
+        <p:nvPicPr>
+          <p:cNvPr id="5" name="图片 4"/>
+          <p:cNvPicPr>
+            <a:picLocks noChangeAspect="1"/>
+          </p:cNvPicPr>
+          <p:nvPr/>
+        </p:nvPicPr>
+        <p:blipFill>
+          <a:blip r:embed="rId2"/>
+          <a:stretch>
+            <a:fillRect/>
+          </a:stretch>
+        </p:blipFill>
+        <p:spPr>
+          <a:xfrm>
+            <a:off x="3211195" y="2295525"/>
+            <a:ext cx="2513330" cy="4418330"/>
+          </a:xfrm>
+          <a:prstGeom prst="rect">
+            <a:avLst/>
+          </a:prstGeom>
         </p:spPr>
       </p:pic>
     </p:spTree>
     <p:custDataLst>
-      <p:tags r:id="rId2"/>
+      <p:tags r:id="rId3"/>
     </p:custDataLst>
   </p:cSld>
   <p:clrMapOvr>
@@ -23207,8 +23414,8 @@
         </p:nvSpPr>
         <p:spPr>
           <a:xfrm>
-            <a:off x="976630" y="1092200"/>
-            <a:ext cx="3387090" cy="436880"/>
+            <a:off x="306070" y="1092200"/>
+            <a:ext cx="1454150" cy="436880"/>
           </a:xfrm>
           <a:prstGeom prst="rect">
             <a:avLst/>
@@ -23239,11 +23446,11 @@
             <a:pPr algn="ctr"/>
             <a:r>
               <a:rPr lang="zh-CN" altLang="en-US" sz="2400"/>
-              <a:t>用</a:t>
+              <a:t>即时</a:t>
             </a:r>
             <a:r>
               <a:rPr lang="zh-CN" altLang="en-US" sz="2400"/>
-              <a:t>户管理</a:t>
+              <a:t>通讯</a:t>
             </a:r>
             <a:endParaRPr lang="zh-CN" altLang="en-US" sz="2400"/>
           </a:p>
@@ -23258,7 +23465,7 @@
         <p:spPr>
           <a:xfrm>
             <a:off x="244475" y="1529080"/>
-            <a:ext cx="11947525" cy="1329690"/>
+            <a:ext cx="11947525" cy="4825365"/>
           </a:xfrm>
           <a:prstGeom prst="rect">
             <a:avLst/>
@@ -23289,51 +23496,171 @@
             <a:pPr algn="l" fontAlgn="auto"/>
             <a:r>
               <a:rPr lang="zh-CN" altLang="en-US" sz="2000"/>
-              <a:t>点击主界面中左侧“权限管理”进入此模块。点击用户管理，可以进入用户管理页面，增加、删除、更改、查询用户，管理员用户可以给不同用户</a:t>
+              <a:t>即时通讯功能是本应用的核心功能，即时通讯的实现依赖于</a:t>
+            </a:r>
+            <a:r>
+              <a:rPr lang="en-US" altLang="zh-CN" sz="2000"/>
+              <a:t>WebSocket</a:t>
             </a:r>
             <a:r>
               <a:rPr lang="zh-CN" altLang="en-US" sz="2000"/>
-              <a:t>赋予不同</a:t>
+              <a:t>技术，</a:t>
+            </a:r>
+            <a:r>
+              <a:rPr lang="en-US" altLang="zh-CN" sz="2000"/>
+              <a:t>WebSocket</a:t>
             </a:r>
             <a:r>
               <a:rPr lang="zh-CN" altLang="en-US" sz="2000"/>
-              <a:t>角色。</a:t>
+              <a:t>是一种在单个</a:t>
+            </a:r>
+            <a:r>
+              <a:rPr lang="en-US" altLang="zh-CN" sz="2000"/>
+              <a:t>TCP</a:t>
+            </a:r>
+            <a:r>
+              <a:rPr lang="zh-CN" altLang="en-US" sz="2000"/>
+              <a:t>连接上提供全双工通信的网络协议，它使得客户端和服务器之间的数据交换更加简化且高效。与传统的</a:t>
+            </a:r>
+            <a:r>
+              <a:rPr lang="en-US" altLang="zh-CN" sz="2000"/>
+              <a:t>HTTP</a:t>
+            </a:r>
+            <a:r>
+              <a:rPr lang="zh-CN" altLang="en-US" sz="2000"/>
+              <a:t>请求</a:t>
+            </a:r>
+            <a:r>
+              <a:rPr lang="en-US" altLang="zh-CN" sz="2000"/>
+              <a:t>-</a:t>
+            </a:r>
+            <a:r>
+              <a:rPr lang="zh-CN" altLang="en-US" sz="2000"/>
+              <a:t>响应模式不同，</a:t>
+            </a:r>
+            <a:r>
+              <a:rPr lang="en-US" altLang="zh-CN" sz="2000"/>
+              <a:t>WebSocket</a:t>
+            </a:r>
+            <a:r>
+              <a:rPr lang="zh-CN" altLang="en-US" sz="2000"/>
+              <a:t>允许服务器主动向客户端推送数据，这消除了客户端需要频繁发起请求以检查更新的需求，从而大大降低了通信延迟，并提高了数据交换的效率。这种特性让</a:t>
+            </a:r>
+            <a:r>
+              <a:rPr lang="en-US" altLang="zh-CN" sz="2000"/>
+              <a:t>WebSocket</a:t>
+            </a:r>
+            <a:r>
+              <a:rPr lang="zh-CN" altLang="en-US" sz="2000"/>
+              <a:t>成为实时应用的理想选择，例如在线游戏、股票交易系统、即时通讯工具等场景，这些应用依赖于快速的信息交换来提供流畅的用户体验。</a:t>
+            </a:r>
+            <a:r>
+              <a:rPr lang="en-US" altLang="zh-CN" sz="2000"/>
+              <a:t>WebSocket</a:t>
+            </a:r>
+            <a:r>
+              <a:rPr lang="zh-CN" altLang="en-US" sz="2000"/>
+              <a:t>协议通过建立持久的连接并支持双向数据流，实现了比传统</a:t>
+            </a:r>
+            <a:r>
+              <a:rPr lang="en-US" altLang="zh-CN" sz="2000"/>
+              <a:t>HTTP</a:t>
+            </a:r>
+            <a:r>
+              <a:rPr lang="zh-CN" altLang="en-US" sz="2000"/>
+              <a:t>协议更高效的通信方式，特别是在需要持续更新信息的应用中表现尤为突出。</a:t>
+            </a:r>
+            <a:endParaRPr lang="zh-CN" altLang="en-US" sz="2000"/>
+          </a:p>
+          <a:p>
+            <a:pPr algn="l" fontAlgn="auto"/>
+            <a:r>
+              <a:rPr lang="en-US" altLang="zh-CN" sz="2000"/>
+              <a:t>WebSocket</a:t>
+            </a:r>
+            <a:r>
+              <a:rPr lang="zh-CN" altLang="en-US" sz="2000"/>
+              <a:t>适用于多种环境，不仅限于网页浏览器和服务器间的通信，还可以用于其他任何支持</a:t>
+            </a:r>
+            <a:r>
+              <a:rPr lang="en-US" altLang="zh-CN" sz="2000"/>
+              <a:t>TCP</a:t>
+            </a:r>
+            <a:r>
+              <a:rPr lang="zh-CN" altLang="en-US" sz="2000"/>
+              <a:t>协议的应用程序间进行通信。这意味着</a:t>
+            </a:r>
+            <a:r>
+              <a:rPr lang="en-US" altLang="zh-CN" sz="2000"/>
+              <a:t>WebSocket</a:t>
+            </a:r>
+            <a:r>
+              <a:rPr lang="zh-CN" altLang="en-US" sz="2000"/>
+              <a:t>可以在广泛的平台上实现，包括但不限于移动应用、桌面应用以及各种服务端技术。在具体实现方面，比如使用</a:t>
+            </a:r>
+            <a:r>
+              <a:rPr lang="en-US" altLang="zh-CN" sz="2000"/>
+              <a:t>Node.js</a:t>
+            </a:r>
+            <a:r>
+              <a:rPr lang="zh-CN" altLang="en-US" sz="2000"/>
+              <a:t>作为服务端时，开发者可能会选择</a:t>
+            </a:r>
+            <a:r>
+              <a:rPr lang="en-US" altLang="zh-CN" sz="2000"/>
+              <a:t>socket.io</a:t>
+            </a:r>
+            <a:r>
+              <a:rPr lang="zh-CN" altLang="en-US" sz="2000"/>
+              <a:t>这样的库来简化</a:t>
+            </a:r>
+            <a:r>
+              <a:rPr lang="en-US" altLang="zh-CN" sz="2000"/>
+              <a:t>WebSocket</a:t>
+            </a:r>
+            <a:r>
+              <a:rPr lang="zh-CN" altLang="en-US" sz="2000"/>
+              <a:t>的使用。当用户进入一个基于</a:t>
+            </a:r>
+            <a:r>
+              <a:rPr lang="en-US" altLang="zh-CN" sz="2000"/>
+              <a:t>WebSocket</a:t>
+            </a:r>
+            <a:r>
+              <a:rPr lang="zh-CN" altLang="en-US" sz="2000"/>
+              <a:t>的应用后，用户的设备会自动尝试与</a:t>
+            </a:r>
+            <a:r>
+              <a:rPr lang="en-US" altLang="zh-CN" sz="2000"/>
+              <a:t>WebSocket</a:t>
+            </a:r>
+            <a:r>
+              <a:rPr lang="zh-CN" altLang="en-US" sz="2000"/>
+              <a:t>服务器建立连接，并在这个过程中将用户的身份标识（如</a:t>
+            </a:r>
+            <a:r>
+              <a:rPr lang="en-US" altLang="zh-CN" sz="2000"/>
+              <a:t>userId</a:t>
+            </a:r>
+            <a:r>
+              <a:rPr lang="zh-CN" altLang="en-US" sz="2000"/>
+              <a:t>）传递给服务端。服务端接收这一信息后，会维护一个映射表，其中键为用户的身份标识</a:t>
+            </a:r>
+            <a:r>
+              <a:rPr lang="en-US" altLang="zh-CN" sz="2000"/>
+              <a:t>(userId)</a:t>
+            </a:r>
+            <a:r>
+              <a:rPr lang="zh-CN" altLang="en-US" sz="2000"/>
+              <a:t>，而值则是此次连接唯一的标识符。这种方式方便了服务端针对特定用户进行消息推送，提升了通信的针对性和个人化体验。</a:t>
             </a:r>
             <a:endParaRPr lang="zh-CN" altLang="en-US" sz="2000"/>
           </a:p>
         </p:txBody>
       </p:sp>
-      <p:pic>
-        <p:nvPicPr>
-          <p:cNvPr id="161" name="图片 8"/>
-          <p:cNvPicPr>
-            <a:picLocks noChangeAspect="1"/>
-          </p:cNvPicPr>
-          <p:nvPr/>
-        </p:nvPicPr>
-        <p:blipFill>
-          <a:blip r:embed="rId1"/>
-          <a:stretch>
-            <a:fillRect/>
-          </a:stretch>
-        </p:blipFill>
-        <p:spPr>
-          <a:xfrm>
-            <a:off x="1401445" y="2584450"/>
-            <a:ext cx="10098405" cy="3629025"/>
-          </a:xfrm>
-          <a:prstGeom prst="rect">
-            <a:avLst/>
-          </a:prstGeom>
-          <a:noFill/>
-          <a:ln>
-            <a:noFill/>
-          </a:ln>
-        </p:spPr>
-      </p:pic>
     </p:spTree>
     <p:custDataLst>
-      <p:tags r:id="rId2"/>
+      <p:tags r:id="rId1"/>
     </p:custDataLst>
   </p:cSld>
   <p:clrMapOvr>
@@ -23796,8 +24123,8 @@
         </p:nvSpPr>
         <p:spPr>
           <a:xfrm>
-            <a:off x="976630" y="1092200"/>
-            <a:ext cx="3387090" cy="436880"/>
+            <a:off x="52070" y="1092200"/>
+            <a:ext cx="1699260" cy="436880"/>
           </a:xfrm>
           <a:prstGeom prst="rect">
             <a:avLst/>
@@ -23828,7 +24155,11 @@
             <a:pPr algn="ctr"/>
             <a:r>
               <a:rPr lang="zh-CN" altLang="en-US" sz="2400"/>
-              <a:t>角色管理</a:t>
+              <a:t>即时</a:t>
+            </a:r>
+            <a:r>
+              <a:rPr lang="zh-CN" altLang="en-US" sz="2400"/>
+              <a:t>通讯</a:t>
             </a:r>
             <a:endParaRPr lang="zh-CN" altLang="en-US" sz="2400"/>
           </a:p>
@@ -23843,7 +24174,7 @@
         <p:spPr>
           <a:xfrm>
             <a:off x="244475" y="1529080"/>
-            <a:ext cx="11947525" cy="1329690"/>
+            <a:ext cx="11947525" cy="1050290"/>
           </a:xfrm>
           <a:prstGeom prst="rect">
             <a:avLst/>
@@ -23874,7 +24205,75 @@
             <a:pPr algn="l" fontAlgn="auto"/>
             <a:r>
               <a:rPr lang="zh-CN" altLang="en-US" sz="2000"/>
-              <a:t>点击主界面中左侧“权限管理”进入此模块。点击角色管理，可以进入角色管理页面，增加、删除、更改、查询角色，不同的角色有不同的权限。</a:t>
+              <a:t>即时通讯包括了单聊和群聊，实现思路：每次建立</a:t>
+            </a:r>
+            <a:r>
+              <a:rPr lang="en-US" altLang="zh-CN" sz="2000"/>
+              <a:t>socket</a:t>
+            </a:r>
+            <a:r>
+              <a:rPr lang="zh-CN" altLang="en-US" sz="2000"/>
+              <a:t>连接都会有一个连接</a:t>
+            </a:r>
+            <a:r>
+              <a:rPr lang="en-US" altLang="zh-CN" sz="2000"/>
+              <a:t>ID</a:t>
+            </a:r>
+            <a:r>
+              <a:rPr lang="zh-CN" altLang="en-US" sz="2000"/>
+              <a:t>，把用户</a:t>
+            </a:r>
+            <a:r>
+              <a:rPr lang="en-US" altLang="zh-CN" sz="2000"/>
+              <a:t>ID</a:t>
+            </a:r>
+            <a:r>
+              <a:rPr lang="zh-CN" altLang="en-US" sz="2000"/>
+              <a:t>作为参数传过来，然后再服务端做一个映射表，把用户</a:t>
+            </a:r>
+            <a:r>
+              <a:rPr lang="en-US" altLang="zh-CN" sz="2000"/>
+              <a:t>ID</a:t>
+            </a:r>
+            <a:r>
+              <a:rPr lang="zh-CN" altLang="en-US" sz="2000"/>
+              <a:t>作为</a:t>
+            </a:r>
+            <a:r>
+              <a:rPr lang="en-US" altLang="zh-CN" sz="2000"/>
+              <a:t>key</a:t>
+            </a:r>
+            <a:r>
+              <a:rPr lang="zh-CN" altLang="en-US" sz="2000"/>
+              <a:t>，而连接</a:t>
+            </a:r>
+            <a:r>
+              <a:rPr lang="en-US" altLang="zh-CN" sz="2000"/>
+              <a:t>ID</a:t>
+            </a:r>
+            <a:r>
+              <a:rPr lang="zh-CN" altLang="en-US" sz="2000"/>
+              <a:t>作为</a:t>
+            </a:r>
+            <a:r>
+              <a:rPr lang="en-US" altLang="zh-CN" sz="2000"/>
+              <a:t>Key</a:t>
+            </a:r>
+            <a:r>
+              <a:rPr lang="zh-CN" altLang="en-US" sz="2000"/>
+              <a:t>的</a:t>
+            </a:r>
+            <a:r>
+              <a:rPr lang="en-US" altLang="zh-CN" sz="2000"/>
+              <a:t>value</a:t>
+            </a:r>
+            <a:r>
+              <a:rPr lang="zh-CN" altLang="en-US" sz="2000"/>
+              <a:t>，然后用户每次发送消息的时候，检索这个映射表，发送给指定用户，对应用户监听到消息后，显示在页面</a:t>
+            </a:r>
+            <a:r>
+              <a:rPr lang="zh-CN" altLang="en-US" sz="2000"/>
+              <a:t>中</a:t>
             </a:r>
             <a:endParaRPr lang="zh-CN" altLang="en-US" sz="2000"/>
           </a:p>
@@ -23882,7 +24281,7 @@
       </p:sp>
       <p:pic>
         <p:nvPicPr>
-          <p:cNvPr id="162" name="图片 9"/>
+          <p:cNvPr id="5" name="图片 4"/>
           <p:cNvPicPr>
             <a:picLocks noChangeAspect="1"/>
           </p:cNvPicPr>
@@ -23896,21 +24295,41 @@
         </p:blipFill>
         <p:spPr>
           <a:xfrm>
-            <a:off x="560070" y="2858770"/>
-            <a:ext cx="11154410" cy="3559175"/>
+            <a:off x="381000" y="2579370"/>
+            <a:ext cx="2355215" cy="4102735"/>
           </a:xfrm>
           <a:prstGeom prst="rect">
             <a:avLst/>
           </a:prstGeom>
-          <a:noFill/>
-          <a:ln>
-            <a:noFill/>
-          </a:ln>
+        </p:spPr>
+      </p:pic>
+      <p:pic>
+        <p:nvPicPr>
+          <p:cNvPr id="6" name="图片 5"/>
+          <p:cNvPicPr>
+            <a:picLocks noChangeAspect="1"/>
+          </p:cNvPicPr>
+          <p:nvPr/>
+        </p:nvPicPr>
+        <p:blipFill>
+          <a:blip r:embed="rId2"/>
+          <a:stretch>
+            <a:fillRect/>
+          </a:stretch>
+        </p:blipFill>
+        <p:spPr>
+          <a:xfrm>
+            <a:off x="3040380" y="2579370"/>
+            <a:ext cx="2292350" cy="4017010"/>
+          </a:xfrm>
+          <a:prstGeom prst="rect">
+            <a:avLst/>
+          </a:prstGeom>
         </p:spPr>
       </p:pic>
     </p:spTree>
     <p:custDataLst>
-      <p:tags r:id="rId2"/>
+      <p:tags r:id="rId3"/>
     </p:custDataLst>
   </p:cSld>
   <p:clrMapOvr>
@@ -24373,8 +24792,8 @@
         </p:nvSpPr>
         <p:spPr>
           <a:xfrm>
-            <a:off x="976630" y="1092200"/>
-            <a:ext cx="3387090" cy="436880"/>
+            <a:off x="244475" y="1013460"/>
+            <a:ext cx="1946275" cy="436880"/>
           </a:xfrm>
           <a:prstGeom prst="rect">
             <a:avLst/>
@@ -24405,7 +24824,11 @@
             <a:pPr algn="ctr"/>
             <a:r>
               <a:rPr lang="zh-CN" altLang="en-US" sz="2400"/>
-              <a:t>资源管理</a:t>
+              <a:t>朋友圈</a:t>
+            </a:r>
+            <a:r>
+              <a:rPr lang="zh-CN" altLang="en-US" sz="2400"/>
+              <a:t>列表</a:t>
             </a:r>
             <a:endParaRPr lang="zh-CN" altLang="en-US" sz="2400"/>
           </a:p>
@@ -24420,7 +24843,7 @@
         <p:spPr>
           <a:xfrm>
             <a:off x="244475" y="1529080"/>
-            <a:ext cx="11947525" cy="1329690"/>
+            <a:ext cx="11947525" cy="727710"/>
           </a:xfrm>
           <a:prstGeom prst="rect">
             <a:avLst/>
@@ -24451,11 +24874,11 @@
             <a:pPr algn="l" fontAlgn="auto"/>
             <a:r>
               <a:rPr lang="zh-CN" altLang="en-US" sz="2000"/>
-              <a:t>点击主界面中左侧“权限管理”进入此模块。点击资源管理，可以进入资源管理页面，增加、删除、更改、查询资源，不同的</a:t>
+              <a:t>点击底部菜单的朋友圈即可进入朋友圈列表，这里会展示好友发布的朋友圈</a:t>
             </a:r>
             <a:r>
               <a:rPr lang="zh-CN" altLang="en-US" sz="2000"/>
-              <a:t>权限有不同的资源。</a:t>
+              <a:t>信息</a:t>
             </a:r>
             <a:endParaRPr lang="zh-CN" altLang="en-US" sz="2000"/>
           </a:p>
@@ -24463,7 +24886,7 @@
       </p:sp>
       <p:pic>
         <p:nvPicPr>
-          <p:cNvPr id="163" name="图片 10"/>
+          <p:cNvPr id="4" name="图片 3"/>
           <p:cNvPicPr>
             <a:picLocks noChangeAspect="1"/>
           </p:cNvPicPr>
@@ -24477,16 +24900,12 @@
         </p:blipFill>
         <p:spPr>
           <a:xfrm>
-            <a:off x="514985" y="2858770"/>
-            <a:ext cx="10552430" cy="3792855"/>
+            <a:off x="381000" y="2136775"/>
+            <a:ext cx="2654300" cy="4582795"/>
           </a:xfrm>
           <a:prstGeom prst="rect">
             <a:avLst/>
           </a:prstGeom>
-          <a:noFill/>
-          <a:ln>
-            <a:noFill/>
-          </a:ln>
         </p:spPr>
       </p:pic>
     </p:spTree>
@@ -24954,8 +25373,8 @@
         </p:nvSpPr>
         <p:spPr>
           <a:xfrm>
-            <a:off x="976630" y="1092200"/>
-            <a:ext cx="3387090" cy="436880"/>
+            <a:off x="244475" y="1015365"/>
+            <a:ext cx="1538605" cy="436880"/>
           </a:xfrm>
           <a:prstGeom prst="rect">
             <a:avLst/>
@@ -24986,7 +25405,11 @@
             <a:pPr algn="ctr"/>
             <a:r>
               <a:rPr lang="zh-CN" altLang="en-US" sz="2400"/>
-              <a:t>营销机会管理</a:t>
+              <a:t>发布</a:t>
+            </a:r>
+            <a:r>
+              <a:rPr lang="zh-CN" altLang="en-US" sz="2400"/>
+              <a:t>动态</a:t>
             </a:r>
             <a:endParaRPr lang="zh-CN" altLang="en-US" sz="2400"/>
           </a:p>
@@ -25001,7 +25424,7 @@
         <p:spPr>
           <a:xfrm>
             <a:off x="244475" y="1529080"/>
-            <a:ext cx="11947525" cy="1329690"/>
+            <a:ext cx="11947525" cy="451485"/>
           </a:xfrm>
           <a:prstGeom prst="rect">
             <a:avLst/>
@@ -25032,7 +25455,11 @@
             <a:pPr algn="l" fontAlgn="auto"/>
             <a:r>
               <a:rPr lang="zh-CN" altLang="en-US" sz="2000"/>
-              <a:t>点击主界面中左侧“营销管理”进入此模块。点击营销机会管理，可以进入营销机会管理页面，增加、删除、更改、查询营销机会。</a:t>
+              <a:t>点击顶部导航栏加号，在弹出框中点击发布动态，即可进入发布动态页面，点击下方的相机可以选择本地相册进行图片的发布，点击右上角发布后即可发布一条朋友圈</a:t>
+            </a:r>
+            <a:r>
+              <a:rPr lang="zh-CN" altLang="en-US" sz="2000"/>
+              <a:t>信息</a:t>
             </a:r>
             <a:endParaRPr lang="zh-CN" altLang="en-US" sz="2000"/>
           </a:p>
@@ -25040,7 +25467,7 @@
       </p:sp>
       <p:pic>
         <p:nvPicPr>
-          <p:cNvPr id="6" name="图片 2"/>
+          <p:cNvPr id="4" name="图片 3"/>
           <p:cNvPicPr>
             <a:picLocks noChangeAspect="1"/>
           </p:cNvPicPr>
@@ -25054,16 +25481,12 @@
         </p:blipFill>
         <p:spPr>
           <a:xfrm>
-            <a:off x="683260" y="2601595"/>
-            <a:ext cx="11009630" cy="3849370"/>
+            <a:off x="381000" y="2131695"/>
+            <a:ext cx="2566035" cy="4530725"/>
           </a:xfrm>
           <a:prstGeom prst="rect">
             <a:avLst/>
           </a:prstGeom>
-          <a:noFill/>
-          <a:ln>
-            <a:noFill/>
-          </a:ln>
         </p:spPr>
       </p:pic>
     </p:spTree>
@@ -25531,7 +25954,7 @@
         </p:nvSpPr>
         <p:spPr>
           <a:xfrm>
-            <a:off x="976630" y="1092200"/>
+            <a:off x="94615" y="1015365"/>
             <a:ext cx="3387090" cy="436880"/>
           </a:xfrm>
           <a:prstGeom prst="rect">
@@ -25563,7 +25986,11 @@
             <a:pPr algn="ctr"/>
             <a:r>
               <a:rPr lang="zh-CN" altLang="en-US" sz="2400"/>
-              <a:t>开发计划管理</a:t>
+              <a:t>朋友圈的点赞和</a:t>
+            </a:r>
+            <a:r>
+              <a:rPr lang="zh-CN" altLang="en-US" sz="2400"/>
+              <a:t>评论</a:t>
             </a:r>
             <a:endParaRPr lang="zh-CN" altLang="en-US" sz="2400"/>
           </a:p>
@@ -25609,7 +26036,11 @@
             <a:pPr algn="l" fontAlgn="auto"/>
             <a:r>
               <a:rPr lang="zh-CN" altLang="en-US" sz="2000"/>
-              <a:t>点击主界面中左侧“营销管理”进入此模块。点击客户开发计划，可以进入客户开发计划页面，增加、删除、更改、查询客户开发计划。</a:t>
+              <a:t>在朋友圈列表可以选择一条朋友圈，点击进去查看详情，点击点赞图标即可进行点赞，点赞后图标点亮，并且会在下方展示点赞人，点击下方输入框即可发送</a:t>
+            </a:r>
+            <a:r>
+              <a:rPr lang="zh-CN" altLang="en-US" sz="2000"/>
+              <a:t>评论</a:t>
             </a:r>
             <a:endParaRPr lang="zh-CN" altLang="en-US" sz="2000"/>
           </a:p>
@@ -25617,7 +26048,7 @@
       </p:sp>
       <p:pic>
         <p:nvPicPr>
-          <p:cNvPr id="41" name="图片 1"/>
+          <p:cNvPr id="4" name="图片 3"/>
           <p:cNvPicPr>
             <a:picLocks noChangeAspect="1"/>
           </p:cNvPicPr>
@@ -25631,16 +26062,12 @@
         </p:blipFill>
         <p:spPr>
           <a:xfrm>
-            <a:off x="553085" y="2707005"/>
-            <a:ext cx="10584815" cy="3592830"/>
+            <a:off x="381000" y="2640965"/>
+            <a:ext cx="2381885" cy="4086225"/>
           </a:xfrm>
           <a:prstGeom prst="rect">
             <a:avLst/>
           </a:prstGeom>
-          <a:noFill/>
-          <a:ln>
-            <a:noFill/>
-          </a:ln>
         </p:spPr>
       </p:pic>
     </p:spTree>
@@ -25834,1205 +26261,6 @@
 </file>
 
 <file path=ppt/slides/slide29.xml><?xml version="1.0" encoding="utf-8"?>
-<p:sld xmlns:a="http://schemas.openxmlformats.org/drawingml/2006/main" xmlns:r="http://schemas.openxmlformats.org/officeDocument/2006/relationships" xmlns:p="http://schemas.openxmlformats.org/presentationml/2006/main">
-  <p:cSld>
-    <p:spTree>
-      <p:nvGrpSpPr>
-        <p:cNvPr id="1" name=""/>
-        <p:cNvGrpSpPr/>
-        <p:nvPr/>
-      </p:nvGrpSpPr>
-      <p:grpSpPr>
-        <a:xfrm>
-          <a:off x="0" y="0"/>
-          <a:ext cx="0" cy="0"/>
-          <a:chOff x="0" y="0"/>
-          <a:chExt cx="0" cy="0"/>
-        </a:xfrm>
-      </p:grpSpPr>
-      <p:grpSp>
-        <p:nvGrpSpPr>
-          <p:cNvPr id="19" name="组合 18"/>
-          <p:cNvGrpSpPr/>
-          <p:nvPr/>
-        </p:nvGrpSpPr>
-        <p:grpSpPr>
-          <a:xfrm>
-            <a:off x="244706" y="165322"/>
-            <a:ext cx="4862917" cy="769441"/>
-            <a:chOff x="145646" y="165322"/>
-            <a:chExt cx="4862917" cy="769441"/>
-          </a:xfrm>
-        </p:grpSpPr>
-        <p:grpSp>
-          <p:nvGrpSpPr>
-            <p:cNvPr id="17" name="组合 16"/>
-            <p:cNvGrpSpPr/>
-            <p:nvPr/>
-          </p:nvGrpSpPr>
-          <p:grpSpPr>
-            <a:xfrm>
-              <a:off x="145646" y="165322"/>
-              <a:ext cx="4521604" cy="769441"/>
-              <a:chOff x="107546" y="317722"/>
-              <a:chExt cx="4521604" cy="769441"/>
-            </a:xfrm>
-          </p:grpSpPr>
-          <p:sp>
-            <p:nvSpPr>
-              <p:cNvPr id="8" name="文本框 7"/>
-              <p:cNvSpPr txBox="1"/>
-              <p:nvPr/>
-            </p:nvSpPr>
-            <p:spPr>
-              <a:xfrm>
-                <a:off x="996748" y="317722"/>
-                <a:ext cx="3632402" cy="583565"/>
-              </a:xfrm>
-              <a:prstGeom prst="rect">
-                <a:avLst/>
-              </a:prstGeom>
-              <a:noFill/>
-            </p:spPr>
-            <p:txBody>
-              <a:bodyPr wrap="square" rtlCol="0">
-                <a:spAutoFit/>
-              </a:bodyPr>
-              <a:lstStyle/>
-              <a:p>
-                <a:pPr algn="dist"/>
-                <a:r>
-                  <a:rPr lang="zh-CN" altLang="en-US" sz="3200" dirty="0">
-                    <a:solidFill>
-                      <a:schemeClr val="tx1">
-                        <a:lumMod val="75000"/>
-                        <a:lumOff val="25000"/>
-                      </a:schemeClr>
-                    </a:solidFill>
-                    <a:cs typeface="+mn-ea"/>
-                    <a:sym typeface="+mn-lt"/>
-                  </a:rPr>
-                  <a:t>系统设计及其</a:t>
-                </a:r>
-                <a:r>
-                  <a:rPr lang="zh-CN" altLang="en-US" sz="3200" dirty="0">
-                    <a:solidFill>
-                      <a:schemeClr val="tx1">
-                        <a:lumMod val="75000"/>
-                        <a:lumOff val="25000"/>
-                      </a:schemeClr>
-                    </a:solidFill>
-                    <a:cs typeface="+mn-ea"/>
-                    <a:sym typeface="+mn-lt"/>
-                  </a:rPr>
-                  <a:t>实现</a:t>
-                </a:r>
-                <a:endParaRPr lang="zh-CN" altLang="en-US" sz="3200" dirty="0">
-                  <a:solidFill>
-                    <a:schemeClr val="tx1">
-                      <a:lumMod val="75000"/>
-                      <a:lumOff val="25000"/>
-                    </a:schemeClr>
-                  </a:solidFill>
-                  <a:cs typeface="+mn-ea"/>
-                  <a:sym typeface="+mn-lt"/>
-                </a:endParaRPr>
-              </a:p>
-            </p:txBody>
-          </p:sp>
-          <p:sp>
-            <p:nvSpPr>
-              <p:cNvPr id="16" name="文本框 15"/>
-              <p:cNvSpPr txBox="1"/>
-              <p:nvPr/>
-            </p:nvSpPr>
-            <p:spPr>
-              <a:xfrm>
-                <a:off x="107546" y="317722"/>
-                <a:ext cx="1003704" cy="769441"/>
-              </a:xfrm>
-              <a:prstGeom prst="rect">
-                <a:avLst/>
-              </a:prstGeom>
-              <a:noFill/>
-            </p:spPr>
-            <p:txBody>
-              <a:bodyPr wrap="square" rtlCol="0">
-                <a:spAutoFit/>
-              </a:bodyPr>
-              <a:lstStyle/>
-              <a:p>
-                <a:r>
-                  <a:rPr lang="en-US" altLang="zh-CN" sz="4400" dirty="0">
-                    <a:solidFill>
-                      <a:srgbClr val="69C0E1"/>
-                    </a:solidFill>
-                    <a:cs typeface="+mn-ea"/>
-                    <a:sym typeface="+mn-lt"/>
-                  </a:rPr>
-                  <a:t>03.</a:t>
-                </a:r>
-                <a:endParaRPr lang="zh-CN" altLang="en-US" sz="4400" dirty="0">
-                  <a:solidFill>
-                    <a:srgbClr val="69C0E1"/>
-                  </a:solidFill>
-                  <a:cs typeface="+mn-ea"/>
-                  <a:sym typeface="+mn-lt"/>
-                </a:endParaRPr>
-              </a:p>
-            </p:txBody>
-          </p:sp>
-        </p:grpSp>
-        <p:sp>
-          <p:nvSpPr>
-            <p:cNvPr id="18" name="文本框 17"/>
-            <p:cNvSpPr txBox="1"/>
-            <p:nvPr/>
-          </p:nvSpPr>
-          <p:spPr>
-            <a:xfrm>
-              <a:off x="1077711" y="640874"/>
-              <a:ext cx="3930852" cy="218445"/>
-            </a:xfrm>
-            <a:prstGeom prst="rect">
-              <a:avLst/>
-            </a:prstGeom>
-            <a:noFill/>
-          </p:spPr>
-          <p:txBody>
-            <a:bodyPr wrap="square" rtlCol="0">
-              <a:spAutoFit/>
-            </a:bodyPr>
-            <a:lstStyle/>
-            <a:p>
-              <a:pPr algn="dist"/>
-              <a:r>
-                <a:rPr lang="en-US" altLang="zh-CN" sz="800" dirty="0">
-                  <a:solidFill>
-                    <a:srgbClr val="10507E"/>
-                  </a:solidFill>
-                  <a:cs typeface="+mn-ea"/>
-                  <a:sym typeface="+mn-lt"/>
-                </a:rPr>
-                <a:t>RESEARCH BACKGROUND AND CURRENT SITUATION</a:t>
-              </a:r>
-              <a:endParaRPr lang="zh-CN" altLang="en-US" sz="800" dirty="0">
-                <a:solidFill>
-                  <a:srgbClr val="10507E"/>
-                </a:solidFill>
-                <a:cs typeface="+mn-ea"/>
-                <a:sym typeface="+mn-lt"/>
-              </a:endParaRPr>
-            </a:p>
-          </p:txBody>
-        </p:sp>
-      </p:grpSp>
-      <p:sp>
-        <p:nvSpPr>
-          <p:cNvPr id="20" name="矩形 19"/>
-          <p:cNvSpPr/>
-          <p:nvPr/>
-        </p:nvSpPr>
-        <p:spPr>
-          <a:xfrm>
-            <a:off x="381000" y="859320"/>
-            <a:ext cx="10756900" cy="45719"/>
-          </a:xfrm>
-          <a:prstGeom prst="rect">
-            <a:avLst/>
-          </a:prstGeom>
-          <a:gradFill flip="none" rotWithShape="1">
-            <a:gsLst>
-              <a:gs pos="37000">
-                <a:srgbClr val="69C0E1">
-                  <a:alpha val="30000"/>
-                </a:srgbClr>
-              </a:gs>
-              <a:gs pos="1000">
-                <a:srgbClr val="69C0E1">
-                  <a:alpha val="0"/>
-                </a:srgbClr>
-              </a:gs>
-              <a:gs pos="74000">
-                <a:srgbClr val="69C0E1">
-                  <a:alpha val="52000"/>
-                </a:srgbClr>
-              </a:gs>
-              <a:gs pos="83000">
-                <a:srgbClr val="69C0E1"/>
-              </a:gs>
-              <a:gs pos="100000">
-                <a:srgbClr val="69C0E1"/>
-              </a:gs>
-            </a:gsLst>
-            <a:lin ang="10800000" scaled="1"/>
-            <a:tileRect/>
-          </a:gradFill>
-          <a:ln>
-            <a:noFill/>
-          </a:ln>
-        </p:spPr>
-        <p:style>
-          <a:lnRef idx="2">
-            <a:schemeClr val="accent1">
-              <a:shade val="50000"/>
-            </a:schemeClr>
-          </a:lnRef>
-          <a:fillRef idx="1">
-            <a:schemeClr val="accent1"/>
-          </a:fillRef>
-          <a:effectRef idx="0">
-            <a:schemeClr val="accent1"/>
-          </a:effectRef>
-          <a:fontRef idx="minor">
-            <a:schemeClr val="lt1"/>
-          </a:fontRef>
-        </p:style>
-        <p:txBody>
-          <a:bodyPr rtlCol="0" anchor="ctr"/>
-          <a:lstStyle/>
-          <a:p>
-            <a:pPr algn="ctr"/>
-            <a:endParaRPr lang="zh-CN" altLang="en-US">
-              <a:cs typeface="+mn-ea"/>
-              <a:sym typeface="+mn-lt"/>
-            </a:endParaRPr>
-          </a:p>
-        </p:txBody>
-      </p:sp>
-      <p:sp>
-        <p:nvSpPr>
-          <p:cNvPr id="3" name="矩形 2"/>
-          <p:cNvSpPr/>
-          <p:nvPr/>
-        </p:nvSpPr>
-        <p:spPr>
-          <a:xfrm>
-            <a:off x="976630" y="1092200"/>
-            <a:ext cx="3387090" cy="436880"/>
-          </a:xfrm>
-          <a:prstGeom prst="rect">
-            <a:avLst/>
-          </a:prstGeom>
-          <a:ln>
-            <a:solidFill>
-              <a:schemeClr val="bg1"/>
-            </a:solidFill>
-          </a:ln>
-        </p:spPr>
-        <p:style>
-          <a:lnRef idx="2">
-            <a:schemeClr val="dk1"/>
-          </a:lnRef>
-          <a:fillRef idx="1">
-            <a:schemeClr val="lt1"/>
-          </a:fillRef>
-          <a:effectRef idx="0">
-            <a:schemeClr val="dk1"/>
-          </a:effectRef>
-          <a:fontRef idx="minor">
-            <a:schemeClr val="dk1"/>
-          </a:fontRef>
-        </p:style>
-        <p:txBody>
-          <a:bodyPr rtlCol="0" anchor="ctr"/>
-          <a:p>
-            <a:pPr algn="ctr"/>
-            <a:r>
-              <a:rPr lang="zh-CN" altLang="en-US" sz="2400"/>
-              <a:t>服务</a:t>
-            </a:r>
-            <a:r>
-              <a:rPr lang="zh-CN" altLang="en-US" sz="2400"/>
-              <a:t>创建</a:t>
-            </a:r>
-            <a:endParaRPr lang="zh-CN" altLang="en-US" sz="2400"/>
-          </a:p>
-        </p:txBody>
-      </p:sp>
-      <p:sp>
-        <p:nvSpPr>
-          <p:cNvPr id="2" name="矩形 1"/>
-          <p:cNvSpPr/>
-          <p:nvPr/>
-        </p:nvSpPr>
-        <p:spPr>
-          <a:xfrm>
-            <a:off x="244475" y="1529080"/>
-            <a:ext cx="11947525" cy="1329690"/>
-          </a:xfrm>
-          <a:prstGeom prst="rect">
-            <a:avLst/>
-          </a:prstGeom>
-          <a:ln>
-            <a:solidFill>
-              <a:schemeClr val="bg1"/>
-            </a:solidFill>
-          </a:ln>
-        </p:spPr>
-        <p:style>
-          <a:lnRef idx="2">
-            <a:schemeClr val="dk1"/>
-          </a:lnRef>
-          <a:fillRef idx="1">
-            <a:schemeClr val="lt1"/>
-          </a:fillRef>
-          <a:effectRef idx="0">
-            <a:schemeClr val="dk1"/>
-          </a:effectRef>
-          <a:fontRef idx="minor">
-            <a:schemeClr val="dk1"/>
-          </a:fontRef>
-        </p:style>
-        <p:txBody>
-          <a:bodyPr rtlCol="0" anchor="ctr"/>
-          <a:p>
-            <a:pPr algn="l" fontAlgn="auto"/>
-            <a:r>
-              <a:rPr lang="zh-CN" altLang="en-US" sz="2000"/>
-              <a:t>点击主界面中左侧“服务管理”进入此模块。本系统中分为售前服务，售中服务，售后服务，根据不同客户的需求创建不同的服务，点击服务创建，可以进入服务创建页面，增加、删除、更改、查询服务。</a:t>
-            </a:r>
-            <a:endParaRPr lang="zh-CN" altLang="en-US" sz="2000"/>
-          </a:p>
-        </p:txBody>
-      </p:sp>
-      <p:pic>
-        <p:nvPicPr>
-          <p:cNvPr id="7" name="图片 1"/>
-          <p:cNvPicPr>
-            <a:picLocks noChangeAspect="1"/>
-          </p:cNvPicPr>
-          <p:nvPr/>
-        </p:nvPicPr>
-        <p:blipFill>
-          <a:blip r:embed="rId1"/>
-          <a:stretch>
-            <a:fillRect/>
-          </a:stretch>
-        </p:blipFill>
-        <p:spPr>
-          <a:xfrm>
-            <a:off x="781685" y="2858770"/>
-            <a:ext cx="10356850" cy="3312795"/>
-          </a:xfrm>
-          <a:prstGeom prst="rect">
-            <a:avLst/>
-          </a:prstGeom>
-          <a:noFill/>
-          <a:ln>
-            <a:noFill/>
-          </a:ln>
-        </p:spPr>
-      </p:pic>
-    </p:spTree>
-    <p:custDataLst>
-      <p:tags r:id="rId2"/>
-    </p:custDataLst>
-  </p:cSld>
-  <p:clrMapOvr>
-    <a:masterClrMapping/>
-  </p:clrMapOvr>
-  <mc:AlternateContent xmlns:mc="http://schemas.openxmlformats.org/markup-compatibility/2006">
-    <mc:Choice xmlns:p14="http://schemas.microsoft.com/office/powerpoint/2010/main" Requires="p14">
-      <p:transition spd="slow" p14:dur="1500" advTm="3012">
-        <p:random/>
-      </p:transition>
-    </mc:Choice>
-    <mc:Fallback>
-      <p:transition spd="slow" advTm="3012">
-        <p:random/>
-      </p:transition>
-    </mc:Fallback>
-  </mc:AlternateContent>
-  <p:timing>
-    <p:tnLst>
-      <p:par>
-        <p:cTn id="1" dur="indefinite" restart="never" nodeType="tmRoot">
-          <p:childTnLst>
-            <p:seq concurrent="1" nextAc="seek">
-              <p:cTn id="2" dur="indefinite" nodeType="mainSeq">
-                <p:childTnLst>
-                  <p:par>
-                    <p:cTn id="3" fill="hold">
-                      <p:stCondLst>
-                        <p:cond delay="indefinite"/>
-                      </p:stCondLst>
-                      <p:childTnLst>
-                        <p:par>
-                          <p:cTn id="4" fill="hold">
-                            <p:stCondLst>
-                              <p:cond delay="0"/>
-                            </p:stCondLst>
-                            <p:childTnLst>
-                              <p:par>
-                                <p:cTn id="5" presetID="42" presetClass="entr" presetSubtype="0" fill="hold" nodeType="clickEffect">
-                                  <p:stCondLst>
-                                    <p:cond delay="0"/>
-                                  </p:stCondLst>
-                                  <p:childTnLst>
-                                    <p:set>
-                                      <p:cBhvr>
-                                        <p:cTn id="6" dur="1" fill="hold">
-                                          <p:stCondLst>
-                                            <p:cond delay="0"/>
-                                          </p:stCondLst>
-                                        </p:cTn>
-                                        <p:tgtEl>
-                                          <p:spTgt spid="19"/>
-                                        </p:tgtEl>
-                                        <p:attrNameLst>
-                                          <p:attrName>style.visibility</p:attrName>
-                                        </p:attrNameLst>
-                                      </p:cBhvr>
-                                      <p:to>
-                                        <p:strVal val="visible"/>
-                                      </p:to>
-                                    </p:set>
-                                    <p:animEffect transition="in" filter="fade">
-                                      <p:cBhvr>
-                                        <p:cTn id="7" dur="750"/>
-                                        <p:tgtEl>
-                                          <p:spTgt spid="19"/>
-                                        </p:tgtEl>
-                                      </p:cBhvr>
-                                    </p:animEffect>
-                                    <p:anim calcmode="lin" valueType="num">
-                                      <p:cBhvr>
-                                        <p:cTn id="8" dur="750" fill="hold"/>
-                                        <p:tgtEl>
-                                          <p:spTgt spid="19"/>
-                                        </p:tgtEl>
-                                        <p:attrNameLst>
-                                          <p:attrName>ppt_x</p:attrName>
-                                        </p:attrNameLst>
-                                      </p:cBhvr>
-                                      <p:tavLst>
-                                        <p:tav tm="0">
-                                          <p:val>
-                                            <p:strVal val="#ppt_x"/>
-                                          </p:val>
-                                        </p:tav>
-                                        <p:tav tm="100000">
-                                          <p:val>
-                                            <p:strVal val="#ppt_x"/>
-                                          </p:val>
-                                        </p:tav>
-                                      </p:tavLst>
-                                    </p:anim>
-                                    <p:anim calcmode="lin" valueType="num">
-                                      <p:cBhvr>
-                                        <p:cTn id="9" dur="750" fill="hold"/>
-                                        <p:tgtEl>
-                                          <p:spTgt spid="19"/>
-                                        </p:tgtEl>
-                                        <p:attrNameLst>
-                                          <p:attrName>ppt_y</p:attrName>
-                                        </p:attrNameLst>
-                                      </p:cBhvr>
-                                      <p:tavLst>
-                                        <p:tav tm="0">
-                                          <p:val>
-                                            <p:strVal val="#ppt_y+.1"/>
-                                          </p:val>
-                                        </p:tav>
-                                        <p:tav tm="100000">
-                                          <p:val>
-                                            <p:strVal val="#ppt_y"/>
-                                          </p:val>
-                                        </p:tav>
-                                      </p:tavLst>
-                                    </p:anim>
-                                  </p:childTnLst>
-                                </p:cTn>
-                              </p:par>
-                              <p:par>
-                                <p:cTn id="10" presetID="22" presetClass="entr" presetSubtype="8" fill="hold" grpId="0" nodeType="withEffect">
-                                  <p:stCondLst>
-                                    <p:cond delay="0"/>
-                                  </p:stCondLst>
-                                  <p:childTnLst>
-                                    <p:set>
-                                      <p:cBhvr>
-                                        <p:cTn id="11" dur="1" fill="hold">
-                                          <p:stCondLst>
-                                            <p:cond delay="0"/>
-                                          </p:stCondLst>
-                                        </p:cTn>
-                                        <p:tgtEl>
-                                          <p:spTgt spid="20"/>
-                                        </p:tgtEl>
-                                        <p:attrNameLst>
-                                          <p:attrName>style.visibility</p:attrName>
-                                        </p:attrNameLst>
-                                      </p:cBhvr>
-                                      <p:to>
-                                        <p:strVal val="visible"/>
-                                      </p:to>
-                                    </p:set>
-                                    <p:animEffect transition="in" filter="wipe(left)">
-                                      <p:cBhvr>
-                                        <p:cTn id="12" dur="750"/>
-                                        <p:tgtEl>
-                                          <p:spTgt spid="20"/>
-                                        </p:tgtEl>
-                                      </p:cBhvr>
-                                    </p:animEffect>
-                                  </p:childTnLst>
-                                </p:cTn>
-                              </p:par>
-                            </p:childTnLst>
-                          </p:cTn>
-                        </p:par>
-                      </p:childTnLst>
-                    </p:cTn>
-                  </p:par>
-                </p:childTnLst>
-              </p:cTn>
-              <p:prevCondLst>
-                <p:cond evt="onPrev" delay="0">
-                  <p:tgtEl>
-                    <p:sldTgt/>
-                  </p:tgtEl>
-                </p:cond>
-              </p:prevCondLst>
-              <p:nextCondLst>
-                <p:cond evt="onNext" delay="0">
-                  <p:tgtEl>
-                    <p:sldTgt/>
-                  </p:tgtEl>
-                </p:cond>
-              </p:nextCondLst>
-            </p:seq>
-          </p:childTnLst>
-        </p:cTn>
-      </p:par>
-    </p:tnLst>
-    <p:bldLst>
-      <p:bldP spid="20" grpId="0" bldLvl="0" animBg="1"/>
-    </p:bldLst>
-  </p:timing>
-</p:sld>
-</file>
-
-<file path=ppt/slides/slide3.xml><?xml version="1.0" encoding="utf-8"?>
-<p:sld xmlns:a="http://schemas.openxmlformats.org/drawingml/2006/main" xmlns:r="http://schemas.openxmlformats.org/officeDocument/2006/relationships" xmlns:p="http://schemas.openxmlformats.org/presentationml/2006/main">
-  <p:cSld>
-    <p:spTree>
-      <p:nvGrpSpPr>
-        <p:cNvPr id="1" name=""/>
-        <p:cNvGrpSpPr/>
-        <p:nvPr/>
-      </p:nvGrpSpPr>
-      <p:grpSpPr>
-        <a:xfrm>
-          <a:off x="0" y="0"/>
-          <a:ext cx="0" cy="0"/>
-          <a:chOff x="0" y="0"/>
-          <a:chExt cx="0" cy="0"/>
-        </a:xfrm>
-      </p:grpSpPr>
-      <p:grpSp>
-        <p:nvGrpSpPr>
-          <p:cNvPr id="21" name="组合 20"/>
-          <p:cNvGrpSpPr/>
-          <p:nvPr/>
-        </p:nvGrpSpPr>
-        <p:grpSpPr>
-          <a:xfrm>
-            <a:off x="-2846530" y="-1770744"/>
-            <a:ext cx="8399978" cy="7688943"/>
-            <a:chOff x="-2846530" y="-1770744"/>
-            <a:chExt cx="8399978" cy="7688943"/>
-          </a:xfrm>
-        </p:grpSpPr>
-        <p:sp>
-          <p:nvSpPr>
-            <p:cNvPr id="2" name="椭圆 1"/>
-            <p:cNvSpPr/>
-            <p:nvPr/>
-          </p:nvSpPr>
-          <p:spPr>
-            <a:xfrm>
-              <a:off x="-2846530" y="-1770744"/>
-              <a:ext cx="7688943" cy="7688943"/>
-            </a:xfrm>
-            <a:prstGeom prst="ellipse">
-              <a:avLst/>
-            </a:prstGeom>
-            <a:solidFill>
-              <a:srgbClr val="D8EFFD"/>
-            </a:solidFill>
-            <a:ln>
-              <a:noFill/>
-            </a:ln>
-            <a:effectLst>
-              <a:outerShdw blurRad="279400" dist="38100" dir="2700000" sx="101000" sy="101000" algn="tl" rotWithShape="0">
-                <a:prstClr val="black">
-                  <a:alpha val="40000"/>
-                </a:prstClr>
-              </a:outerShdw>
-            </a:effectLst>
-          </p:spPr>
-          <p:style>
-            <a:lnRef idx="2">
-              <a:schemeClr val="accent1">
-                <a:shade val="50000"/>
-              </a:schemeClr>
-            </a:lnRef>
-            <a:fillRef idx="1">
-              <a:schemeClr val="accent1"/>
-            </a:fillRef>
-            <a:effectRef idx="0">
-              <a:schemeClr val="accent1"/>
-            </a:effectRef>
-            <a:fontRef idx="minor">
-              <a:schemeClr val="lt1"/>
-            </a:fontRef>
-          </p:style>
-          <p:txBody>
-            <a:bodyPr rtlCol="0" anchor="ctr"/>
-            <a:lstStyle/>
-            <a:p>
-              <a:pPr algn="ctr"/>
-              <a:endParaRPr lang="zh-CN" altLang="en-US">
-                <a:cs typeface="+mn-ea"/>
-                <a:sym typeface="+mn-lt"/>
-              </a:endParaRPr>
-            </a:p>
-          </p:txBody>
-        </p:sp>
-        <p:sp>
-          <p:nvSpPr>
-            <p:cNvPr id="15" name="文本框 14"/>
-            <p:cNvSpPr txBox="1"/>
-            <p:nvPr/>
-          </p:nvSpPr>
-          <p:spPr>
-            <a:xfrm>
-              <a:off x="-1214742" y="1161142"/>
-              <a:ext cx="6768190" cy="3770263"/>
-            </a:xfrm>
-            <a:prstGeom prst="rect">
-              <a:avLst/>
-            </a:prstGeom>
-            <a:noFill/>
-          </p:spPr>
-          <p:txBody>
-            <a:bodyPr wrap="square" rtlCol="0">
-              <a:spAutoFit/>
-            </a:bodyPr>
-            <a:lstStyle/>
-            <a:p>
-              <a:pPr algn="ctr"/>
-              <a:r>
-                <a:rPr lang="en-US" altLang="zh-CN" sz="23900" dirty="0">
-                  <a:solidFill>
-                    <a:srgbClr val="10507E"/>
-                  </a:solidFill>
-                  <a:effectLst>
-                    <a:outerShdw blurRad="63500" sx="101000" sy="101000" algn="ctr" rotWithShape="0">
-                      <a:prstClr val="black">
-                        <a:alpha val="40000"/>
-                      </a:prstClr>
-                    </a:outerShdw>
-                  </a:effectLst>
-                  <a:cs typeface="+mn-ea"/>
-                  <a:sym typeface="+mn-lt"/>
-                </a:rPr>
-                <a:t>01</a:t>
-              </a:r>
-              <a:endParaRPr lang="zh-CN" altLang="en-US" sz="23900" dirty="0">
-                <a:solidFill>
-                  <a:srgbClr val="10507E"/>
-                </a:solidFill>
-                <a:effectLst>
-                  <a:outerShdw blurRad="63500" sx="101000" sy="101000" algn="ctr" rotWithShape="0">
-                    <a:prstClr val="black">
-                      <a:alpha val="40000"/>
-                    </a:prstClr>
-                  </a:outerShdw>
-                </a:effectLst>
-                <a:cs typeface="+mn-ea"/>
-                <a:sym typeface="+mn-lt"/>
-              </a:endParaRPr>
-            </a:p>
-          </p:txBody>
-        </p:sp>
-      </p:grpSp>
-      <p:grpSp>
-        <p:nvGrpSpPr>
-          <p:cNvPr id="18" name="组合 17"/>
-          <p:cNvGrpSpPr/>
-          <p:nvPr/>
-        </p:nvGrpSpPr>
-        <p:grpSpPr>
-          <a:xfrm>
-            <a:off x="4842506" y="2474962"/>
-            <a:ext cx="7196455" cy="1142621"/>
-            <a:chOff x="5563631" y="2617371"/>
-            <a:chExt cx="7196455" cy="1142621"/>
-          </a:xfrm>
-        </p:grpSpPr>
-        <p:sp>
-          <p:nvSpPr>
-            <p:cNvPr id="16" name="文本框 15"/>
-            <p:cNvSpPr txBox="1"/>
-            <p:nvPr/>
-          </p:nvSpPr>
-          <p:spPr>
-            <a:xfrm>
-              <a:off x="5563631" y="2617371"/>
-              <a:ext cx="7196455" cy="1014730"/>
-            </a:xfrm>
-            <a:prstGeom prst="rect">
-              <a:avLst/>
-            </a:prstGeom>
-            <a:noFill/>
-          </p:spPr>
-          <p:txBody>
-            <a:bodyPr wrap="square" rtlCol="0">
-              <a:spAutoFit/>
-            </a:bodyPr>
-            <a:lstStyle/>
-            <a:p>
-              <a:pPr algn="dist"/>
-              <a:r>
-                <a:rPr lang="zh-CN" altLang="en-US" sz="6000" dirty="0">
-                  <a:solidFill>
-                    <a:schemeClr val="tx1">
-                      <a:lumMod val="75000"/>
-                      <a:lumOff val="25000"/>
-                    </a:schemeClr>
-                  </a:solidFill>
-                  <a:cs typeface="+mn-ea"/>
-                  <a:sym typeface="+mn-lt"/>
-                </a:rPr>
-                <a:t>课题背景及研究</a:t>
-              </a:r>
-              <a:r>
-                <a:rPr lang="zh-CN" altLang="en-US" sz="6000" dirty="0">
-                  <a:solidFill>
-                    <a:schemeClr val="tx1">
-                      <a:lumMod val="75000"/>
-                      <a:lumOff val="25000"/>
-                    </a:schemeClr>
-                  </a:solidFill>
-                  <a:cs typeface="+mn-ea"/>
-                  <a:sym typeface="+mn-lt"/>
-                </a:rPr>
-                <a:t>意义</a:t>
-              </a:r>
-              <a:endParaRPr lang="zh-CN" altLang="en-US" sz="6000" dirty="0">
-                <a:solidFill>
-                  <a:schemeClr val="tx1">
-                    <a:lumMod val="75000"/>
-                    <a:lumOff val="25000"/>
-                  </a:schemeClr>
-                </a:solidFill>
-                <a:cs typeface="+mn-ea"/>
-                <a:sym typeface="+mn-lt"/>
-              </a:endParaRPr>
-            </a:p>
-          </p:txBody>
-        </p:sp>
-        <p:sp>
-          <p:nvSpPr>
-            <p:cNvPr id="17" name="文本框 16"/>
-            <p:cNvSpPr txBox="1"/>
-            <p:nvPr/>
-          </p:nvSpPr>
-          <p:spPr>
-            <a:xfrm>
-              <a:off x="5862081" y="3506076"/>
-              <a:ext cx="6477909" cy="253916"/>
-            </a:xfrm>
-            <a:prstGeom prst="rect">
-              <a:avLst/>
-            </a:prstGeom>
-            <a:noFill/>
-          </p:spPr>
-          <p:txBody>
-            <a:bodyPr wrap="square" rtlCol="0">
-              <a:spAutoFit/>
-            </a:bodyPr>
-            <a:lstStyle/>
-            <a:p>
-              <a:pPr algn="dist"/>
-              <a:r>
-                <a:rPr lang="en-US" altLang="zh-CN" sz="1050" dirty="0">
-                  <a:cs typeface="+mn-ea"/>
-                  <a:sym typeface="+mn-lt"/>
-                </a:rPr>
-                <a:t>RESEARCH BACKGROUND AND CURRENT SITUATION</a:t>
-              </a:r>
-              <a:endParaRPr lang="zh-CN" altLang="en-US" sz="1050" dirty="0">
-                <a:cs typeface="+mn-ea"/>
-                <a:sym typeface="+mn-lt"/>
-              </a:endParaRPr>
-            </a:p>
-          </p:txBody>
-        </p:sp>
-      </p:grpSp>
-      <p:sp>
-        <p:nvSpPr>
-          <p:cNvPr id="19" name="圆: 空心 18"/>
-          <p:cNvSpPr/>
-          <p:nvPr/>
-        </p:nvSpPr>
-        <p:spPr>
-          <a:xfrm>
-            <a:off x="10808543" y="5670073"/>
-            <a:ext cx="2766913" cy="2766913"/>
-          </a:xfrm>
-          <a:prstGeom prst="donut">
-            <a:avLst/>
-          </a:prstGeom>
-          <a:solidFill>
-            <a:srgbClr val="10507E"/>
-          </a:solidFill>
-          <a:ln>
-            <a:noFill/>
-          </a:ln>
-        </p:spPr>
-        <p:style>
-          <a:lnRef idx="2">
-            <a:schemeClr val="accent1">
-              <a:shade val="50000"/>
-            </a:schemeClr>
-          </a:lnRef>
-          <a:fillRef idx="1">
-            <a:schemeClr val="accent1"/>
-          </a:fillRef>
-          <a:effectRef idx="0">
-            <a:schemeClr val="accent1"/>
-          </a:effectRef>
-          <a:fontRef idx="minor">
-            <a:schemeClr val="lt1"/>
-          </a:fontRef>
-        </p:style>
-        <p:txBody>
-          <a:bodyPr rtlCol="0" anchor="ctr"/>
-          <a:lstStyle/>
-          <a:p>
-            <a:pPr algn="ctr"/>
-            <a:endParaRPr lang="zh-CN" altLang="en-US">
-              <a:solidFill>
-                <a:schemeClr val="tx1"/>
-              </a:solidFill>
-              <a:cs typeface="+mn-ea"/>
-              <a:sym typeface="+mn-lt"/>
-            </a:endParaRPr>
-          </a:p>
-        </p:txBody>
-      </p:sp>
-    </p:spTree>
-    <p:custDataLst>
-      <p:tags r:id="rId1"/>
-    </p:custDataLst>
-  </p:cSld>
-  <p:clrMapOvr>
-    <a:masterClrMapping/>
-  </p:clrMapOvr>
-  <mc:AlternateContent xmlns:mc="http://schemas.openxmlformats.org/markup-compatibility/2006">
-    <mc:Choice xmlns:p14="http://schemas.microsoft.com/office/powerpoint/2010/main" Requires="p14">
-      <p:transition spd="slow" p14:dur="1500" advTm="2420">
-        <p:random/>
-      </p:transition>
-    </mc:Choice>
-    <mc:Fallback>
-      <p:transition spd="slow" advTm="2420">
-        <p:random/>
-      </p:transition>
-    </mc:Fallback>
-  </mc:AlternateContent>
-  <p:timing>
-    <p:tnLst>
-      <p:par>
-        <p:cTn id="1" dur="indefinite" restart="never" nodeType="tmRoot">
-          <p:childTnLst>
-            <p:seq concurrent="1" nextAc="seek">
-              <p:cTn id="2" dur="indefinite" nodeType="mainSeq">
-                <p:childTnLst>
-                  <p:par>
-                    <p:cTn id="3" fill="hold">
-                      <p:stCondLst>
-                        <p:cond delay="indefinite"/>
-                      </p:stCondLst>
-                      <p:childTnLst>
-                        <p:par>
-                          <p:cTn id="4" fill="hold">
-                            <p:stCondLst>
-                              <p:cond delay="0"/>
-                            </p:stCondLst>
-                            <p:childTnLst>
-                              <p:par>
-                                <p:cTn id="5" presetID="47" presetClass="entr" presetSubtype="0" fill="hold" nodeType="clickEffect">
-                                  <p:stCondLst>
-                                    <p:cond delay="0"/>
-                                  </p:stCondLst>
-                                  <p:childTnLst>
-                                    <p:set>
-                                      <p:cBhvr>
-                                        <p:cTn id="6" dur="1" fill="hold">
-                                          <p:stCondLst>
-                                            <p:cond delay="0"/>
-                                          </p:stCondLst>
-                                        </p:cTn>
-                                        <p:tgtEl>
-                                          <p:spTgt spid="21"/>
-                                        </p:tgtEl>
-                                        <p:attrNameLst>
-                                          <p:attrName>style.visibility</p:attrName>
-                                        </p:attrNameLst>
-                                      </p:cBhvr>
-                                      <p:to>
-                                        <p:strVal val="visible"/>
-                                      </p:to>
-                                    </p:set>
-                                    <p:animEffect transition="in" filter="fade">
-                                      <p:cBhvr>
-                                        <p:cTn id="7" dur="1000"/>
-                                        <p:tgtEl>
-                                          <p:spTgt spid="21"/>
-                                        </p:tgtEl>
-                                      </p:cBhvr>
-                                    </p:animEffect>
-                                    <p:anim calcmode="lin" valueType="num">
-                                      <p:cBhvr>
-                                        <p:cTn id="8" dur="1000" fill="hold"/>
-                                        <p:tgtEl>
-                                          <p:spTgt spid="21"/>
-                                        </p:tgtEl>
-                                        <p:attrNameLst>
-                                          <p:attrName>ppt_x</p:attrName>
-                                        </p:attrNameLst>
-                                      </p:cBhvr>
-                                      <p:tavLst>
-                                        <p:tav tm="0">
-                                          <p:val>
-                                            <p:strVal val="#ppt_x"/>
-                                          </p:val>
-                                        </p:tav>
-                                        <p:tav tm="100000">
-                                          <p:val>
-                                            <p:strVal val="#ppt_x"/>
-                                          </p:val>
-                                        </p:tav>
-                                      </p:tavLst>
-                                    </p:anim>
-                                    <p:anim calcmode="lin" valueType="num">
-                                      <p:cBhvr>
-                                        <p:cTn id="9" dur="1000" fill="hold"/>
-                                        <p:tgtEl>
-                                          <p:spTgt spid="21"/>
-                                        </p:tgtEl>
-                                        <p:attrNameLst>
-                                          <p:attrName>ppt_y</p:attrName>
-                                        </p:attrNameLst>
-                                      </p:cBhvr>
-                                      <p:tavLst>
-                                        <p:tav tm="0">
-                                          <p:val>
-                                            <p:strVal val="#ppt_y-.1"/>
-                                          </p:val>
-                                        </p:tav>
-                                        <p:tav tm="100000">
-                                          <p:val>
-                                            <p:strVal val="#ppt_y"/>
-                                          </p:val>
-                                        </p:tav>
-                                      </p:tavLst>
-                                    </p:anim>
-                                  </p:childTnLst>
-                                </p:cTn>
-                              </p:par>
-                            </p:childTnLst>
-                          </p:cTn>
-                        </p:par>
-                      </p:childTnLst>
-                    </p:cTn>
-                  </p:par>
-                  <p:par>
-                    <p:cTn id="10" fill="hold">
-                      <p:stCondLst>
-                        <p:cond delay="indefinite"/>
-                      </p:stCondLst>
-                      <p:childTnLst>
-                        <p:par>
-                          <p:cTn id="11" fill="hold">
-                            <p:stCondLst>
-                              <p:cond delay="0"/>
-                            </p:stCondLst>
-                            <p:childTnLst>
-                              <p:par>
-                                <p:cTn id="12" presetID="22" presetClass="entr" presetSubtype="8" fill="hold" nodeType="clickEffect">
-                                  <p:stCondLst>
-                                    <p:cond delay="0"/>
-                                  </p:stCondLst>
-                                  <p:childTnLst>
-                                    <p:set>
-                                      <p:cBhvr>
-                                        <p:cTn id="13" dur="1" fill="hold">
-                                          <p:stCondLst>
-                                            <p:cond delay="0"/>
-                                          </p:stCondLst>
-                                        </p:cTn>
-                                        <p:tgtEl>
-                                          <p:spTgt spid="18"/>
-                                        </p:tgtEl>
-                                        <p:attrNameLst>
-                                          <p:attrName>style.visibility</p:attrName>
-                                        </p:attrNameLst>
-                                      </p:cBhvr>
-                                      <p:to>
-                                        <p:strVal val="visible"/>
-                                      </p:to>
-                                    </p:set>
-                                    <p:animEffect transition="in" filter="wipe(left)">
-                                      <p:cBhvr>
-                                        <p:cTn id="14" dur="500"/>
-                                        <p:tgtEl>
-                                          <p:spTgt spid="18"/>
-                                        </p:tgtEl>
-                                      </p:cBhvr>
-                                    </p:animEffect>
-                                  </p:childTnLst>
-                                </p:cTn>
-                              </p:par>
-                            </p:childTnLst>
-                          </p:cTn>
-                        </p:par>
-                      </p:childTnLst>
-                    </p:cTn>
-                  </p:par>
-                  <p:par>
-                    <p:cTn id="15" fill="hold">
-                      <p:stCondLst>
-                        <p:cond delay="indefinite"/>
-                      </p:stCondLst>
-                      <p:childTnLst>
-                        <p:par>
-                          <p:cTn id="16" fill="hold">
-                            <p:stCondLst>
-                              <p:cond delay="0"/>
-                            </p:stCondLst>
-                            <p:childTnLst>
-                              <p:par>
-                                <p:cTn id="17" presetID="42" presetClass="entr" presetSubtype="0" fill="hold" grpId="0" nodeType="clickEffect">
-                                  <p:stCondLst>
-                                    <p:cond delay="0"/>
-                                  </p:stCondLst>
-                                  <p:childTnLst>
-                                    <p:set>
-                                      <p:cBhvr>
-                                        <p:cTn id="18" dur="1" fill="hold">
-                                          <p:stCondLst>
-                                            <p:cond delay="0"/>
-                                          </p:stCondLst>
-                                        </p:cTn>
-                                        <p:tgtEl>
-                                          <p:spTgt spid="19"/>
-                                        </p:tgtEl>
-                                        <p:attrNameLst>
-                                          <p:attrName>style.visibility</p:attrName>
-                                        </p:attrNameLst>
-                                      </p:cBhvr>
-                                      <p:to>
-                                        <p:strVal val="visible"/>
-                                      </p:to>
-                                    </p:set>
-                                    <p:animEffect transition="in" filter="fade">
-                                      <p:cBhvr>
-                                        <p:cTn id="19" dur="1000"/>
-                                        <p:tgtEl>
-                                          <p:spTgt spid="19"/>
-                                        </p:tgtEl>
-                                      </p:cBhvr>
-                                    </p:animEffect>
-                                    <p:anim calcmode="lin" valueType="num">
-                                      <p:cBhvr>
-                                        <p:cTn id="20" dur="1000" fill="hold"/>
-                                        <p:tgtEl>
-                                          <p:spTgt spid="19"/>
-                                        </p:tgtEl>
-                                        <p:attrNameLst>
-                                          <p:attrName>ppt_x</p:attrName>
-                                        </p:attrNameLst>
-                                      </p:cBhvr>
-                                      <p:tavLst>
-                                        <p:tav tm="0">
-                                          <p:val>
-                                            <p:strVal val="#ppt_x"/>
-                                          </p:val>
-                                        </p:tav>
-                                        <p:tav tm="100000">
-                                          <p:val>
-                                            <p:strVal val="#ppt_x"/>
-                                          </p:val>
-                                        </p:tav>
-                                      </p:tavLst>
-                                    </p:anim>
-                                    <p:anim calcmode="lin" valueType="num">
-                                      <p:cBhvr>
-                                        <p:cTn id="21" dur="1000" fill="hold"/>
-                                        <p:tgtEl>
-                                          <p:spTgt spid="19"/>
-                                        </p:tgtEl>
-                                        <p:attrNameLst>
-                                          <p:attrName>ppt_y</p:attrName>
-                                        </p:attrNameLst>
-                                      </p:cBhvr>
-                                      <p:tavLst>
-                                        <p:tav tm="0">
-                                          <p:val>
-                                            <p:strVal val="#ppt_y+.1"/>
-                                          </p:val>
-                                        </p:tav>
-                                        <p:tav tm="100000">
-                                          <p:val>
-                                            <p:strVal val="#ppt_y"/>
-                                          </p:val>
-                                        </p:tav>
-                                      </p:tavLst>
-                                    </p:anim>
-                                  </p:childTnLst>
-                                </p:cTn>
-                              </p:par>
-                            </p:childTnLst>
-                          </p:cTn>
-                        </p:par>
-                      </p:childTnLst>
-                    </p:cTn>
-                  </p:par>
-                </p:childTnLst>
-              </p:cTn>
-              <p:prevCondLst>
-                <p:cond evt="onPrev" delay="0">
-                  <p:tgtEl>
-                    <p:sldTgt/>
-                  </p:tgtEl>
-                </p:cond>
-              </p:prevCondLst>
-              <p:nextCondLst>
-                <p:cond evt="onNext" delay="0">
-                  <p:tgtEl>
-                    <p:sldTgt/>
-                  </p:tgtEl>
-                </p:cond>
-              </p:nextCondLst>
-            </p:seq>
-          </p:childTnLst>
-        </p:cTn>
-      </p:par>
-    </p:tnLst>
-    <p:bldLst>
-      <p:bldP spid="19" grpId="0" animBg="1"/>
-    </p:bldLst>
-  </p:timing>
-</p:sld>
-</file>
-
-<file path=ppt/slides/slide30.xml><?xml version="1.0" encoding="utf-8"?>
 <p:sld xmlns:a="http://schemas.openxmlformats.org/drawingml/2006/main" xmlns:r="http://schemas.openxmlformats.org/officeDocument/2006/relationships" xmlns:p="http://schemas.openxmlformats.org/presentationml/2006/main">
   <p:cSld>
     <p:spTree>
@@ -27702,7 +26930,625 @@
 </p:sld>
 </file>
 
-<file path=ppt/slides/slide31.xml><?xml version="1.0" encoding="utf-8"?>
+<file path=ppt/slides/slide3.xml><?xml version="1.0" encoding="utf-8"?>
+<p:sld xmlns:a="http://schemas.openxmlformats.org/drawingml/2006/main" xmlns:r="http://schemas.openxmlformats.org/officeDocument/2006/relationships" xmlns:p="http://schemas.openxmlformats.org/presentationml/2006/main">
+  <p:cSld>
+    <p:spTree>
+      <p:nvGrpSpPr>
+        <p:cNvPr id="1" name=""/>
+        <p:cNvGrpSpPr/>
+        <p:nvPr/>
+      </p:nvGrpSpPr>
+      <p:grpSpPr>
+        <a:xfrm>
+          <a:off x="0" y="0"/>
+          <a:ext cx="0" cy="0"/>
+          <a:chOff x="0" y="0"/>
+          <a:chExt cx="0" cy="0"/>
+        </a:xfrm>
+      </p:grpSpPr>
+      <p:grpSp>
+        <p:nvGrpSpPr>
+          <p:cNvPr id="21" name="组合 20"/>
+          <p:cNvGrpSpPr/>
+          <p:nvPr/>
+        </p:nvGrpSpPr>
+        <p:grpSpPr>
+          <a:xfrm>
+            <a:off x="-2846530" y="-1770744"/>
+            <a:ext cx="8399978" cy="7688943"/>
+            <a:chOff x="-2846530" y="-1770744"/>
+            <a:chExt cx="8399978" cy="7688943"/>
+          </a:xfrm>
+        </p:grpSpPr>
+        <p:sp>
+          <p:nvSpPr>
+            <p:cNvPr id="2" name="椭圆 1"/>
+            <p:cNvSpPr/>
+            <p:nvPr/>
+          </p:nvSpPr>
+          <p:spPr>
+            <a:xfrm>
+              <a:off x="-2846530" y="-1770744"/>
+              <a:ext cx="7688943" cy="7688943"/>
+            </a:xfrm>
+            <a:prstGeom prst="ellipse">
+              <a:avLst/>
+            </a:prstGeom>
+            <a:solidFill>
+              <a:srgbClr val="D8EFFD"/>
+            </a:solidFill>
+            <a:ln>
+              <a:noFill/>
+            </a:ln>
+            <a:effectLst>
+              <a:outerShdw blurRad="279400" dist="38100" dir="2700000" sx="101000" sy="101000" algn="tl" rotWithShape="0">
+                <a:prstClr val="black">
+                  <a:alpha val="40000"/>
+                </a:prstClr>
+              </a:outerShdw>
+            </a:effectLst>
+          </p:spPr>
+          <p:style>
+            <a:lnRef idx="2">
+              <a:schemeClr val="accent1">
+                <a:shade val="50000"/>
+              </a:schemeClr>
+            </a:lnRef>
+            <a:fillRef idx="1">
+              <a:schemeClr val="accent1"/>
+            </a:fillRef>
+            <a:effectRef idx="0">
+              <a:schemeClr val="accent1"/>
+            </a:effectRef>
+            <a:fontRef idx="minor">
+              <a:schemeClr val="lt1"/>
+            </a:fontRef>
+          </p:style>
+          <p:txBody>
+            <a:bodyPr rtlCol="0" anchor="ctr"/>
+            <a:lstStyle/>
+            <a:p>
+              <a:pPr algn="ctr"/>
+              <a:endParaRPr lang="zh-CN" altLang="en-US">
+                <a:cs typeface="+mn-ea"/>
+                <a:sym typeface="+mn-lt"/>
+              </a:endParaRPr>
+            </a:p>
+          </p:txBody>
+        </p:sp>
+        <p:sp>
+          <p:nvSpPr>
+            <p:cNvPr id="15" name="文本框 14"/>
+            <p:cNvSpPr txBox="1"/>
+            <p:nvPr/>
+          </p:nvSpPr>
+          <p:spPr>
+            <a:xfrm>
+              <a:off x="-1214742" y="1161142"/>
+              <a:ext cx="6768190" cy="3770263"/>
+            </a:xfrm>
+            <a:prstGeom prst="rect">
+              <a:avLst/>
+            </a:prstGeom>
+            <a:noFill/>
+          </p:spPr>
+          <p:txBody>
+            <a:bodyPr wrap="square" rtlCol="0">
+              <a:spAutoFit/>
+            </a:bodyPr>
+            <a:lstStyle/>
+            <a:p>
+              <a:pPr algn="ctr"/>
+              <a:r>
+                <a:rPr lang="en-US" altLang="zh-CN" sz="23900" dirty="0">
+                  <a:solidFill>
+                    <a:srgbClr val="10507E"/>
+                  </a:solidFill>
+                  <a:effectLst>
+                    <a:outerShdw blurRad="63500" sx="101000" sy="101000" algn="ctr" rotWithShape="0">
+                      <a:prstClr val="black">
+                        <a:alpha val="40000"/>
+                      </a:prstClr>
+                    </a:outerShdw>
+                  </a:effectLst>
+                  <a:cs typeface="+mn-ea"/>
+                  <a:sym typeface="+mn-lt"/>
+                </a:rPr>
+                <a:t>01</a:t>
+              </a:r>
+              <a:endParaRPr lang="zh-CN" altLang="en-US" sz="23900" dirty="0">
+                <a:solidFill>
+                  <a:srgbClr val="10507E"/>
+                </a:solidFill>
+                <a:effectLst>
+                  <a:outerShdw blurRad="63500" sx="101000" sy="101000" algn="ctr" rotWithShape="0">
+                    <a:prstClr val="black">
+                      <a:alpha val="40000"/>
+                    </a:prstClr>
+                  </a:outerShdw>
+                </a:effectLst>
+                <a:cs typeface="+mn-ea"/>
+                <a:sym typeface="+mn-lt"/>
+              </a:endParaRPr>
+            </a:p>
+          </p:txBody>
+        </p:sp>
+      </p:grpSp>
+      <p:grpSp>
+        <p:nvGrpSpPr>
+          <p:cNvPr id="18" name="组合 17"/>
+          <p:cNvGrpSpPr/>
+          <p:nvPr/>
+        </p:nvGrpSpPr>
+        <p:grpSpPr>
+          <a:xfrm>
+            <a:off x="4842506" y="2474962"/>
+            <a:ext cx="7196455" cy="1142621"/>
+            <a:chOff x="5563631" y="2617371"/>
+            <a:chExt cx="7196455" cy="1142621"/>
+          </a:xfrm>
+        </p:grpSpPr>
+        <p:sp>
+          <p:nvSpPr>
+            <p:cNvPr id="16" name="文本框 15"/>
+            <p:cNvSpPr txBox="1"/>
+            <p:nvPr/>
+          </p:nvSpPr>
+          <p:spPr>
+            <a:xfrm>
+              <a:off x="5563631" y="2617371"/>
+              <a:ext cx="7196455" cy="1014730"/>
+            </a:xfrm>
+            <a:prstGeom prst="rect">
+              <a:avLst/>
+            </a:prstGeom>
+            <a:noFill/>
+          </p:spPr>
+          <p:txBody>
+            <a:bodyPr wrap="square" rtlCol="0">
+              <a:spAutoFit/>
+            </a:bodyPr>
+            <a:lstStyle/>
+            <a:p>
+              <a:pPr algn="dist"/>
+              <a:r>
+                <a:rPr lang="zh-CN" altLang="en-US" sz="6000" dirty="0">
+                  <a:solidFill>
+                    <a:schemeClr val="tx1">
+                      <a:lumMod val="75000"/>
+                      <a:lumOff val="25000"/>
+                    </a:schemeClr>
+                  </a:solidFill>
+                  <a:cs typeface="+mn-ea"/>
+                  <a:sym typeface="+mn-lt"/>
+                </a:rPr>
+                <a:t>课题背景及研究</a:t>
+              </a:r>
+              <a:r>
+                <a:rPr lang="zh-CN" altLang="en-US" sz="6000" dirty="0">
+                  <a:solidFill>
+                    <a:schemeClr val="tx1">
+                      <a:lumMod val="75000"/>
+                      <a:lumOff val="25000"/>
+                    </a:schemeClr>
+                  </a:solidFill>
+                  <a:cs typeface="+mn-ea"/>
+                  <a:sym typeface="+mn-lt"/>
+                </a:rPr>
+                <a:t>意义</a:t>
+              </a:r>
+              <a:endParaRPr lang="zh-CN" altLang="en-US" sz="6000" dirty="0">
+                <a:solidFill>
+                  <a:schemeClr val="tx1">
+                    <a:lumMod val="75000"/>
+                    <a:lumOff val="25000"/>
+                  </a:schemeClr>
+                </a:solidFill>
+                <a:cs typeface="+mn-ea"/>
+                <a:sym typeface="+mn-lt"/>
+              </a:endParaRPr>
+            </a:p>
+          </p:txBody>
+        </p:sp>
+        <p:sp>
+          <p:nvSpPr>
+            <p:cNvPr id="17" name="文本框 16"/>
+            <p:cNvSpPr txBox="1"/>
+            <p:nvPr/>
+          </p:nvSpPr>
+          <p:spPr>
+            <a:xfrm>
+              <a:off x="5862081" y="3506076"/>
+              <a:ext cx="6477909" cy="253916"/>
+            </a:xfrm>
+            <a:prstGeom prst="rect">
+              <a:avLst/>
+            </a:prstGeom>
+            <a:noFill/>
+          </p:spPr>
+          <p:txBody>
+            <a:bodyPr wrap="square" rtlCol="0">
+              <a:spAutoFit/>
+            </a:bodyPr>
+            <a:lstStyle/>
+            <a:p>
+              <a:pPr algn="dist"/>
+              <a:r>
+                <a:rPr lang="en-US" altLang="zh-CN" sz="1050" dirty="0">
+                  <a:cs typeface="+mn-ea"/>
+                  <a:sym typeface="+mn-lt"/>
+                </a:rPr>
+                <a:t>RESEARCH BACKGROUND AND CURRENT SITUATION</a:t>
+              </a:r>
+              <a:endParaRPr lang="zh-CN" altLang="en-US" sz="1050" dirty="0">
+                <a:cs typeface="+mn-ea"/>
+                <a:sym typeface="+mn-lt"/>
+              </a:endParaRPr>
+            </a:p>
+          </p:txBody>
+        </p:sp>
+      </p:grpSp>
+      <p:sp>
+        <p:nvSpPr>
+          <p:cNvPr id="19" name="圆: 空心 18"/>
+          <p:cNvSpPr/>
+          <p:nvPr/>
+        </p:nvSpPr>
+        <p:spPr>
+          <a:xfrm>
+            <a:off x="10808543" y="5670073"/>
+            <a:ext cx="2766913" cy="2766913"/>
+          </a:xfrm>
+          <a:prstGeom prst="donut">
+            <a:avLst/>
+          </a:prstGeom>
+          <a:solidFill>
+            <a:srgbClr val="10507E"/>
+          </a:solidFill>
+          <a:ln>
+            <a:noFill/>
+          </a:ln>
+        </p:spPr>
+        <p:style>
+          <a:lnRef idx="2">
+            <a:schemeClr val="accent1">
+              <a:shade val="50000"/>
+            </a:schemeClr>
+          </a:lnRef>
+          <a:fillRef idx="1">
+            <a:schemeClr val="accent1"/>
+          </a:fillRef>
+          <a:effectRef idx="0">
+            <a:schemeClr val="accent1"/>
+          </a:effectRef>
+          <a:fontRef idx="minor">
+            <a:schemeClr val="lt1"/>
+          </a:fontRef>
+        </p:style>
+        <p:txBody>
+          <a:bodyPr rtlCol="0" anchor="ctr"/>
+          <a:lstStyle/>
+          <a:p>
+            <a:pPr algn="ctr"/>
+            <a:endParaRPr lang="zh-CN" altLang="en-US">
+              <a:solidFill>
+                <a:schemeClr val="tx1"/>
+              </a:solidFill>
+              <a:cs typeface="+mn-ea"/>
+              <a:sym typeface="+mn-lt"/>
+            </a:endParaRPr>
+          </a:p>
+        </p:txBody>
+      </p:sp>
+    </p:spTree>
+    <p:custDataLst>
+      <p:tags r:id="rId1"/>
+    </p:custDataLst>
+  </p:cSld>
+  <p:clrMapOvr>
+    <a:masterClrMapping/>
+  </p:clrMapOvr>
+  <mc:AlternateContent xmlns:mc="http://schemas.openxmlformats.org/markup-compatibility/2006">
+    <mc:Choice xmlns:p14="http://schemas.microsoft.com/office/powerpoint/2010/main" Requires="p14">
+      <p:transition spd="slow" p14:dur="1500" advTm="2420">
+        <p:random/>
+      </p:transition>
+    </mc:Choice>
+    <mc:Fallback>
+      <p:transition spd="slow" advTm="2420">
+        <p:random/>
+      </p:transition>
+    </mc:Fallback>
+  </mc:AlternateContent>
+  <p:timing>
+    <p:tnLst>
+      <p:par>
+        <p:cTn id="1" dur="indefinite" restart="never" nodeType="tmRoot">
+          <p:childTnLst>
+            <p:seq concurrent="1" nextAc="seek">
+              <p:cTn id="2" dur="indefinite" nodeType="mainSeq">
+                <p:childTnLst>
+                  <p:par>
+                    <p:cTn id="3" fill="hold">
+                      <p:stCondLst>
+                        <p:cond delay="indefinite"/>
+                      </p:stCondLst>
+                      <p:childTnLst>
+                        <p:par>
+                          <p:cTn id="4" fill="hold">
+                            <p:stCondLst>
+                              <p:cond delay="0"/>
+                            </p:stCondLst>
+                            <p:childTnLst>
+                              <p:par>
+                                <p:cTn id="5" presetID="47" presetClass="entr" presetSubtype="0" fill="hold" nodeType="clickEffect">
+                                  <p:stCondLst>
+                                    <p:cond delay="0"/>
+                                  </p:stCondLst>
+                                  <p:childTnLst>
+                                    <p:set>
+                                      <p:cBhvr>
+                                        <p:cTn id="6" dur="1" fill="hold">
+                                          <p:stCondLst>
+                                            <p:cond delay="0"/>
+                                          </p:stCondLst>
+                                        </p:cTn>
+                                        <p:tgtEl>
+                                          <p:spTgt spid="21"/>
+                                        </p:tgtEl>
+                                        <p:attrNameLst>
+                                          <p:attrName>style.visibility</p:attrName>
+                                        </p:attrNameLst>
+                                      </p:cBhvr>
+                                      <p:to>
+                                        <p:strVal val="visible"/>
+                                      </p:to>
+                                    </p:set>
+                                    <p:animEffect transition="in" filter="fade">
+                                      <p:cBhvr>
+                                        <p:cTn id="7" dur="1000"/>
+                                        <p:tgtEl>
+                                          <p:spTgt spid="21"/>
+                                        </p:tgtEl>
+                                      </p:cBhvr>
+                                    </p:animEffect>
+                                    <p:anim calcmode="lin" valueType="num">
+                                      <p:cBhvr>
+                                        <p:cTn id="8" dur="1000" fill="hold"/>
+                                        <p:tgtEl>
+                                          <p:spTgt spid="21"/>
+                                        </p:tgtEl>
+                                        <p:attrNameLst>
+                                          <p:attrName>ppt_x</p:attrName>
+                                        </p:attrNameLst>
+                                      </p:cBhvr>
+                                      <p:tavLst>
+                                        <p:tav tm="0">
+                                          <p:val>
+                                            <p:strVal val="#ppt_x"/>
+                                          </p:val>
+                                        </p:tav>
+                                        <p:tav tm="100000">
+                                          <p:val>
+                                            <p:strVal val="#ppt_x"/>
+                                          </p:val>
+                                        </p:tav>
+                                      </p:tavLst>
+                                    </p:anim>
+                                    <p:anim calcmode="lin" valueType="num">
+                                      <p:cBhvr>
+                                        <p:cTn id="9" dur="1000" fill="hold"/>
+                                        <p:tgtEl>
+                                          <p:spTgt spid="21"/>
+                                        </p:tgtEl>
+                                        <p:attrNameLst>
+                                          <p:attrName>ppt_y</p:attrName>
+                                        </p:attrNameLst>
+                                      </p:cBhvr>
+                                      <p:tavLst>
+                                        <p:tav tm="0">
+                                          <p:val>
+                                            <p:strVal val="#ppt_y-.1"/>
+                                          </p:val>
+                                        </p:tav>
+                                        <p:tav tm="100000">
+                                          <p:val>
+                                            <p:strVal val="#ppt_y"/>
+                                          </p:val>
+                                        </p:tav>
+                                      </p:tavLst>
+                                    </p:anim>
+                                  </p:childTnLst>
+                                </p:cTn>
+                              </p:par>
+                            </p:childTnLst>
+                          </p:cTn>
+                        </p:par>
+                      </p:childTnLst>
+                    </p:cTn>
+                  </p:par>
+                  <p:par>
+                    <p:cTn id="10" fill="hold">
+                      <p:stCondLst>
+                        <p:cond delay="indefinite"/>
+                      </p:stCondLst>
+                      <p:childTnLst>
+                        <p:par>
+                          <p:cTn id="11" fill="hold">
+                            <p:stCondLst>
+                              <p:cond delay="0"/>
+                            </p:stCondLst>
+                            <p:childTnLst>
+                              <p:par>
+                                <p:cTn id="12" presetID="22" presetClass="entr" presetSubtype="8" fill="hold" nodeType="clickEffect">
+                                  <p:stCondLst>
+                                    <p:cond delay="0"/>
+                                  </p:stCondLst>
+                                  <p:childTnLst>
+                                    <p:set>
+                                      <p:cBhvr>
+                                        <p:cTn id="13" dur="1" fill="hold">
+                                          <p:stCondLst>
+                                            <p:cond delay="0"/>
+                                          </p:stCondLst>
+                                        </p:cTn>
+                                        <p:tgtEl>
+                                          <p:spTgt spid="18"/>
+                                        </p:tgtEl>
+                                        <p:attrNameLst>
+                                          <p:attrName>style.visibility</p:attrName>
+                                        </p:attrNameLst>
+                                      </p:cBhvr>
+                                      <p:to>
+                                        <p:strVal val="visible"/>
+                                      </p:to>
+                                    </p:set>
+                                    <p:animEffect transition="in" filter="wipe(left)">
+                                      <p:cBhvr>
+                                        <p:cTn id="14" dur="500"/>
+                                        <p:tgtEl>
+                                          <p:spTgt spid="18"/>
+                                        </p:tgtEl>
+                                      </p:cBhvr>
+                                    </p:animEffect>
+                                  </p:childTnLst>
+                                </p:cTn>
+                              </p:par>
+                            </p:childTnLst>
+                          </p:cTn>
+                        </p:par>
+                      </p:childTnLst>
+                    </p:cTn>
+                  </p:par>
+                  <p:par>
+                    <p:cTn id="15" fill="hold">
+                      <p:stCondLst>
+                        <p:cond delay="indefinite"/>
+                      </p:stCondLst>
+                      <p:childTnLst>
+                        <p:par>
+                          <p:cTn id="16" fill="hold">
+                            <p:stCondLst>
+                              <p:cond delay="0"/>
+                            </p:stCondLst>
+                            <p:childTnLst>
+                              <p:par>
+                                <p:cTn id="17" presetID="42" presetClass="entr" presetSubtype="0" fill="hold" grpId="0" nodeType="clickEffect">
+                                  <p:stCondLst>
+                                    <p:cond delay="0"/>
+                                  </p:stCondLst>
+                                  <p:childTnLst>
+                                    <p:set>
+                                      <p:cBhvr>
+                                        <p:cTn id="18" dur="1" fill="hold">
+                                          <p:stCondLst>
+                                            <p:cond delay="0"/>
+                                          </p:stCondLst>
+                                        </p:cTn>
+                                        <p:tgtEl>
+                                          <p:spTgt spid="19"/>
+                                        </p:tgtEl>
+                                        <p:attrNameLst>
+                                          <p:attrName>style.visibility</p:attrName>
+                                        </p:attrNameLst>
+                                      </p:cBhvr>
+                                      <p:to>
+                                        <p:strVal val="visible"/>
+                                      </p:to>
+                                    </p:set>
+                                    <p:animEffect transition="in" filter="fade">
+                                      <p:cBhvr>
+                                        <p:cTn id="19" dur="1000"/>
+                                        <p:tgtEl>
+                                          <p:spTgt spid="19"/>
+                                        </p:tgtEl>
+                                      </p:cBhvr>
+                                    </p:animEffect>
+                                    <p:anim calcmode="lin" valueType="num">
+                                      <p:cBhvr>
+                                        <p:cTn id="20" dur="1000" fill="hold"/>
+                                        <p:tgtEl>
+                                          <p:spTgt spid="19"/>
+                                        </p:tgtEl>
+                                        <p:attrNameLst>
+                                          <p:attrName>ppt_x</p:attrName>
+                                        </p:attrNameLst>
+                                      </p:cBhvr>
+                                      <p:tavLst>
+                                        <p:tav tm="0">
+                                          <p:val>
+                                            <p:strVal val="#ppt_x"/>
+                                          </p:val>
+                                        </p:tav>
+                                        <p:tav tm="100000">
+                                          <p:val>
+                                            <p:strVal val="#ppt_x"/>
+                                          </p:val>
+                                        </p:tav>
+                                      </p:tavLst>
+                                    </p:anim>
+                                    <p:anim calcmode="lin" valueType="num">
+                                      <p:cBhvr>
+                                        <p:cTn id="21" dur="1000" fill="hold"/>
+                                        <p:tgtEl>
+                                          <p:spTgt spid="19"/>
+                                        </p:tgtEl>
+                                        <p:attrNameLst>
+                                          <p:attrName>ppt_y</p:attrName>
+                                        </p:attrNameLst>
+                                      </p:cBhvr>
+                                      <p:tavLst>
+                                        <p:tav tm="0">
+                                          <p:val>
+                                            <p:strVal val="#ppt_y+.1"/>
+                                          </p:val>
+                                        </p:tav>
+                                        <p:tav tm="100000">
+                                          <p:val>
+                                            <p:strVal val="#ppt_y"/>
+                                          </p:val>
+                                        </p:tav>
+                                      </p:tavLst>
+                                    </p:anim>
+                                  </p:childTnLst>
+                                </p:cTn>
+                              </p:par>
+                            </p:childTnLst>
+                          </p:cTn>
+                        </p:par>
+                      </p:childTnLst>
+                    </p:cTn>
+                  </p:par>
+                </p:childTnLst>
+              </p:cTn>
+              <p:prevCondLst>
+                <p:cond evt="onPrev" delay="0">
+                  <p:tgtEl>
+                    <p:sldTgt/>
+                  </p:tgtEl>
+                </p:cond>
+              </p:prevCondLst>
+              <p:nextCondLst>
+                <p:cond evt="onNext" delay="0">
+                  <p:tgtEl>
+                    <p:sldTgt/>
+                  </p:tgtEl>
+                </p:cond>
+              </p:nextCondLst>
+            </p:seq>
+          </p:childTnLst>
+        </p:cTn>
+      </p:par>
+    </p:tnLst>
+    <p:bldLst>
+      <p:bldP spid="19" grpId="0" animBg="1"/>
+    </p:bldLst>
+  </p:timing>
+</p:sld>
+</file>
+
+<file path=ppt/slides/slide30.xml><?xml version="1.0" encoding="utf-8"?>
 <p:sld xmlns:a="http://schemas.openxmlformats.org/drawingml/2006/main" xmlns:r="http://schemas.openxmlformats.org/officeDocument/2006/relationships" xmlns:p="http://schemas.openxmlformats.org/presentationml/2006/main">
   <p:cSld>
     <p:spTree>
@@ -28797,7 +28643,46 @@
                 <a:cs typeface="+mn-ea"/>
                 <a:sym typeface="+mn-lt"/>
               </a:rPr>
-              <a:t>由于当今中国各类公司兴起，很难有一款适应所有行业的客户关系管理系统面世，且各个公司发展模式不同，企业对于系统的要求也不同。</a:t>
+              <a:t>目前即时通讯应用已经完善，微信和</a:t>
+            </a:r>
+            <a:r>
+              <a:rPr lang="en-US" altLang="zh-CN" sz="1400" spc="400" dirty="0">
+                <a:solidFill>
+                  <a:schemeClr val="tx1">
+                    <a:lumMod val="85000"/>
+                    <a:lumOff val="15000"/>
+                  </a:schemeClr>
+                </a:solidFill>
+                <a:cs typeface="+mn-ea"/>
+                <a:sym typeface="+mn-lt"/>
+              </a:rPr>
+              <a:t>QQ</a:t>
+            </a:r>
+            <a:r>
+              <a:rPr lang="zh-CN" altLang="en-US" sz="1400" spc="400" dirty="0">
+                <a:solidFill>
+                  <a:schemeClr val="tx1">
+                    <a:lumMod val="85000"/>
+                    <a:lumOff val="15000"/>
+                  </a:schemeClr>
+                </a:solidFill>
+                <a:cs typeface="+mn-ea"/>
+                <a:sym typeface="+mn-lt"/>
+              </a:rPr>
+              <a:t>等主流聊天软件，本应用最大的亮点就是可以跨平台使用，一套代码可以适应不同</a:t>
+            </a:r>
+            <a:r>
+              <a:rPr lang="zh-CN" altLang="en-US" sz="1400" spc="400" dirty="0">
+                <a:solidFill>
+                  <a:schemeClr val="tx1">
+                    <a:lumMod val="85000"/>
+                    <a:lumOff val="15000"/>
+                  </a:schemeClr>
+                </a:solidFill>
+                <a:cs typeface="+mn-ea"/>
+                <a:sym typeface="+mn-lt"/>
+              </a:rPr>
+              <a:t>平台</a:t>
             </a:r>
             <a:endParaRPr lang="zh-CN" altLang="en-US" sz="1400" spc="400" dirty="0">
               <a:solidFill>
@@ -28874,7 +28759,86 @@
         <p:spPr>
           <a:xfrm>
             <a:off x="6351905" y="3470910"/>
-            <a:ext cx="2509520" cy="1706880"/>
+            <a:ext cx="2509520" cy="2030095"/>
+          </a:xfrm>
+          <a:prstGeom prst="rect">
+            <a:avLst/>
+          </a:prstGeom>
+          <a:noFill/>
+        </p:spPr>
+        <p:txBody>
+          <a:bodyPr wrap="square" rtlCol="0">
+            <a:spAutoFit/>
+          </a:bodyPr>
+          <a:lstStyle/>
+          <a:p>
+            <a:pPr algn="l" fontAlgn="auto">
+              <a:lnSpc>
+                <a:spcPct val="150000"/>
+              </a:lnSpc>
+            </a:pPr>
+            <a:r>
+              <a:rPr lang="en-US" altLang="zh-CN" sz="1400" spc="400" dirty="0">
+                <a:solidFill>
+                  <a:schemeClr val="tx1">
+                    <a:lumMod val="85000"/>
+                    <a:lumOff val="15000"/>
+                  </a:schemeClr>
+                </a:solidFill>
+                <a:cs typeface="+mn-ea"/>
+                <a:sym typeface="+mn-lt"/>
+              </a:rPr>
+              <a:t>uni-app</a:t>
+            </a:r>
+            <a:r>
+              <a:rPr lang="zh-CN" altLang="en-US" sz="1400" spc="400" dirty="0">
+                <a:solidFill>
+                  <a:schemeClr val="tx1">
+                    <a:lumMod val="85000"/>
+                    <a:lumOff val="15000"/>
+                  </a:schemeClr>
+                </a:solidFill>
+                <a:cs typeface="+mn-ea"/>
+                <a:sym typeface="+mn-lt"/>
+              </a:rPr>
+              <a:t>发展多年，生态系统非常丰富，有很多开发项目的插件和工具库可以使用，可以快速开发一套跨平台的</a:t>
+            </a:r>
+            <a:r>
+              <a:rPr lang="zh-CN" altLang="en-US" sz="1400" spc="400" dirty="0">
+                <a:solidFill>
+                  <a:schemeClr val="tx1">
+                    <a:lumMod val="85000"/>
+                    <a:lumOff val="15000"/>
+                  </a:schemeClr>
+                </a:solidFill>
+                <a:cs typeface="+mn-ea"/>
+                <a:sym typeface="+mn-lt"/>
+              </a:rPr>
+              <a:t>应用</a:t>
+            </a:r>
+            <a:endParaRPr lang="zh-CN" altLang="en-US" sz="1400" spc="400" dirty="0">
+              <a:solidFill>
+                <a:schemeClr val="tx1">
+                  <a:lumMod val="85000"/>
+                  <a:lumOff val="15000"/>
+                </a:schemeClr>
+              </a:solidFill>
+              <a:cs typeface="+mn-ea"/>
+              <a:sym typeface="+mn-lt"/>
+            </a:endParaRPr>
+          </a:p>
+        </p:txBody>
+      </p:sp>
+      <p:sp>
+        <p:nvSpPr>
+          <p:cNvPr id="31" name="文本框 30"/>
+          <p:cNvSpPr txBox="1"/>
+          <p:nvPr/>
+        </p:nvSpPr>
+        <p:spPr>
+          <a:xfrm>
+            <a:off x="9021445" y="3470910"/>
+            <a:ext cx="2509520" cy="2030095"/>
           </a:xfrm>
           <a:prstGeom prst="rect">
             <a:avLst/>
@@ -28903,48 +28867,21 @@
                 <a:cs typeface="+mn-ea"/>
                 <a:sym typeface="+mn-lt"/>
               </a:rPr>
-              <a:t>Java语言经过多年的发展，已经相当成熟，未来的发展相当不错，可以将Java作为主学语言。</a:t>
+              <a:t>本应用后端使用的是</a:t>
             </a:r>
-            <a:endParaRPr lang="zh-CN" altLang="en-US" sz="1400" spc="400" dirty="0">
-              <a:solidFill>
-                <a:schemeClr val="tx1">
-                  <a:lumMod val="85000"/>
-                  <a:lumOff val="15000"/>
-                </a:schemeClr>
-              </a:solidFill>
-              <a:cs typeface="+mn-ea"/>
-              <a:sym typeface="+mn-lt"/>
-            </a:endParaRPr>
-          </a:p>
-        </p:txBody>
-      </p:sp>
-      <p:sp>
-        <p:nvSpPr>
-          <p:cNvPr id="31" name="文本框 30"/>
-          <p:cNvSpPr txBox="1"/>
-          <p:nvPr/>
-        </p:nvSpPr>
-        <p:spPr>
-          <a:xfrm>
-            <a:off x="9021445" y="3470910"/>
-            <a:ext cx="2509520" cy="2999740"/>
-          </a:xfrm>
-          <a:prstGeom prst="rect">
-            <a:avLst/>
-          </a:prstGeom>
-          <a:noFill/>
-        </p:spPr>
-        <p:txBody>
-          <a:bodyPr wrap="square" rtlCol="0">
-            <a:spAutoFit/>
-          </a:bodyPr>
-          <a:lstStyle/>
-          <a:p>
-            <a:pPr algn="l" fontAlgn="auto">
-              <a:lnSpc>
-                <a:spcPct val="150000"/>
-              </a:lnSpc>
-            </a:pPr>
+            <a:r>
+              <a:rPr lang="en-US" altLang="zh-CN" sz="1400" spc="400" dirty="0">
+                <a:solidFill>
+                  <a:schemeClr val="tx1">
+                    <a:lumMod val="85000"/>
+                    <a:lumOff val="15000"/>
+                  </a:schemeClr>
+                </a:solidFill>
+                <a:cs typeface="+mn-ea"/>
+                <a:sym typeface="+mn-lt"/>
+              </a:rPr>
+              <a:t>Node.js,</a:t>
+            </a:r>
             <a:r>
               <a:rPr lang="zh-CN" altLang="en-US" sz="1400" spc="400" dirty="0">
                 <a:solidFill>
@@ -28956,7 +28893,59 @@
                 <a:cs typeface="+mn-ea"/>
                 <a:sym typeface="+mn-lt"/>
               </a:rPr>
-              <a:t>本系统使用的是MySQL数据库，MySQL数据库使用简单，SQL语句对于一名Java开发工程师来说也是相当重要的，必须要把数据库学好，这样在未来的开发工作中才能事半功倍</a:t>
+              <a:t>使用了事件驱动、非阻塞</a:t>
+            </a:r>
+            <a:r>
+              <a:rPr lang="en-US" altLang="zh-CN" sz="1400" spc="400" dirty="0">
+                <a:solidFill>
+                  <a:schemeClr val="tx1">
+                    <a:lumMod val="85000"/>
+                    <a:lumOff val="15000"/>
+                  </a:schemeClr>
+                </a:solidFill>
+                <a:cs typeface="+mn-ea"/>
+                <a:sym typeface="+mn-lt"/>
+              </a:rPr>
+              <a:t>I/O</a:t>
+            </a:r>
+            <a:r>
+              <a:rPr lang="zh-CN" altLang="en-US" sz="1400" spc="400" dirty="0">
+                <a:solidFill>
+                  <a:schemeClr val="tx1">
+                    <a:lumMod val="85000"/>
+                    <a:lumOff val="15000"/>
+                  </a:schemeClr>
+                </a:solidFill>
+                <a:cs typeface="+mn-ea"/>
+                <a:sym typeface="+mn-lt"/>
+              </a:rPr>
+              <a:t>模型，使其轻量且高效，特别适合处理高并发的</a:t>
+            </a:r>
+            <a:r>
+              <a:rPr lang="en-US" altLang="zh-CN" sz="1400" spc="400" dirty="0">
+                <a:solidFill>
+                  <a:schemeClr val="tx1">
+                    <a:lumMod val="85000"/>
+                    <a:lumOff val="15000"/>
+                  </a:schemeClr>
+                </a:solidFill>
+                <a:cs typeface="+mn-ea"/>
+                <a:sym typeface="+mn-lt"/>
+              </a:rPr>
+              <a:t>Web</a:t>
+            </a:r>
+            <a:r>
+              <a:rPr lang="zh-CN" altLang="en-US" sz="1400" spc="400" dirty="0">
+                <a:solidFill>
+                  <a:schemeClr val="tx1">
+                    <a:lumMod val="85000"/>
+                    <a:lumOff val="15000"/>
+                  </a:schemeClr>
+                </a:solidFill>
+                <a:cs typeface="+mn-ea"/>
+                <a:sym typeface="+mn-lt"/>
+              </a:rPr>
+              <a:t>应用</a:t>
             </a:r>
             <a:endParaRPr lang="zh-CN" altLang="en-US" sz="1400" spc="400" dirty="0">
               <a:solidFill>
@@ -29720,7 +29709,7 @@
 </p:sld>
 </file>
 
-<file path=ppt/slides/slide32.xml><?xml version="1.0" encoding="utf-8"?>
+<file path=ppt/slides/slide31.xml><?xml version="1.0" encoding="utf-8"?>
 <p:sld xmlns:a="http://schemas.openxmlformats.org/drawingml/2006/main" xmlns:r="http://schemas.openxmlformats.org/officeDocument/2006/relationships" xmlns:p="http://schemas.openxmlformats.org/presentationml/2006/main">
   <p:cSld>
     <p:spTree>
@@ -30377,7 +30366,7 @@
 </p:sld>
 </file>
 
-<file path=ppt/slides/slide33.xml><?xml version="1.0" encoding="utf-8"?>
+<file path=ppt/slides/slide32.xml><?xml version="1.0" encoding="utf-8"?>
 <p:sld xmlns:a="http://schemas.openxmlformats.org/drawingml/2006/main" xmlns:r="http://schemas.openxmlformats.org/officeDocument/2006/relationships" xmlns:p="http://schemas.openxmlformats.org/presentationml/2006/main">
   <p:cSld>
     <p:spTree>
@@ -30640,7 +30629,7 @@
         <p:spPr>
           <a:xfrm>
             <a:off x="520700" y="1337310"/>
-            <a:ext cx="10617200" cy="5037455"/>
+            <a:ext cx="10617200" cy="4011295"/>
           </a:xfrm>
           <a:prstGeom prst="rect">
             <a:avLst/>
@@ -30663,66 +30652,34 @@
         <p:txBody>
           <a:bodyPr rtlCol="0" anchor="ctr"/>
           <a:p>
-            <a:pPr algn="l" fontAlgn="auto"/>
+            <a:pPr indent="457200" algn="l" fontAlgn="auto"/>
             <a:r>
               <a:rPr lang="zh-CN" altLang="en-US"/>
-              <a:t>大学四年时光飞逝，转眼已经到了要出社会的时候，对未来充满期待。</a:t>
+              <a:t>大学四年时光飞逝，在完成基于</a:t>
+            </a:r>
+            <a:r>
+              <a:rPr lang="en-US" altLang="zh-CN"/>
+              <a:t> Uni - app </a:t>
+            </a:r>
+            <a:r>
+              <a:rPr lang="zh-CN" altLang="en-US"/>
+              <a:t>的即时通讯项目毕业论文之际，满心感恩，诸多情谊，难以言表。</a:t>
             </a:r>
             <a:endParaRPr lang="zh-CN" altLang="en-US"/>
           </a:p>
           <a:p>
-            <a:pPr algn="l" fontAlgn="auto"/>
+            <a:pPr indent="457200" algn="l" fontAlgn="auto"/>
             <a:r>
               <a:rPr lang="zh-CN" altLang="en-US"/>
-              <a:t>在这里，我要感谢指导老师朱老师，在我做毕业设计的过程中，老师一直给予我无私的帮助，经常牺牲自己的休息时间来帮我解答问题，特别感谢老师对于我的帮助！</a:t>
+              <a:t>我要诚挚感谢我的导师，从项目选题的迷茫阶段，到系统结构设计的反复雕琢，再到测试环节的细致把控，导师始终以渊博的专业知识和丰富的经验为我指引方向。每当我在研究中陷入困境，导师总能耐心倾听，给出建设性的意见，助我拨云见日。导师严谨的治学态度与精益求精的精神，如明灯照亮我学术探索之路，激励我不断追求卓越，为论文的顺利完成奠定了坚实基础。</a:t>
             </a:r>
             <a:endParaRPr lang="zh-CN" altLang="en-US"/>
           </a:p>
           <a:p>
-            <a:pPr algn="l" fontAlgn="auto"/>
+            <a:pPr indent="457200" algn="l" fontAlgn="auto"/>
             <a:r>
               <a:rPr lang="zh-CN" altLang="en-US"/>
-              <a:t>感谢我的父母，把我抚养成人，供我学习，感谢父母的养育之恩。</a:t>
-            </a:r>
-            <a:endParaRPr lang="zh-CN" altLang="en-US"/>
-          </a:p>
-          <a:p>
-            <a:pPr algn="l" fontAlgn="auto"/>
-            <a:r>
-              <a:rPr lang="zh-CN" altLang="en-US"/>
-              <a:t>感谢生命中遇到的所有老师，是你们的淳淳教诲让我完成学业，谢谢所有老师们。</a:t>
-            </a:r>
-            <a:endParaRPr lang="zh-CN" altLang="en-US"/>
-          </a:p>
-          <a:p>
-            <a:pPr algn="l" fontAlgn="auto"/>
-            <a:r>
-              <a:rPr lang="zh-CN" altLang="en-US"/>
-              <a:t>感谢室友们四年来的朝夕相伴。</a:t>
-            </a:r>
-            <a:endParaRPr lang="zh-CN" altLang="en-US"/>
-          </a:p>
-          <a:p>
-            <a:pPr algn="l" fontAlgn="auto"/>
-            <a:r>
-              <a:rPr lang="zh-CN" altLang="en-US"/>
-              <a:t>感谢生命中遇到的所有人。</a:t>
-            </a:r>
-            <a:endParaRPr lang="zh-CN" altLang="en-US"/>
-          </a:p>
-          <a:p>
-            <a:pPr algn="l" fontAlgn="auto"/>
-            <a:r>
-              <a:rPr lang="zh-CN" altLang="en-US"/>
-              <a:t>感谢母校。</a:t>
-            </a:r>
-            <a:endParaRPr lang="zh-CN" altLang="en-US"/>
-          </a:p>
-          <a:p>
-            <a:pPr algn="l" fontAlgn="auto"/>
-            <a:r>
-              <a:rPr lang="zh-CN" altLang="en-US"/>
-              <a:t>感谢祖国。</a:t>
+              <a:t>还要感谢我的同窗好友们，在项目开发过程中，我们相互交流、彼此启发。面对技术难题时，大家围坐一起热烈讨论，思维的火花在碰撞中绽放。那些一起熬夜调试代码、攻克难关的日子，成为我学术生涯中难忘的回忆。他们的陪伴与鼓励，让枯燥的研究工作充满温暖与力量，也让我在团队协作中收获了宝贵的经验。</a:t>
             </a:r>
             <a:endParaRPr lang="zh-CN" altLang="en-US"/>
           </a:p>
@@ -31258,7 +31215,7 @@
 </p:sld>
 </file>
 
-<file path=ppt/slides/slide34.xml><?xml version="1.0" encoding="utf-8"?>
+<file path=ppt/slides/slide33.xml><?xml version="1.0" encoding="utf-8"?>
 <p:sld xmlns:a="http://schemas.openxmlformats.org/drawingml/2006/main" xmlns:r="http://schemas.openxmlformats.org/officeDocument/2006/relationships" xmlns:p="http://schemas.openxmlformats.org/presentationml/2006/main">
   <p:cSld>
     <p:spTree>
@@ -40476,41 +40433,35 @@
 
 <file path=ppt/tags/tag92.xml><?xml version="1.0" encoding="utf-8"?>
 <p:tagLst xmlns:p="http://schemas.openxmlformats.org/presentationml/2006/main">
-  <p:tag name="TIMING" val="|0.3|0.4|0.4|0.4|0.3|0.2|0.2"/>
+  <p:tag name="TIMING" val="|0.3|0.3|0.3|0.4"/>
 </p:tagLst>
 </file>
 
 <file path=ppt/tags/tag93.xml><?xml version="1.0" encoding="utf-8"?>
 <p:tagLst xmlns:p="http://schemas.openxmlformats.org/presentationml/2006/main">
-  <p:tag name="TIMING" val="|0.3|0.3|0.3|0.4"/>
+  <p:tag name="TIMING" val="|0.3|0.2|0.1|0.2|0.3|0.2|0.3|0.3|0.3|0.3|0.3|0.3"/>
 </p:tagLst>
 </file>
 
 <file path=ppt/tags/tag94.xml><?xml version="1.0" encoding="utf-8"?>
 <p:tagLst xmlns:p="http://schemas.openxmlformats.org/presentationml/2006/main">
-  <p:tag name="TIMING" val="|0.3|0.2|0.1|0.2|0.3|0.2|0.3|0.3|0.3|0.3|0.3|0.3"/>
+  <p:tag name="TIMING" val="|0.3|0.3|0.3|0.4"/>
 </p:tagLst>
 </file>
 
 <file path=ppt/tags/tag95.xml><?xml version="1.0" encoding="utf-8"?>
 <p:tagLst xmlns:p="http://schemas.openxmlformats.org/presentationml/2006/main">
-  <p:tag name="TIMING" val="|0.3|0.3|0.3|0.4"/>
+  <p:tag name="TIMING" val="|0.3|0.3|0.3|0.3|0.3"/>
 </p:tagLst>
 </file>
 
 <file path=ppt/tags/tag96.xml><?xml version="1.0" encoding="utf-8"?>
 <p:tagLst xmlns:p="http://schemas.openxmlformats.org/presentationml/2006/main">
-  <p:tag name="TIMING" val="|0.3|0.3|0.3|0.3|0.3"/>
+  <p:tag name="TIMING" val="|0.3|0.2|0.2|0.2"/>
 </p:tagLst>
 </file>
 
 <file path=ppt/tags/tag97.xml><?xml version="1.0" encoding="utf-8"?>
-<p:tagLst xmlns:p="http://schemas.openxmlformats.org/presentationml/2006/main">
-  <p:tag name="TIMING" val="|0.3|0.2|0.2|0.2"/>
-</p:tagLst>
-</file>
-
-<file path=ppt/tags/tag98.xml><?xml version="1.0" encoding="utf-8"?>
 <p:tagLst xmlns:p="http://schemas.openxmlformats.org/presentationml/2006/main">
   <p:tag name="COMMONDATA" val="eyJoZGlkIjoiN2E1NmRjNzhlMjE3N2Q3ZjMyMTFkMWQ1ZmM5MTFhNjYifQ=="/>
   <p:tag name="KSO_WPP_MARK_KEY" val="67848404-78da-4217-895d-bac7dbbd95fd"/>

--- a/毕业论文/毕业答辩(系统开发）.pptx
+++ b/毕业论文/毕业答辩(系统开发）.pptx
@@ -10743,7 +10743,7 @@
                     <a:cs typeface="+mn-ea"/>
                     <a:sym typeface="+mn-lt"/>
                   </a:rPr>
-                  <a:t>版本信息</a:t>
+                  <a:t>好友信息</a:t>
                 </a:r>
                 <a:r>
                   <a:rPr lang="zh-CN" altLang="en-US" sz="2400" dirty="0">
@@ -10756,7 +10756,7 @@
                     <a:cs typeface="+mn-ea"/>
                     <a:sym typeface="+mn-lt"/>
                   </a:rPr>
-                  <a:t>查看</a:t>
+                  <a:t>设置</a:t>
                 </a:r>
                 <a:endParaRPr lang="zh-CN" altLang="en-US" sz="2400" dirty="0">
                   <a:solidFill>
@@ -10813,7 +10813,7 @@
                     <a:cs typeface="+mn-ea"/>
                     <a:sym typeface="+mn-lt"/>
                   </a:rPr>
-                  <a:t>可以查看本应用的一下基本信息，包括版本号，发布者姓名</a:t>
+                  <a:t>对已经成为好友的联系人，可以对其设置备注和</a:t>
                 </a:r>
                 <a:r>
                   <a:rPr lang="zh-CN" altLang="en-US" sz="1400" spc="300" dirty="0">
@@ -10826,7 +10826,7 @@
                     <a:cs typeface="+mn-ea"/>
                     <a:sym typeface="+mn-lt"/>
                   </a:rPr>
-                  <a:t>等。</a:t>
+                  <a:t>分组</a:t>
                 </a:r>
                 <a:endParaRPr lang="zh-CN" altLang="en-US" sz="1400" spc="300" dirty="0">
                   <a:solidFill>
@@ -37380,7 +37380,7 @@
           <p:spPr>
             <a:xfrm>
               <a:off x="670418" y="3116273"/>
-              <a:ext cx="2056702" cy="860425"/>
+              <a:ext cx="2056702" cy="1116965"/>
             </a:xfrm>
             <a:prstGeom prst="rect">
               <a:avLst/>
@@ -37509,6 +37509,36 @@
                   <a:sym typeface="+mn-lt"/>
                 </a:rPr>
                 <a:t>删除</a:t>
+              </a:r>
+              <a:endParaRPr lang="zh-CN" altLang="en-US" sz="1400" spc="300" dirty="0">
+                <a:solidFill>
+                  <a:schemeClr val="tx1">
+                    <a:lumMod val="75000"/>
+                    <a:lumOff val="25000"/>
+                  </a:schemeClr>
+                </a:solidFill>
+                <a:cs typeface="+mn-ea"/>
+                <a:sym typeface="+mn-lt"/>
+              </a:endParaRPr>
+            </a:p>
+            <a:p>
+              <a:pPr algn="ctr">
+                <a:lnSpc>
+                  <a:spcPts val="2000"/>
+                </a:lnSpc>
+              </a:pPr>
+              <a:r>
+                <a:rPr lang="zh-CN" altLang="en-US" sz="1400" spc="300" dirty="0">
+                  <a:solidFill>
+                    <a:schemeClr val="tx1">
+                      <a:lumMod val="75000"/>
+                      <a:lumOff val="25000"/>
+                    </a:schemeClr>
+                  </a:solidFill>
+                  <a:cs typeface="+mn-ea"/>
+                  <a:sym typeface="+mn-lt"/>
+                </a:rPr>
+                <a:t>好友设置</a:t>
               </a:r>
               <a:endParaRPr lang="zh-CN" altLang="en-US" sz="1400" spc="300" dirty="0">
                 <a:solidFill>

--- a/毕业论文/毕业答辩(系统开发）.pptx
+++ b/毕业论文/毕业答辩(系统开发）.pptx
@@ -32272,7 +32272,7 @@
                   <a:cs typeface="+mn-ea"/>
                   <a:sym typeface="+mn-lt"/>
                 </a:rPr>
-                <a:t>肖志伟</a:t>
+                <a:t>刘哲</a:t>
               </a:r>
               <a:endParaRPr lang="zh-CN" altLang="en-US" sz="1600" dirty="0" smtClean="0">
                 <a:cs typeface="+mn-ea"/>

--- a/毕业论文/毕业答辩(系统开发）.pptx
+++ b/毕业论文/毕业答辩(系统开发）.pptx
@@ -37409,7 +37409,7 @@
                   <a:cs typeface="+mn-ea"/>
                   <a:sym typeface="+mn-lt"/>
                 </a:rPr>
-                <a:t>用户注册与</a:t>
+                <a:t>注册与</a:t>
               </a:r>
               <a:r>
                 <a:rPr lang="zh-CN" altLang="en-US" sz="1400" spc="300" dirty="0">
@@ -37452,7 +37452,7 @@
                   <a:cs typeface="+mn-ea"/>
                   <a:sym typeface="+mn-lt"/>
                 </a:rPr>
-                <a:t>用户信息</a:t>
+                <a:t>个人信息</a:t>
               </a:r>
               <a:r>
                 <a:rPr lang="zh-CN" altLang="en-US" sz="1400" spc="300" dirty="0">
@@ -37538,7 +37538,20 @@
                   <a:cs typeface="+mn-ea"/>
                   <a:sym typeface="+mn-lt"/>
                 </a:rPr>
-                <a:t>好友设置</a:t>
+                <a:t>好友</a:t>
+              </a:r>
+              <a:r>
+                <a:rPr lang="zh-CN" altLang="en-US" sz="1400" spc="300" dirty="0">
+                  <a:solidFill>
+                    <a:schemeClr val="tx1">
+                      <a:lumMod val="75000"/>
+                      <a:lumOff val="25000"/>
+                    </a:schemeClr>
+                  </a:solidFill>
+                  <a:cs typeface="+mn-ea"/>
+                  <a:sym typeface="+mn-lt"/>
+                </a:rPr>
+                <a:t>信息设置</a:t>
               </a:r>
               <a:endParaRPr lang="zh-CN" altLang="en-US" sz="1400" spc="300" dirty="0">
                 <a:solidFill>
@@ -38600,7 +38613,7 @@
                   <a:cs typeface="+mn-ea"/>
                   <a:sym typeface="+mn-lt"/>
                 </a:rPr>
-                <a:t>设置</a:t>
+                <a:t>查看</a:t>
               </a:r>
               <a:endParaRPr lang="zh-CN" altLang="en-US" sz="1400" spc="300" dirty="0">
                 <a:solidFill>
